--- a/assets/files/templates/SafePlum_sop_training.pptx
+++ b/assets/files/templates/SafePlum_sop_training.pptx
@@ -15,9 +15,11 @@
     <p:sldId id="263" r:id="rId9"/>
     <p:sldId id="264" r:id="rId10"/>
     <p:sldId id="265" r:id="rId11"/>
+    <p:sldId id="266" r:id="rId12"/>
+    <p:sldId id="267" r:id="rId13"/>
   </p:sldIdLst>
   <p:notesMasterIdLst>
-    <p:notesMasterId r:id="rId12"/>
+    <p:notesMasterId r:id="rId14"/>
   </p:notesMasterIdLst>
   <p:sldSz cx="12192000" cy="6858000"/>
   <p:notesSz cx="6858000" cy="12192000"/>
@@ -599,7 +601,7 @@
           <a:p>
             <a:r>
               <a:rPr lang="en-US" dirty="0"/>
-              <a:t>채용 시·작업내용 변경 시 교육 내용에는 '기계·기구의 위험성과 작업의 순서 및 동선', '작업 개시 전 점검', '사고 발생 시 긴급조치'가 들어 있습니다(산업안전보건법 시행규칙 별표 5). 교육시간·대상은 교육일지로 따로 기록하세요.</a:t>
+              <a:t>비상정지 스위치 위치는 현장에서 직접 눌러 보게 하는 것이 가장 좋습니다(컨베이어 비상정지장치: 안전보건규칙 제192조). 사내 비상연락 번호를 꼭 바꿔 적으세요.</a:t>
             </a:r>
             <a:endParaRPr lang="en-US" dirty="0"/>
           </a:p>
@@ -623,6 +625,182 @@
             <a:fld id="{F7021451-1387-4CA6-816F-3879F97B5CBC}" type="slidenum">
               <a:rPr lang="en-US"/>
               <a:t>10</a:t>
+            </a:fld>
+            <a:endParaRPr lang="en-US"/>
+          </a:p>
+        </p:txBody>
+      </p:sp>
+    </p:spTree>
+    <p:extLst>
+      <p:ext uri="{BB962C8B-B14F-4D97-AF65-F5344CB8AC3E}">
+        <p14:creationId xmlns:p14="http://schemas.microsoft.com/office/powerpoint/2010/main" val="1024086991"/>
+      </p:ext>
+    </p:extLst>
+  </p:cSld>
+  <p:clrMapOvr>
+    <a:masterClrMapping/>
+  </p:clrMapOvr>
+</p:notes>
+</file>
+
+<file path=ppt/notesSlides/notesSlide11.xml><?xml version="1.0" encoding="utf-8"?>
+<p:notes xmlns:a="http://schemas.openxmlformats.org/drawingml/2006/main" xmlns:r="http://schemas.openxmlformats.org/officeDocument/2006/relationships" xmlns:p="http://schemas.openxmlformats.org/presentationml/2006/main">
+  <p:cSld>
+    <p:spTree>
+      <p:nvGrpSpPr>
+        <p:cNvPr id="1" name=""/>
+        <p:cNvGrpSpPr/>
+        <p:nvPr/>
+      </p:nvGrpSpPr>
+      <p:grpSpPr>
+        <a:xfrm>
+          <a:off x="0" y="0"/>
+          <a:ext cx="0" cy="0"/>
+          <a:chOff x="0" y="0"/>
+          <a:chExt cx="0" cy="0"/>
+        </a:xfrm>
+      </p:grpSpPr>
+      <p:sp>
+        <p:nvSpPr>
+          <p:cNvPr id="2" name="Slide Image Placeholder 1"/>
+          <p:cNvSpPr>
+            <a:spLocks noGrp="1" noRot="1" noChangeAspect="1"/>
+          </p:cNvSpPr>
+          <p:nvPr>
+            <p:ph type="sldImg"/>
+          </p:nvPr>
+        </p:nvSpPr>
+        <p:spPr/>
+      </p:sp>
+      <p:sp>
+        <p:nvSpPr>
+          <p:cNvPr id="3" name="Notes Placeholder 2"/>
+          <p:cNvSpPr>
+            <a:spLocks noGrp="1"/>
+          </p:cNvSpPr>
+          <p:nvPr>
+            <p:ph type="body" idx="1"/>
+          </p:nvPr>
+        </p:nvSpPr>
+        <p:spPr/>
+        <p:txBody>
+          <a:bodyPr/>
+          <a:lstStyle/>
+          <a:p>
+            <a:r>
+              <a:rPr lang="en-US" dirty="0"/>
+              <a:t>정답 — Q1. 본인 자물쇠 잠금 + 꼬리표 부착 / Q2. 자물쇠를 건 본인만 / Q3. 비상정지 스위치 → 주변에 알림. 틀린 사람은 그 자리에서 다시 설명하고, 교육 확인서의 '이해 확인' 칸에 '재교육'으로 표시하세요.</a:t>
+            </a:r>
+            <a:endParaRPr lang="en-US" dirty="0"/>
+          </a:p>
+        </p:txBody>
+      </p:sp>
+      <p:sp>
+        <p:nvSpPr>
+          <p:cNvPr id="4" name="Slide Number Placeholder 3"/>
+          <p:cNvSpPr>
+            <a:spLocks noGrp="1"/>
+          </p:cNvSpPr>
+          <p:nvPr>
+            <p:ph type="sldNum" sz="quarter" idx="10"/>
+          </p:nvPr>
+        </p:nvSpPr>
+        <p:spPr/>
+        <p:txBody>
+          <a:bodyPr/>
+          <a:lstStyle/>
+          <a:p>
+            <a:fld id="{F7021451-1387-4CA6-816F-3879F97B5CBC}" type="slidenum">
+              <a:rPr lang="en-US"/>
+              <a:t>11</a:t>
+            </a:fld>
+            <a:endParaRPr lang="en-US"/>
+          </a:p>
+        </p:txBody>
+      </p:sp>
+    </p:spTree>
+    <p:extLst>
+      <p:ext uri="{BB962C8B-B14F-4D97-AF65-F5344CB8AC3E}">
+        <p14:creationId xmlns:p14="http://schemas.microsoft.com/office/powerpoint/2010/main" val="1024086991"/>
+      </p:ext>
+    </p:extLst>
+  </p:cSld>
+  <p:clrMapOvr>
+    <a:masterClrMapping/>
+  </p:clrMapOvr>
+</p:notes>
+</file>
+
+<file path=ppt/notesSlides/notesSlide12.xml><?xml version="1.0" encoding="utf-8"?>
+<p:notes xmlns:a="http://schemas.openxmlformats.org/drawingml/2006/main" xmlns:r="http://schemas.openxmlformats.org/officeDocument/2006/relationships" xmlns:p="http://schemas.openxmlformats.org/presentationml/2006/main">
+  <p:cSld>
+    <p:spTree>
+      <p:nvGrpSpPr>
+        <p:cNvPr id="1" name=""/>
+        <p:cNvGrpSpPr/>
+        <p:nvPr/>
+      </p:nvGrpSpPr>
+      <p:grpSpPr>
+        <a:xfrm>
+          <a:off x="0" y="0"/>
+          <a:ext cx="0" cy="0"/>
+          <a:chOff x="0" y="0"/>
+          <a:chExt cx="0" cy="0"/>
+        </a:xfrm>
+      </p:grpSpPr>
+      <p:sp>
+        <p:nvSpPr>
+          <p:cNvPr id="2" name="Slide Image Placeholder 1"/>
+          <p:cNvSpPr>
+            <a:spLocks noGrp="1" noRot="1" noChangeAspect="1"/>
+          </p:cNvSpPr>
+          <p:nvPr>
+            <p:ph type="sldImg"/>
+          </p:nvPr>
+        </p:nvSpPr>
+        <p:spPr/>
+      </p:sp>
+      <p:sp>
+        <p:nvSpPr>
+          <p:cNvPr id="3" name="Notes Placeholder 2"/>
+          <p:cNvSpPr>
+            <a:spLocks noGrp="1"/>
+          </p:cNvSpPr>
+          <p:nvPr>
+            <p:ph type="body" idx="1"/>
+          </p:nvPr>
+        </p:nvSpPr>
+        <p:spPr/>
+        <p:txBody>
+          <a:bodyPr/>
+          <a:lstStyle/>
+          <a:p>
+            <a:r>
+              <a:rPr lang="en-US" dirty="0"/>
+              <a:t>채용 시·작업내용 변경 시 교육 내용에는 '기계·기구의 위험성과 작업의 순서 및 동선', '작업 개시 전 점검', '사고 발생 시 긴급조치'가 들어 있습니다(산업안전보건법 시행규칙 별표 5). 교육시간·대상은 교육일지로 따로 기록하세요.</a:t>
+            </a:r>
+            <a:endParaRPr lang="en-US" dirty="0"/>
+          </a:p>
+        </p:txBody>
+      </p:sp>
+      <p:sp>
+        <p:nvSpPr>
+          <p:cNvPr id="4" name="Slide Number Placeholder 3"/>
+          <p:cNvSpPr>
+            <a:spLocks noGrp="1"/>
+          </p:cNvSpPr>
+          <p:nvPr>
+            <p:ph type="sldNum" sz="quarter" idx="10"/>
+          </p:nvPr>
+        </p:nvSpPr>
+        <p:spPr/>
+        <p:txBody>
+          <a:bodyPr/>
+          <a:lstStyle/>
+          <a:p>
+            <a:fld id="{F7021451-1387-4CA6-816F-3879F97B5CBC}" type="slidenum">
+              <a:rPr lang="en-US"/>
+              <a:t>12</a:t>
             </a:fld>
             <a:endParaRPr lang="en-US"/>
           </a:p>
@@ -1215,7 +1393,7 @@
           <a:p>
             <a:r>
               <a:rPr lang="en-US" dirty="0"/>
-              <a:t>비상정지 스위치 위치는 현장에서 직접 눌러 보게 하는 것이 가장 좋습니다(컨베이어 비상정지장치: 안전보건규칙 제192조). 사내 비상연락 번호를 꼭 바꿔 적으세요.</a:t>
+              <a:t>작업중지 기준은 '이 상황이면 누구라도 멈춘다'는 약속입니다. 근로자가 멈췄을 때 탓하지 않는다는 것을 관리감독자가 직접 말해 주세요. 사업주는 급박한 위험이 있다고 믿을 만한 합리적인 이유로 작업을 중지·대피한 근로자에게 해고나 그 밖의 불리한 처우를 해서는 안 됩니다(법 제52조제4항).</a:t>
             </a:r>
             <a:endParaRPr lang="en-US" dirty="0"/>
           </a:p>
@@ -1303,7 +1481,7 @@
           <a:p>
             <a:r>
               <a:rPr lang="en-US" dirty="0"/>
-              <a:t>정답 — Q1. 본인 자물쇠 잠금 + 꼬리표 부착 / Q2. 자물쇠를 건 본인만 / Q3. 비상정지 스위치 → 주변에 알림. 틀린 사람은 그 자리에서 다시 설명하고, 교육 확인서의 '이해 확인' 칸에 '재교육'으로 표시하세요.</a:t>
+              <a:t>시운전 전에 이 네 가지를 함께 확인하면 '덮개 없이 가동'과 '공구가 벨트에 말려 드는' 사고를 막을 수 있습니다.</a:t>
             </a:r>
             <a:endParaRPr lang="en-US" dirty="0"/>
           </a:p>
@@ -2102,7 +2280,7 @@
                   <a:srgbClr val="C9D3E3"/>
                 </a:solidFill>
               </a:rPr>
-              <a:t>잠금·표지로 끼임 사고를 막는 6단계</a:t>
+              <a:t>잠금·표지로 끼임 사고를 막는 6단계와 작업중지 기준</a:t>
             </a:r>
             <a:endParaRPr lang="en-US" sz="1800" dirty="0"/>
           </a:p>
@@ -2655,7 +2833,7 @@
                   <a:schemeClr val="tx2"/>
                 </a:solidFill>
               </a:rPr>
-              <a:t>교육 확인과 이 자료 고쳐 쓰는 법</a:t>
+              <a:t>이상·비상 시 이렇게</a:t>
             </a:r>
             <a:endParaRPr lang="en-US" sz="2600" dirty="0"/>
           </a:p>
@@ -2663,26 +2841,66 @@
       </p:sp>
       <p:sp>
         <p:nvSpPr>
-          <p:cNvPr id="3" name="방법_1"/>
-          <p:cNvSpPr/>
-          <p:nvPr/>
-        </p:nvSpPr>
-        <p:spPr>
-          <a:xfrm>
-            <a:off x="548640" y="1325880"/>
-            <a:ext cx="2567864" cy="3429000"/>
+          <p:cNvPr id="3" name="Text 1"/>
+          <p:cNvSpPr txBox="1"/>
+          <p:nvPr/>
+        </p:nvSpPr>
+        <p:spPr>
+          <a:xfrm>
+            <a:off x="9631375" y="457200"/>
+            <a:ext cx="2011680" cy="347472"/>
           </a:xfrm>
           <a:prstGeom prst="roundRect">
             <a:avLst>
-              <a:gd name="adj" fmla="val 4273"/>
+              <a:gd name="adj" fmla="val 50000"/>
             </a:avLst>
           </a:prstGeom>
           <a:solidFill>
             <a:srgbClr val="F2F4F7"/>
+          </a:solidFill>
+          <a:ln/>
+        </p:spPr>
+        <p:txBody>
+          <a:bodyPr wrap="square" lIns="0" tIns="0" rIns="0" bIns="0" rtlCol="0" anchor="ctr"/>
+          <a:lstStyle/>
+          <a:p>
+            <a:pPr algn="ctr" indent="0" marL="0">
+              <a:buNone/>
+            </a:pPr>
+            <a:r>
+              <a:rPr lang="en-US" sz="1200" b="1" dirty="0">
+                <a:solidFill>
+                  <a:srgbClr val="475467"/>
+                </a:solidFill>
+              </a:rPr>
+              <a:t>8. 비상 조치</a:t>
+            </a:r>
+            <a:endParaRPr lang="en-US" sz="1200" dirty="0"/>
+          </a:p>
+        </p:txBody>
+      </p:sp>
+      <p:sp>
+        <p:nvSpPr>
+          <p:cNvPr id="4" name="비상_1"/>
+          <p:cNvSpPr/>
+          <p:nvPr/>
+        </p:nvSpPr>
+        <p:spPr>
+          <a:xfrm>
+            <a:off x="548640" y="1554480"/>
+            <a:ext cx="2377440" cy="3200400"/>
+          </a:xfrm>
+          <a:prstGeom prst="roundRect">
+            <a:avLst>
+              <a:gd name="adj" fmla="val 4615"/>
+            </a:avLst>
+          </a:prstGeom>
+          <a:solidFill>
+            <a:srgbClr val="FEF3F2"/>
           </a:solidFill>
           <a:ln w="12700">
             <a:solidFill>
-              <a:srgbClr val="F2F4F7"/>
+              <a:srgbClr val="FECDCA"/>
             </a:solidFill>
             <a:prstDash val="solid"/>
           </a:ln>
@@ -2690,24 +2908,24 @@
       </p:sp>
       <p:sp>
         <p:nvSpPr>
-          <p:cNvPr id="4" name="방법아이콘_1_dot"/>
+          <p:cNvPr id="5" name="비상아이콘_1_dot"/>
           <p:cNvSpPr/>
           <p:nvPr/>
         </p:nvSpPr>
         <p:spPr>
           <a:xfrm>
-            <a:off x="822960" y="1645920"/>
-            <a:ext cx="640080" cy="640080"/>
+            <a:off x="1280160" y="1874520"/>
+            <a:ext cx="914400" cy="914400"/>
           </a:xfrm>
           <a:prstGeom prst="ellipse">
             <a:avLst/>
           </a:prstGeom>
           <a:solidFill>
-            <a:srgbClr val="FFC400"/>
+            <a:srgbClr val="D92D20"/>
           </a:solidFill>
           <a:ln w="12700">
             <a:solidFill>
-              <a:srgbClr val="FFC400"/>
+              <a:srgbClr val="D92D20"/>
             </a:solidFill>
             <a:prstDash val="solid"/>
           </a:ln>
@@ -2715,7 +2933,7 @@
       </p:sp>
       <p:pic>
         <p:nvPicPr>
-          <p:cNvPr id="5" name="방법아이콘_1_icon" descr="preencoded.png">    </p:cNvPr>
+          <p:cNvPr id="6" name="비상아이콘_1_icon" descr="preencoded.png">    </p:cNvPr>
           <p:cNvPicPr>
             <a:picLocks noChangeAspect="1"/>
           </p:cNvPicPr>
@@ -2729,8 +2947,8 @@
         </p:blipFill>
         <p:spPr>
           <a:xfrm>
-            <a:off x="976579" y="1799539"/>
-            <a:ext cx="332842" cy="332842"/>
+            <a:off x="1499616" y="2093976"/>
+            <a:ext cx="475488" cy="475488"/>
           </a:xfrm>
           <a:prstGeom prst="rect">
             <a:avLst/>
@@ -2739,35 +2957,35 @@
       </p:pic>
       <p:sp>
         <p:nvSpPr>
-          <p:cNvPr id="6" name="Text 3"/>
-          <p:cNvSpPr txBox="1"/>
-          <p:nvPr/>
-        </p:nvSpPr>
-        <p:spPr>
-          <a:xfrm>
-            <a:off x="2247824" y="1673352"/>
-            <a:ext cx="594360" cy="457200"/>
-          </a:xfrm>
-          <a:prstGeom prst="rect">
-            <a:avLst/>
-          </a:prstGeom>
-          <a:noFill/>
-          <a:ln/>
-        </p:spPr>
-        <p:txBody>
-          <a:bodyPr wrap="square" lIns="0" tIns="0" rIns="0" bIns="0" rtlCol="0" anchor="ctr"/>
-          <a:lstStyle/>
-          <a:p>
-            <a:pPr algn="r" indent="0" marL="0">
+          <p:cNvPr id="7" name="Text 4"/>
+          <p:cNvSpPr txBox="1"/>
+          <p:nvPr/>
+        </p:nvSpPr>
+        <p:spPr>
+          <a:xfrm>
+            <a:off x="685800" y="2971800"/>
+            <a:ext cx="2103120" cy="502920"/>
+          </a:xfrm>
+          <a:prstGeom prst="rect">
+            <a:avLst/>
+          </a:prstGeom>
+          <a:noFill/>
+          <a:ln/>
+        </p:spPr>
+        <p:txBody>
+          <a:bodyPr wrap="square" lIns="0" tIns="0" rIns="0" bIns="0" rtlCol="0" anchor="ctr"/>
+          <a:lstStyle/>
+          <a:p>
+            <a:pPr algn="ctr" indent="0" marL="0">
               <a:buNone/>
             </a:pPr>
             <a:r>
               <a:rPr lang="en-US" sz="2200" b="1" dirty="0">
                 <a:solidFill>
-                  <a:srgbClr val="D0D5DD"/>
-                </a:solidFill>
-              </a:rPr>
-              <a:t>01</a:t>
+                  <a:schemeClr val="tx2"/>
+                </a:solidFill>
+              </a:rPr>
+              <a:t>멈춘다</a:t>
             </a:r>
             <a:endParaRPr lang="en-US" sz="2200" dirty="0"/>
           </a:p>
@@ -2775,50 +2993,14 @@
       </p:sp>
       <p:sp>
         <p:nvSpPr>
-          <p:cNvPr id="7" name="Text 4"/>
-          <p:cNvSpPr txBox="1"/>
-          <p:nvPr/>
-        </p:nvSpPr>
-        <p:spPr>
-          <a:xfrm>
-            <a:off x="822960" y="2514600"/>
-            <a:ext cx="2019224" cy="411480"/>
-          </a:xfrm>
-          <a:prstGeom prst="rect">
-            <a:avLst/>
-          </a:prstGeom>
-          <a:noFill/>
-          <a:ln/>
-        </p:spPr>
-        <p:txBody>
-          <a:bodyPr wrap="square" lIns="0" tIns="0" rIns="0" bIns="0" rtlCol="0" anchor="ctr"/>
-          <a:lstStyle/>
-          <a:p>
-            <a:pPr indent="0" marL="0">
-              <a:buNone/>
-            </a:pPr>
-            <a:r>
-              <a:rPr lang="en-US" sz="1700" b="1" dirty="0">
-                <a:solidFill>
-                  <a:schemeClr val="tx2"/>
-                </a:solidFill>
-              </a:rPr>
-              <a:t>교육 확인 서명</a:t>
-            </a:r>
-            <a:endParaRPr lang="en-US" sz="1700" dirty="0"/>
-          </a:p>
-        </p:txBody>
-      </p:sp>
-      <p:sp>
-        <p:nvSpPr>
-          <p:cNvPr id="8" name="Text 5"/>
-          <p:cNvSpPr txBox="1"/>
-          <p:nvPr/>
-        </p:nvSpPr>
-        <p:spPr>
-          <a:xfrm>
-            <a:off x="822960" y="3017520"/>
-            <a:ext cx="2019224" cy="1645920"/>
+          <p:cNvPr id="8" name="비상설명_1"/>
+          <p:cNvSpPr txBox="1"/>
+          <p:nvPr/>
+        </p:nvSpPr>
+        <p:spPr>
+          <a:xfrm>
+            <a:off x="685800" y="3566160"/>
+            <a:ext cx="2103120" cy="1005840"/>
           </a:xfrm>
           <a:prstGeom prst="rect">
             <a:avLst/>
@@ -2830,76 +3012,24 @@
           <a:bodyPr wrap="square" lIns="0" tIns="0" rIns="0" bIns="0" rtlCol="0" anchor="t"/>
           <a:lstStyle/>
           <a:p>
-            <a:pPr indent="0" marL="0">
-              <a:buNone/>
-            </a:pPr>
-            <a:r>
-              <a:rPr lang="en-US" sz="1300" dirty="0">
+            <a:pPr algn="ctr" indent="0" marL="0">
+              <a:buNone/>
+            </a:pPr>
+            <a:r>
+              <a:rPr lang="en-US" sz="1350" dirty="0">
                 <a:solidFill>
                   <a:srgbClr val="475467"/>
                 </a:solidFill>
               </a:rPr>
-              <a:t>교육이 끝나면 이해도 질문 결과와 참석자 서명을 남깁니다. SafePlum 표준안전작업절차서 작성기나 엑셀 양식의 '교육 확인 서명부'를 쓰세요.</a:t>
-            </a:r>
-            <a:endParaRPr lang="en-US" sz="1300" dirty="0"/>
-          </a:p>
-        </p:txBody>
-      </p:sp>
-      <p:sp>
-        <p:nvSpPr>
-          <p:cNvPr id="9" name="방법_2"/>
-          <p:cNvSpPr/>
-          <p:nvPr/>
-        </p:nvSpPr>
-        <p:spPr>
-          <a:xfrm>
-            <a:off x="3390824" y="1325880"/>
-            <a:ext cx="2567864" cy="3429000"/>
-          </a:xfrm>
-          <a:prstGeom prst="roundRect">
-            <a:avLst>
-              <a:gd name="adj" fmla="val 4273"/>
-            </a:avLst>
-          </a:prstGeom>
-          <a:solidFill>
-            <a:srgbClr val="F2F4F7"/>
-          </a:solidFill>
-          <a:ln w="12700">
-            <a:solidFill>
-              <a:srgbClr val="F2F4F7"/>
-            </a:solidFill>
-            <a:prstDash val="solid"/>
-          </a:ln>
-        </p:spPr>
-      </p:sp>
-      <p:sp>
-        <p:nvSpPr>
-          <p:cNvPr id="10" name="방법아이콘_2_dot"/>
-          <p:cNvSpPr/>
-          <p:nvPr/>
-        </p:nvSpPr>
-        <p:spPr>
-          <a:xfrm>
-            <a:off x="3665144" y="1645920"/>
-            <a:ext cx="640080" cy="640080"/>
-          </a:xfrm>
-          <a:prstGeom prst="ellipse">
-            <a:avLst/>
-          </a:prstGeom>
-          <a:solidFill>
-            <a:srgbClr val="FFC400"/>
-          </a:solidFill>
-          <a:ln w="12700">
-            <a:solidFill>
-              <a:srgbClr val="FFC400"/>
-            </a:solidFill>
-            <a:prstDash val="solid"/>
-          </a:ln>
-        </p:spPr>
+              <a:t>가장 가까운 비상정지 스위치</a:t>
+            </a:r>
+            <a:endParaRPr lang="en-US" sz="1350" dirty="0"/>
+          </a:p>
+        </p:txBody>
       </p:sp>
       <p:pic>
         <p:nvPicPr>
-          <p:cNvPr id="11" name="방법아이콘_2_icon" descr="preencoded.png">    </p:cNvPr>
+          <p:cNvPr id="9" name="Image 1" descr="preencoded.png">    </p:cNvPr>
           <p:cNvPicPr>
             <a:picLocks noChangeAspect="1"/>
           </p:cNvPicPr>
@@ -2913,8 +3043,8 @@
         </p:blipFill>
         <p:spPr>
           <a:xfrm>
-            <a:off x="3818763" y="1799539"/>
-            <a:ext cx="332842" cy="332842"/>
+            <a:off x="3034741" y="3017520"/>
+            <a:ext cx="310896" cy="310896"/>
           </a:xfrm>
           <a:prstGeom prst="rect">
             <a:avLst/>
@@ -2923,126 +3053,18 @@
       </p:pic>
       <p:sp>
         <p:nvSpPr>
-          <p:cNvPr id="12" name="Text 8"/>
-          <p:cNvSpPr txBox="1"/>
-          <p:nvPr/>
-        </p:nvSpPr>
-        <p:spPr>
-          <a:xfrm>
-            <a:off x="5090008" y="1673352"/>
-            <a:ext cx="594360" cy="457200"/>
-          </a:xfrm>
-          <a:prstGeom prst="rect">
-            <a:avLst/>
-          </a:prstGeom>
-          <a:noFill/>
-          <a:ln/>
-        </p:spPr>
-        <p:txBody>
-          <a:bodyPr wrap="square" lIns="0" tIns="0" rIns="0" bIns="0" rtlCol="0" anchor="ctr"/>
-          <a:lstStyle/>
-          <a:p>
-            <a:pPr algn="r" indent="0" marL="0">
-              <a:buNone/>
-            </a:pPr>
-            <a:r>
-              <a:rPr lang="en-US" sz="2200" b="1" dirty="0">
-                <a:solidFill>
-                  <a:srgbClr val="D0D5DD"/>
-                </a:solidFill>
-              </a:rPr>
-              <a:t>02</a:t>
-            </a:r>
-            <a:endParaRPr lang="en-US" sz="2200" dirty="0"/>
-          </a:p>
-        </p:txBody>
-      </p:sp>
-      <p:sp>
-        <p:nvSpPr>
-          <p:cNvPr id="13" name="Text 9"/>
-          <p:cNvSpPr txBox="1"/>
-          <p:nvPr/>
-        </p:nvSpPr>
-        <p:spPr>
-          <a:xfrm>
-            <a:off x="3665144" y="2514600"/>
-            <a:ext cx="2019224" cy="411480"/>
-          </a:xfrm>
-          <a:prstGeom prst="rect">
-            <a:avLst/>
-          </a:prstGeom>
-          <a:noFill/>
-          <a:ln/>
-        </p:spPr>
-        <p:txBody>
-          <a:bodyPr wrap="square" lIns="0" tIns="0" rIns="0" bIns="0" rtlCol="0" anchor="ctr"/>
-          <a:lstStyle/>
-          <a:p>
-            <a:pPr indent="0" marL="0">
-              <a:buNone/>
-            </a:pPr>
-            <a:r>
-              <a:rPr lang="en-US" sz="1700" b="1" dirty="0">
-                <a:solidFill>
-                  <a:schemeClr val="tx2"/>
-                </a:solidFill>
-              </a:rPr>
-              <a:t>작업 바꾸기</a:t>
-            </a:r>
-            <a:endParaRPr lang="en-US" sz="1700" dirty="0"/>
-          </a:p>
-        </p:txBody>
-      </p:sp>
-      <p:sp>
-        <p:nvSpPr>
-          <p:cNvPr id="14" name="Text 10"/>
-          <p:cNvSpPr txBox="1"/>
-          <p:nvPr/>
-        </p:nvSpPr>
-        <p:spPr>
-          <a:xfrm>
-            <a:off x="3665144" y="3017520"/>
-            <a:ext cx="2019224" cy="1645920"/>
-          </a:xfrm>
-          <a:prstGeom prst="rect">
-            <a:avLst/>
-          </a:prstGeom>
-          <a:noFill/>
-          <a:ln/>
-        </p:spPr>
-        <p:txBody>
-          <a:bodyPr wrap="square" lIns="0" tIns="0" rIns="0" bIns="0" rtlCol="0" anchor="t"/>
-          <a:lstStyle/>
-          <a:p>
-            <a:pPr indent="0" marL="0">
-              <a:buNone/>
-            </a:pPr>
-            <a:r>
-              <a:rPr lang="en-US" sz="1300" dirty="0">
-                <a:solidFill>
-                  <a:srgbClr val="475467"/>
-                </a:solidFill>
-              </a:rPr>
-              <a:t>표지·개요·단계 장의 글자를 사업장 작업으로 바꿉니다. 단계가 더 있으면 '작업 절차' 장을 Ctrl+D로 복제하세요.</a:t>
-            </a:r>
-            <a:endParaRPr lang="en-US" sz="1300" dirty="0"/>
-          </a:p>
-        </p:txBody>
-      </p:sp>
-      <p:sp>
-        <p:nvSpPr>
-          <p:cNvPr id="15" name="방법_3"/>
+          <p:cNvPr id="10" name="비상_2"/>
           <p:cNvSpPr/>
           <p:nvPr/>
         </p:nvSpPr>
         <p:spPr>
           <a:xfrm>
-            <a:off x="6233008" y="1325880"/>
-            <a:ext cx="2567864" cy="3429000"/>
+            <a:off x="3454298" y="1554480"/>
+            <a:ext cx="2377440" cy="3200400"/>
           </a:xfrm>
           <a:prstGeom prst="roundRect">
             <a:avLst>
-              <a:gd name="adj" fmla="val 4273"/>
+              <a:gd name="adj" fmla="val 4615"/>
             </a:avLst>
           </a:prstGeom>
           <a:solidFill>
@@ -3058,14 +3080,14 @@
       </p:sp>
       <p:sp>
         <p:nvSpPr>
-          <p:cNvPr id="16" name="방법아이콘_3_dot"/>
+          <p:cNvPr id="11" name="비상아이콘_2_dot"/>
           <p:cNvSpPr/>
           <p:nvPr/>
         </p:nvSpPr>
         <p:spPr>
           <a:xfrm>
-            <a:off x="6507328" y="1645920"/>
-            <a:ext cx="640080" cy="640080"/>
+            <a:off x="4185818" y="1874520"/>
+            <a:ext cx="914400" cy="914400"/>
           </a:xfrm>
           <a:prstGeom prst="ellipse">
             <a:avLst/>
@@ -3083,7 +3105,7 @@
       </p:sp>
       <p:pic>
         <p:nvPicPr>
-          <p:cNvPr id="17" name="방법아이콘_3_icon" descr="preencoded.png">    </p:cNvPr>
+          <p:cNvPr id="12" name="비상아이콘_2_icon" descr="preencoded.png">    </p:cNvPr>
           <p:cNvPicPr>
             <a:picLocks noChangeAspect="1"/>
           </p:cNvPicPr>
@@ -3097,8 +3119,8 @@
         </p:blipFill>
         <p:spPr>
           <a:xfrm>
-            <a:off x="6660947" y="1799539"/>
-            <a:ext cx="332842" cy="332842"/>
+            <a:off x="4405274" y="2093976"/>
+            <a:ext cx="475488" cy="475488"/>
           </a:xfrm>
           <a:prstGeom prst="rect">
             <a:avLst/>
@@ -3107,35 +3129,35 @@
       </p:pic>
       <p:sp>
         <p:nvSpPr>
-          <p:cNvPr id="18" name="Text 13"/>
-          <p:cNvSpPr txBox="1"/>
-          <p:nvPr/>
-        </p:nvSpPr>
-        <p:spPr>
-          <a:xfrm>
-            <a:off x="7932191" y="1673352"/>
-            <a:ext cx="594360" cy="457200"/>
-          </a:xfrm>
-          <a:prstGeom prst="rect">
-            <a:avLst/>
-          </a:prstGeom>
-          <a:noFill/>
-          <a:ln/>
-        </p:spPr>
-        <p:txBody>
-          <a:bodyPr wrap="square" lIns="0" tIns="0" rIns="0" bIns="0" rtlCol="0" anchor="ctr"/>
-          <a:lstStyle/>
-          <a:p>
-            <a:pPr algn="r" indent="0" marL="0">
+          <p:cNvPr id="13" name="Text 8"/>
+          <p:cNvSpPr txBox="1"/>
+          <p:nvPr/>
+        </p:nvSpPr>
+        <p:spPr>
+          <a:xfrm>
+            <a:off x="3591458" y="2971800"/>
+            <a:ext cx="2103120" cy="502920"/>
+          </a:xfrm>
+          <a:prstGeom prst="rect">
+            <a:avLst/>
+          </a:prstGeom>
+          <a:noFill/>
+          <a:ln/>
+        </p:spPr>
+        <p:txBody>
+          <a:bodyPr wrap="square" lIns="0" tIns="0" rIns="0" bIns="0" rtlCol="0" anchor="ctr"/>
+          <a:lstStyle/>
+          <a:p>
+            <a:pPr algn="ctr" indent="0" marL="0">
               <a:buNone/>
             </a:pPr>
             <a:r>
               <a:rPr lang="en-US" sz="2200" b="1" dirty="0">
                 <a:solidFill>
-                  <a:srgbClr val="D0D5DD"/>
-                </a:solidFill>
-              </a:rPr>
-              <a:t>03</a:t>
+                  <a:schemeClr val="tx2"/>
+                </a:solidFill>
+              </a:rPr>
+              <a:t>알린다</a:t>
             </a:r>
             <a:endParaRPr lang="en-US" sz="2200" dirty="0"/>
           </a:p>
@@ -3143,50 +3165,14 @@
       </p:sp>
       <p:sp>
         <p:nvSpPr>
-          <p:cNvPr id="19" name="Text 14"/>
-          <p:cNvSpPr txBox="1"/>
-          <p:nvPr/>
-        </p:nvSpPr>
-        <p:spPr>
-          <a:xfrm>
-            <a:off x="6507328" y="2514600"/>
-            <a:ext cx="2019224" cy="411480"/>
-          </a:xfrm>
-          <a:prstGeom prst="rect">
-            <a:avLst/>
-          </a:prstGeom>
-          <a:noFill/>
-          <a:ln/>
-        </p:spPr>
-        <p:txBody>
-          <a:bodyPr wrap="square" lIns="0" tIns="0" rIns="0" bIns="0" rtlCol="0" anchor="ctr"/>
-          <a:lstStyle/>
-          <a:p>
-            <a:pPr indent="0" marL="0">
-              <a:buNone/>
-            </a:pPr>
-            <a:r>
-              <a:rPr lang="en-US" sz="1700" b="1" dirty="0">
-                <a:solidFill>
-                  <a:schemeClr val="tx2"/>
-                </a:solidFill>
-              </a:rPr>
-              <a:t>사진 넣기</a:t>
-            </a:r>
-            <a:endParaRPr lang="en-US" sz="1700" dirty="0"/>
-          </a:p>
-        </p:txBody>
-      </p:sp>
-      <p:sp>
-        <p:nvSpPr>
-          <p:cNvPr id="20" name="Text 15"/>
-          <p:cNvSpPr txBox="1"/>
-          <p:nvPr/>
-        </p:nvSpPr>
-        <p:spPr>
-          <a:xfrm>
-            <a:off x="6507328" y="3017520"/>
-            <a:ext cx="2019224" cy="1645920"/>
+          <p:cNvPr id="14" name="비상설명_2"/>
+          <p:cNvSpPr txBox="1"/>
+          <p:nvPr/>
+        </p:nvSpPr>
+        <p:spPr>
+          <a:xfrm>
+            <a:off x="3591458" y="3566160"/>
+            <a:ext cx="2103120" cy="1005840"/>
           </a:xfrm>
           <a:prstGeom prst="rect">
             <a:avLst/>
@@ -3198,76 +3184,24 @@
           <a:bodyPr wrap="square" lIns="0" tIns="0" rIns="0" bIns="0" rtlCol="0" anchor="t"/>
           <a:lstStyle/>
           <a:p>
-            <a:pPr indent="0" marL="0">
-              <a:buNone/>
-            </a:pPr>
-            <a:r>
-              <a:rPr lang="en-US" sz="1300" dirty="0">
+            <a:pPr algn="ctr" indent="0" marL="0">
+              <a:buNone/>
+            </a:pPr>
+            <a:r>
+              <a:rPr lang="en-US" sz="1350" dirty="0">
                 <a:solidFill>
                   <a:srgbClr val="475467"/>
                 </a:solidFill>
               </a:rPr>
-              <a:t>단계 사진 칸을 우클릭 → [그림 바꾸기]로 실제 설비 사진을 넣습니다. 크기·위치는 그대로 유지됩니다.</a:t>
-            </a:r>
-            <a:endParaRPr lang="en-US" sz="1300" dirty="0"/>
-          </a:p>
-        </p:txBody>
-      </p:sp>
-      <p:sp>
-        <p:nvSpPr>
-          <p:cNvPr id="21" name="방법_4"/>
-          <p:cNvSpPr/>
-          <p:nvPr/>
-        </p:nvSpPr>
-        <p:spPr>
-          <a:xfrm>
-            <a:off x="9075191" y="1325880"/>
-            <a:ext cx="2567864" cy="3429000"/>
-          </a:xfrm>
-          <a:prstGeom prst="roundRect">
-            <a:avLst>
-              <a:gd name="adj" fmla="val 4273"/>
-            </a:avLst>
-          </a:prstGeom>
-          <a:solidFill>
-            <a:srgbClr val="F2F4F7"/>
-          </a:solidFill>
-          <a:ln w="12700">
-            <a:solidFill>
-              <a:srgbClr val="F2F4F7"/>
-            </a:solidFill>
-            <a:prstDash val="solid"/>
-          </a:ln>
-        </p:spPr>
-      </p:sp>
-      <p:sp>
-        <p:nvSpPr>
-          <p:cNvPr id="22" name="방법아이콘_4_dot"/>
-          <p:cNvSpPr/>
-          <p:nvPr/>
-        </p:nvSpPr>
-        <p:spPr>
-          <a:xfrm>
-            <a:off x="9349511" y="1645920"/>
-            <a:ext cx="640080" cy="640080"/>
-          </a:xfrm>
-          <a:prstGeom prst="ellipse">
-            <a:avLst/>
-          </a:prstGeom>
-          <a:solidFill>
-            <a:srgbClr val="FFC400"/>
-          </a:solidFill>
-          <a:ln w="12700">
-            <a:solidFill>
-              <a:srgbClr val="FFC400"/>
-            </a:solidFill>
-            <a:prstDash val="solid"/>
-          </a:ln>
-        </p:spPr>
+              <a:t>큰 소리로 주변에 알림</a:t>
+            </a:r>
+            <a:endParaRPr lang="en-US" sz="1350" dirty="0"/>
+          </a:p>
+        </p:txBody>
       </p:sp>
       <p:pic>
         <p:nvPicPr>
-          <p:cNvPr id="23" name="방법아이콘_4_icon" descr="preencoded.png">    </p:cNvPr>
+          <p:cNvPr id="15" name="Image 3" descr="preencoded.png">    </p:cNvPr>
           <p:cNvPicPr>
             <a:picLocks noChangeAspect="1"/>
           </p:cNvPicPr>
@@ -3281,8 +3215,8 @@
         </p:blipFill>
         <p:spPr>
           <a:xfrm>
-            <a:off x="9503131" y="1799539"/>
-            <a:ext cx="332842" cy="332842"/>
+            <a:off x="5940400" y="3017520"/>
+            <a:ext cx="310896" cy="310896"/>
           </a:xfrm>
           <a:prstGeom prst="rect">
             <a:avLst/>
@@ -3291,126 +3225,366 @@
       </p:pic>
       <p:sp>
         <p:nvSpPr>
-          <p:cNvPr id="24" name="Text 18"/>
-          <p:cNvSpPr txBox="1"/>
-          <p:nvPr/>
-        </p:nvSpPr>
-        <p:spPr>
-          <a:xfrm>
-            <a:off x="10774375" y="1673352"/>
-            <a:ext cx="594360" cy="457200"/>
-          </a:xfrm>
-          <a:prstGeom prst="rect">
-            <a:avLst/>
-          </a:prstGeom>
-          <a:noFill/>
-          <a:ln/>
-        </p:spPr>
-        <p:txBody>
-          <a:bodyPr wrap="square" lIns="0" tIns="0" rIns="0" bIns="0" rtlCol="0" anchor="ctr"/>
-          <a:lstStyle/>
-          <a:p>
-            <a:pPr algn="r" indent="0" marL="0">
-              <a:buNone/>
-            </a:pPr>
-            <a:r>
-              <a:rPr lang="en-US" sz="2200" b="1" dirty="0">
-                <a:solidFill>
-                  <a:srgbClr val="D0D5DD"/>
-                </a:solidFill>
-              </a:rPr>
-              <a:t>04</a:t>
-            </a:r>
-            <a:endParaRPr lang="en-US" sz="2200" dirty="0"/>
-          </a:p>
-        </p:txBody>
-      </p:sp>
-      <p:sp>
-        <p:nvSpPr>
-          <p:cNvPr id="25" name="Text 19"/>
-          <p:cNvSpPr txBox="1"/>
-          <p:nvPr/>
-        </p:nvSpPr>
-        <p:spPr>
-          <a:xfrm>
-            <a:off x="9349511" y="2514600"/>
-            <a:ext cx="2019224" cy="411480"/>
-          </a:xfrm>
-          <a:prstGeom prst="rect">
-            <a:avLst/>
-          </a:prstGeom>
-          <a:noFill/>
-          <a:ln/>
-        </p:spPr>
-        <p:txBody>
-          <a:bodyPr wrap="square" lIns="0" tIns="0" rIns="0" bIns="0" rtlCol="0" anchor="ctr"/>
-          <a:lstStyle/>
-          <a:p>
-            <a:pPr indent="0" marL="0">
-              <a:buNone/>
-            </a:pPr>
-            <a:r>
-              <a:rPr lang="en-US" sz="1700" b="1" dirty="0">
-                <a:solidFill>
-                  <a:schemeClr val="tx2"/>
-                </a:solidFill>
-              </a:rPr>
-              <a:t>절차서와 맞추기</a:t>
-            </a:r>
-            <a:endParaRPr lang="en-US" sz="1700" dirty="0"/>
-          </a:p>
-        </p:txBody>
-      </p:sp>
-      <p:sp>
-        <p:nvSpPr>
-          <p:cNvPr id="26" name="Text 20"/>
-          <p:cNvSpPr txBox="1"/>
-          <p:nvPr/>
-        </p:nvSpPr>
-        <p:spPr>
-          <a:xfrm>
-            <a:off x="9349511" y="3017520"/>
-            <a:ext cx="2019224" cy="1645920"/>
-          </a:xfrm>
-          <a:prstGeom prst="rect">
-            <a:avLst/>
-          </a:prstGeom>
-          <a:noFill/>
-          <a:ln/>
-        </p:spPr>
-        <p:txBody>
-          <a:bodyPr wrap="square" lIns="0" tIns="0" rIns="0" bIns="0" rtlCol="0" anchor="t"/>
-          <a:lstStyle/>
-          <a:p>
-            <a:pPr indent="0" marL="0">
-              <a:buNone/>
-            </a:pPr>
-            <a:r>
-              <a:rPr lang="en-US" sz="1300" dirty="0">
-                <a:solidFill>
-                  <a:srgbClr val="475467"/>
-                </a:solidFill>
-              </a:rPr>
-              <a:t>이 자료의 내용은 표준안전작업절차서(문서)와 같아야 합니다. 절차서를 개정하면 이 자료도 함께 고치세요.</a:t>
-            </a:r>
-            <a:endParaRPr lang="en-US" sz="1300" dirty="0"/>
-          </a:p>
-        </p:txBody>
-      </p:sp>
-      <p:sp>
-        <p:nvSpPr>
-          <p:cNvPr id="27" name="방법_안내"/>
+          <p:cNvPr id="16" name="비상_3"/>
           <p:cNvSpPr/>
           <p:nvPr/>
         </p:nvSpPr>
         <p:spPr>
           <a:xfrm>
-            <a:off x="548640" y="5029200"/>
-            <a:ext cx="11094415" cy="868680"/>
+            <a:off x="6359957" y="1554480"/>
+            <a:ext cx="2377440" cy="3200400"/>
           </a:xfrm>
           <a:prstGeom prst="roundRect">
             <a:avLst>
-              <a:gd name="adj" fmla="val 12632"/>
+              <a:gd name="adj" fmla="val 4615"/>
+            </a:avLst>
+          </a:prstGeom>
+          <a:solidFill>
+            <a:srgbClr val="F2F4F7"/>
+          </a:solidFill>
+          <a:ln w="12700">
+            <a:solidFill>
+              <a:srgbClr val="F2F4F7"/>
+            </a:solidFill>
+            <a:prstDash val="solid"/>
+          </a:ln>
+        </p:spPr>
+      </p:sp>
+      <p:sp>
+        <p:nvSpPr>
+          <p:cNvPr id="17" name="비상아이콘_3_dot"/>
+          <p:cNvSpPr/>
+          <p:nvPr/>
+        </p:nvSpPr>
+        <p:spPr>
+          <a:xfrm>
+            <a:off x="7091477" y="1874520"/>
+            <a:ext cx="914400" cy="914400"/>
+          </a:xfrm>
+          <a:prstGeom prst="ellipse">
+            <a:avLst/>
+          </a:prstGeom>
+          <a:solidFill>
+            <a:srgbClr val="FFC400"/>
+          </a:solidFill>
+          <a:ln w="12700">
+            <a:solidFill>
+              <a:srgbClr val="FFC400"/>
+            </a:solidFill>
+            <a:prstDash val="solid"/>
+          </a:ln>
+        </p:spPr>
+      </p:sp>
+      <p:pic>
+        <p:nvPicPr>
+          <p:cNvPr id="18" name="비상아이콘_3_icon" descr="preencoded.png">    </p:cNvPr>
+          <p:cNvPicPr>
+            <a:picLocks noChangeAspect="1"/>
+          </p:cNvPicPr>
+          <p:nvPr/>
+        </p:nvPicPr>
+        <p:blipFill>
+          <a:blip r:embed="rId5"/>
+          <a:stretch>
+            <a:fillRect/>
+          </a:stretch>
+        </p:blipFill>
+        <p:spPr>
+          <a:xfrm>
+            <a:off x="7310933" y="2093976"/>
+            <a:ext cx="475488" cy="475488"/>
+          </a:xfrm>
+          <a:prstGeom prst="rect">
+            <a:avLst/>
+          </a:prstGeom>
+        </p:spPr>
+      </p:pic>
+      <p:sp>
+        <p:nvSpPr>
+          <p:cNvPr id="19" name="Text 12"/>
+          <p:cNvSpPr txBox="1"/>
+          <p:nvPr/>
+        </p:nvSpPr>
+        <p:spPr>
+          <a:xfrm>
+            <a:off x="6497117" y="2971800"/>
+            <a:ext cx="2103120" cy="502920"/>
+          </a:xfrm>
+          <a:prstGeom prst="rect">
+            <a:avLst/>
+          </a:prstGeom>
+          <a:noFill/>
+          <a:ln/>
+        </p:spPr>
+        <p:txBody>
+          <a:bodyPr wrap="square" lIns="0" tIns="0" rIns="0" bIns="0" rtlCol="0" anchor="ctr"/>
+          <a:lstStyle/>
+          <a:p>
+            <a:pPr algn="ctr" indent="0" marL="0">
+              <a:buNone/>
+            </a:pPr>
+            <a:r>
+              <a:rPr lang="en-US" sz="2200" b="1" dirty="0">
+                <a:solidFill>
+                  <a:schemeClr val="tx2"/>
+                </a:solidFill>
+              </a:rPr>
+              <a:t>보고한다</a:t>
+            </a:r>
+            <a:endParaRPr lang="en-US" sz="2200" dirty="0"/>
+          </a:p>
+        </p:txBody>
+      </p:sp>
+      <p:sp>
+        <p:nvSpPr>
+          <p:cNvPr id="20" name="비상설명_3"/>
+          <p:cNvSpPr txBox="1"/>
+          <p:nvPr/>
+        </p:nvSpPr>
+        <p:spPr>
+          <a:xfrm>
+            <a:off x="6497117" y="3566160"/>
+            <a:ext cx="2103120" cy="1005840"/>
+          </a:xfrm>
+          <a:prstGeom prst="rect">
+            <a:avLst/>
+          </a:prstGeom>
+          <a:noFill/>
+          <a:ln/>
+        </p:spPr>
+        <p:txBody>
+          <a:bodyPr wrap="square" lIns="0" tIns="0" rIns="0" bIns="0" rtlCol="0" anchor="t"/>
+          <a:lstStyle/>
+          <a:p>
+            <a:pPr algn="ctr" indent="0" marL="0">
+              <a:buNone/>
+            </a:pPr>
+            <a:r>
+              <a:rPr lang="en-US" sz="1350" dirty="0">
+                <a:solidFill>
+                  <a:srgbClr val="475467"/>
+                </a:solidFill>
+              </a:rPr>
+              <a:t>관리감독자 · 사내 비상연락</a:t>
+            </a:r>
+            <a:endParaRPr lang="en-US" sz="1350" dirty="0"/>
+          </a:p>
+          <a:p>
+            <a:pPr algn="ctr" indent="0" marL="0">
+              <a:buNone/>
+            </a:pPr>
+            <a:r>
+              <a:rPr lang="en-US" sz="1350" dirty="0">
+                <a:solidFill>
+                  <a:srgbClr val="475467"/>
+                </a:solidFill>
+              </a:rPr>
+              <a:t>내선 ○○○</a:t>
+            </a:r>
+            <a:endParaRPr lang="en-US" sz="1350" dirty="0"/>
+          </a:p>
+        </p:txBody>
+      </p:sp>
+      <p:pic>
+        <p:nvPicPr>
+          <p:cNvPr id="21" name="Image 5" descr="preencoded.png">    </p:cNvPr>
+          <p:cNvPicPr>
+            <a:picLocks noChangeAspect="1"/>
+          </p:cNvPicPr>
+          <p:nvPr/>
+        </p:nvPicPr>
+        <p:blipFill>
+          <a:blip r:embed="rId6"/>
+          <a:stretch>
+            <a:fillRect/>
+          </a:stretch>
+        </p:blipFill>
+        <p:spPr>
+          <a:xfrm>
+            <a:off x="8846058" y="3017520"/>
+            <a:ext cx="310896" cy="310896"/>
+          </a:xfrm>
+          <a:prstGeom prst="rect">
+            <a:avLst/>
+          </a:prstGeom>
+        </p:spPr>
+      </p:pic>
+      <p:sp>
+        <p:nvSpPr>
+          <p:cNvPr id="22" name="비상_4"/>
+          <p:cNvSpPr/>
+          <p:nvPr/>
+        </p:nvSpPr>
+        <p:spPr>
+          <a:xfrm>
+            <a:off x="9265615" y="1554480"/>
+            <a:ext cx="2377440" cy="3200400"/>
+          </a:xfrm>
+          <a:prstGeom prst="roundRect">
+            <a:avLst>
+              <a:gd name="adj" fmla="val 4615"/>
+            </a:avLst>
+          </a:prstGeom>
+          <a:solidFill>
+            <a:srgbClr val="F2F4F7"/>
+          </a:solidFill>
+          <a:ln w="12700">
+            <a:solidFill>
+              <a:srgbClr val="F2F4F7"/>
+            </a:solidFill>
+            <a:prstDash val="solid"/>
+          </a:ln>
+        </p:spPr>
+      </p:sp>
+      <p:sp>
+        <p:nvSpPr>
+          <p:cNvPr id="23" name="비상아이콘_4_dot"/>
+          <p:cNvSpPr/>
+          <p:nvPr/>
+        </p:nvSpPr>
+        <p:spPr>
+          <a:xfrm>
+            <a:off x="9997135" y="1874520"/>
+            <a:ext cx="914400" cy="914400"/>
+          </a:xfrm>
+          <a:prstGeom prst="ellipse">
+            <a:avLst/>
+          </a:prstGeom>
+          <a:solidFill>
+            <a:srgbClr val="FFC400"/>
+          </a:solidFill>
+          <a:ln w="12700">
+            <a:solidFill>
+              <a:srgbClr val="FFC400"/>
+            </a:solidFill>
+            <a:prstDash val="solid"/>
+          </a:ln>
+        </p:spPr>
+      </p:sp>
+      <p:pic>
+        <p:nvPicPr>
+          <p:cNvPr id="24" name="비상아이콘_4_icon" descr="preencoded.png">    </p:cNvPr>
+          <p:cNvPicPr>
+            <a:picLocks noChangeAspect="1"/>
+          </p:cNvPicPr>
+          <p:nvPr/>
+        </p:nvPicPr>
+        <p:blipFill>
+          <a:blip r:embed="rId7"/>
+          <a:stretch>
+            <a:fillRect/>
+          </a:stretch>
+        </p:blipFill>
+        <p:spPr>
+          <a:xfrm>
+            <a:off x="10216591" y="2093976"/>
+            <a:ext cx="475488" cy="475488"/>
+          </a:xfrm>
+          <a:prstGeom prst="rect">
+            <a:avLst/>
+          </a:prstGeom>
+        </p:spPr>
+      </p:pic>
+      <p:sp>
+        <p:nvSpPr>
+          <p:cNvPr id="25" name="Text 16"/>
+          <p:cNvSpPr txBox="1"/>
+          <p:nvPr/>
+        </p:nvSpPr>
+        <p:spPr>
+          <a:xfrm>
+            <a:off x="9402775" y="2971800"/>
+            <a:ext cx="2103120" cy="502920"/>
+          </a:xfrm>
+          <a:prstGeom prst="rect">
+            <a:avLst/>
+          </a:prstGeom>
+          <a:noFill/>
+          <a:ln/>
+        </p:spPr>
+        <p:txBody>
+          <a:bodyPr wrap="square" lIns="0" tIns="0" rIns="0" bIns="0" rtlCol="0" anchor="ctr"/>
+          <a:lstStyle/>
+          <a:p>
+            <a:pPr algn="ctr" indent="0" marL="0">
+              <a:buNone/>
+            </a:pPr>
+            <a:r>
+              <a:rPr lang="en-US" sz="2200" b="1" dirty="0">
+                <a:solidFill>
+                  <a:schemeClr val="tx2"/>
+                </a:solidFill>
+              </a:rPr>
+              <a:t>119</a:t>
+            </a:r>
+            <a:endParaRPr lang="en-US" sz="2200" dirty="0"/>
+          </a:p>
+        </p:txBody>
+      </p:sp>
+      <p:sp>
+        <p:nvSpPr>
+          <p:cNvPr id="26" name="비상설명_4"/>
+          <p:cNvSpPr txBox="1"/>
+          <p:nvPr/>
+        </p:nvSpPr>
+        <p:spPr>
+          <a:xfrm>
+            <a:off x="9402775" y="3566160"/>
+            <a:ext cx="2103120" cy="1005840"/>
+          </a:xfrm>
+          <a:prstGeom prst="rect">
+            <a:avLst/>
+          </a:prstGeom>
+          <a:noFill/>
+          <a:ln/>
+        </p:spPr>
+        <p:txBody>
+          <a:bodyPr wrap="square" lIns="0" tIns="0" rIns="0" bIns="0" rtlCol="0" anchor="t"/>
+          <a:lstStyle/>
+          <a:p>
+            <a:pPr algn="ctr" indent="0" marL="0">
+              <a:buNone/>
+            </a:pPr>
+            <a:r>
+              <a:rPr lang="en-US" sz="1350" dirty="0">
+                <a:solidFill>
+                  <a:srgbClr val="475467"/>
+                </a:solidFill>
+              </a:rPr>
+              <a:t>부상자는 무리하게 빼내지 말고</a:t>
+            </a:r>
+            <a:endParaRPr lang="en-US" sz="1350" dirty="0"/>
+          </a:p>
+          <a:p>
+            <a:pPr algn="ctr" indent="0" marL="0">
+              <a:buNone/>
+            </a:pPr>
+            <a:r>
+              <a:rPr lang="en-US" sz="1350" dirty="0">
+                <a:solidFill>
+                  <a:srgbClr val="475467"/>
+                </a:solidFill>
+              </a:rPr>
+              <a:t>119 지시에 따름</a:t>
+            </a:r>
+            <a:endParaRPr lang="en-US" sz="1350" dirty="0"/>
+          </a:p>
+        </p:txBody>
+      </p:sp>
+      <p:sp>
+        <p:nvSpPr>
+          <p:cNvPr id="27" name="비상위치"/>
+          <p:cNvSpPr/>
+          <p:nvPr/>
+        </p:nvSpPr>
+        <p:spPr>
+          <a:xfrm>
+            <a:off x="548640" y="5120640"/>
+            <a:ext cx="11094415" cy="777240"/>
+          </a:xfrm>
+          <a:prstGeom prst="roundRect">
+            <a:avLst>
+              <a:gd name="adj" fmla="val 14118"/>
             </a:avLst>
           </a:prstGeom>
           <a:solidFill>
@@ -3426,13 +3600,13 @@
       </p:sp>
       <p:sp>
         <p:nvSpPr>
-          <p:cNvPr id="28" name="Text 22"/>
-          <p:cNvSpPr txBox="1"/>
-          <p:nvPr/>
-        </p:nvSpPr>
-        <p:spPr>
-          <a:xfrm>
-            <a:off x="822960" y="5120640"/>
+          <p:cNvPr id="28" name="비상정지위치"/>
+          <p:cNvSpPr txBox="1"/>
+          <p:nvPr/>
+        </p:nvSpPr>
+        <p:spPr>
+          <a:xfrm>
+            <a:off x="822960" y="5166360"/>
             <a:ext cx="10545775" cy="685800"/>
           </a:xfrm>
           <a:prstGeom prst="rect">
@@ -3449,25 +3623,25 @@
               <a:buNone/>
             </a:pPr>
             <a:r>
-              <a:rPr lang="en-US" sz="1300" b="1" dirty="0">
+              <a:rPr lang="en-US" sz="1400" b="1" dirty="0">
                 <a:solidFill>
                   <a:schemeClr val="tx2"/>
                 </a:solidFill>
               </a:rPr>
-              <a:t>작성기  </a:t>
+              <a:t>비상정지 스위치 위치  </a:t>
             </a:r>
             <a:pPr indent="0" marL="0">
               <a:buNone/>
             </a:pPr>
             <a:r>
-              <a:rPr lang="en-US" sz="1300" dirty="0">
-                <a:solidFill>
-                  <a:srgbClr val="475467"/>
-                </a:solidFill>
-              </a:rPr>
-              <a:t>safeplum.com/tools/forms/sop — 예시 작업 고르기, 단계별 사진, 이해도 질문·서명까지 화면에서 작성하고 A4로 인쇄. 이 장은 교육 전에 지우세요.</a:t>
-            </a:r>
-            <a:endParaRPr lang="en-US" sz="1300" dirty="0"/>
+              <a:rPr lang="en-US" sz="1400" i="1" dirty="0">
+                <a:solidFill>
+                  <a:srgbClr val="98A2B3"/>
+                </a:solidFill>
+              </a:rPr>
+              <a:t>예: 컨베이어 양 끝단·중간 조작반 3곳 — 사업장 위치로 바꿔 쓰세요</a:t>
+            </a:r>
+            <a:endParaRPr lang="en-US" sz="1400" dirty="0"/>
           </a:p>
         </p:txBody>
       </p:sp>
@@ -3511,6 +3685,1489 @@
             <a:fld id="{F7021451-1387-4CA6-816F-3879F97B5CBC}" type="slidenum">
               <a:rPr b="0" lang="en-US"/>
               <a:t>10</a:t>
+            </a:fld>
+            <a:endParaRPr lang="en-US"/>
+          </a:p>
+        </p:txBody>
+      </p:sp>
+    </p:spTree>
+  </p:cSld>
+  <p:clrMapOvr>
+    <a:masterClrMapping/>
+  </p:clrMapOvr>
+</p:sld>
+</file>
+
+<file path=ppt/slides/slide11.xml><?xml version="1.0" encoding="utf-8"?>
+<p:sld xmlns:a="http://schemas.openxmlformats.org/drawingml/2006/main" xmlns:r="http://schemas.openxmlformats.org/officeDocument/2006/relationships" xmlns:p="http://schemas.openxmlformats.org/presentationml/2006/main">
+  <p:cSld name="Slide 11">
+    <p:spTree>
+      <p:nvGrpSpPr>
+        <p:cNvPr id="1" name=""/>
+        <p:cNvGrpSpPr/>
+        <p:nvPr/>
+      </p:nvGrpSpPr>
+      <p:grpSpPr>
+        <a:xfrm>
+          <a:off x="0" y="0"/>
+          <a:ext cx="0" cy="0"/>
+          <a:chOff x="0" y="0"/>
+          <a:chExt cx="0" cy="0"/>
+        </a:xfrm>
+      </p:grpSpPr>
+      <p:sp>
+        <p:nvSpPr>
+          <p:cNvPr id="2" name="Text 0"/>
+          <p:cNvSpPr/>
+          <p:nvPr>
+            <p:ph idx="100" type="title" hasCustomPrompt="1"/>
+          </p:nvPr>
+        </p:nvSpPr>
+        <p:spPr>
+          <a:xfrm>
+            <a:off x="548640" y="347472"/>
+            <a:ext cx="8778240" cy="640080"/>
+          </a:xfrm>
+          <a:prstGeom prst="rect">
+            <a:avLst/>
+          </a:prstGeom>
+          <a:noFill/>
+          <a:ln/>
+        </p:spPr>
+        <p:txBody>
+          <a:bodyPr wrap="square" lIns="0" tIns="0" rIns="0" bIns="0" rtlCol="0" anchor="ctr"/>
+          <a:lstStyle/>
+          <a:p>
+            <a:pPr algn="l" indent="0" marL="0">
+              <a:buNone/>
+            </a:pPr>
+            <a:r>
+              <a:rPr lang="en-US" sz="2600" b="1" dirty="0">
+                <a:solidFill>
+                  <a:schemeClr val="tx2"/>
+                </a:solidFill>
+              </a:rPr>
+              <a:t>이해도 확인</a:t>
+            </a:r>
+            <a:endParaRPr lang="en-US" sz="2600" dirty="0"/>
+          </a:p>
+        </p:txBody>
+      </p:sp>
+      <p:sp>
+        <p:nvSpPr>
+          <p:cNvPr id="3" name="Text 1"/>
+          <p:cNvSpPr txBox="1"/>
+          <p:nvPr/>
+        </p:nvSpPr>
+        <p:spPr>
+          <a:xfrm>
+            <a:off x="9631375" y="457200"/>
+            <a:ext cx="2011680" cy="347472"/>
+          </a:xfrm>
+          <a:prstGeom prst="roundRect">
+            <a:avLst>
+              <a:gd name="adj" fmla="val 50000"/>
+            </a:avLst>
+          </a:prstGeom>
+          <a:solidFill>
+            <a:srgbClr val="F2F4F7"/>
+          </a:solidFill>
+          <a:ln/>
+        </p:spPr>
+        <p:txBody>
+          <a:bodyPr wrap="square" lIns="0" tIns="0" rIns="0" bIns="0" rtlCol="0" anchor="ctr"/>
+          <a:lstStyle/>
+          <a:p>
+            <a:pPr algn="ctr" indent="0" marL="0">
+              <a:buNone/>
+            </a:pPr>
+            <a:r>
+              <a:rPr lang="en-US" sz="1200" b="1" dirty="0">
+                <a:solidFill>
+                  <a:srgbClr val="475467"/>
+                </a:solidFill>
+              </a:rPr>
+              <a:t>9. 확인 질문</a:t>
+            </a:r>
+            <a:endParaRPr lang="en-US" sz="1200" dirty="0"/>
+          </a:p>
+        </p:txBody>
+      </p:sp>
+      <p:sp>
+        <p:nvSpPr>
+          <p:cNvPr id="4" name="질문_1"/>
+          <p:cNvSpPr/>
+          <p:nvPr/>
+        </p:nvSpPr>
+        <p:spPr>
+          <a:xfrm>
+            <a:off x="548640" y="1371600"/>
+            <a:ext cx="11094415" cy="1097280"/>
+          </a:xfrm>
+          <a:prstGeom prst="roundRect">
+            <a:avLst>
+              <a:gd name="adj" fmla="val 10000"/>
+            </a:avLst>
+          </a:prstGeom>
+          <a:solidFill>
+            <a:srgbClr val="F2F4F7"/>
+          </a:solidFill>
+          <a:ln w="12700">
+            <a:solidFill>
+              <a:srgbClr val="F2F4F7"/>
+            </a:solidFill>
+            <a:prstDash val="solid"/>
+          </a:ln>
+        </p:spPr>
+      </p:sp>
+      <p:sp>
+        <p:nvSpPr>
+          <p:cNvPr id="5" name="Text 3"/>
+          <p:cNvSpPr txBox="1"/>
+          <p:nvPr/>
+        </p:nvSpPr>
+        <p:spPr>
+          <a:xfrm>
+            <a:off x="822960" y="1618488"/>
+            <a:ext cx="822960" cy="603504"/>
+          </a:xfrm>
+          <a:prstGeom prst="roundRect">
+            <a:avLst>
+              <a:gd name="adj" fmla="val 18182"/>
+            </a:avLst>
+          </a:prstGeom>
+          <a:solidFill>
+            <a:srgbClr val="FFC400"/>
+          </a:solidFill>
+          <a:ln/>
+        </p:spPr>
+        <p:txBody>
+          <a:bodyPr wrap="square" lIns="0" tIns="0" rIns="0" bIns="0" rtlCol="0" anchor="ctr"/>
+          <a:lstStyle/>
+          <a:p>
+            <a:pPr algn="ctr" indent="0" marL="0">
+              <a:buNone/>
+            </a:pPr>
+            <a:r>
+              <a:rPr lang="en-US" sz="2200" b="1" dirty="0">
+                <a:solidFill>
+                  <a:srgbClr val="0E1B2E"/>
+                </a:solidFill>
+              </a:rPr>
+              <a:t>Q1</a:t>
+            </a:r>
+            <a:endParaRPr lang="en-US" sz="2200" dirty="0"/>
+          </a:p>
+        </p:txBody>
+      </p:sp>
+      <p:sp>
+        <p:nvSpPr>
+          <p:cNvPr id="6" name="질문문구_1"/>
+          <p:cNvSpPr txBox="1"/>
+          <p:nvPr/>
+        </p:nvSpPr>
+        <p:spPr>
+          <a:xfrm>
+            <a:off x="1874520" y="1371600"/>
+            <a:ext cx="7253935" cy="1097280"/>
+          </a:xfrm>
+          <a:prstGeom prst="rect">
+            <a:avLst/>
+          </a:prstGeom>
+          <a:noFill/>
+          <a:ln/>
+        </p:spPr>
+        <p:txBody>
+          <a:bodyPr wrap="square" lIns="0" tIns="0" rIns="0" bIns="0" rtlCol="0" anchor="ctr"/>
+          <a:lstStyle/>
+          <a:p>
+            <a:pPr indent="0" marL="0">
+              <a:buNone/>
+            </a:pPr>
+            <a:r>
+              <a:rPr lang="en-US" sz="2000" b="1" dirty="0">
+                <a:solidFill>
+                  <a:srgbClr val="1D2939"/>
+                </a:solidFill>
+              </a:rPr>
+              <a:t>청소 전에 차단기에 무엇을 해야 하나요?</a:t>
+            </a:r>
+            <a:endParaRPr lang="en-US" sz="2000" dirty="0"/>
+          </a:p>
+        </p:txBody>
+      </p:sp>
+      <p:sp>
+        <p:nvSpPr>
+          <p:cNvPr id="7" name="Text 5"/>
+          <p:cNvSpPr txBox="1"/>
+          <p:nvPr/>
+        </p:nvSpPr>
+        <p:spPr>
+          <a:xfrm>
+            <a:off x="8991295" y="1371600"/>
+            <a:ext cx="2377440" cy="1097280"/>
+          </a:xfrm>
+          <a:prstGeom prst="rect">
+            <a:avLst/>
+          </a:prstGeom>
+          <a:noFill/>
+          <a:ln/>
+        </p:spPr>
+        <p:txBody>
+          <a:bodyPr wrap="square" lIns="0" tIns="0" rIns="0" bIns="0" rtlCol="0" anchor="ctr"/>
+          <a:lstStyle/>
+          <a:p>
+            <a:pPr algn="r" indent="0" marL="0">
+              <a:buNone/>
+            </a:pPr>
+            <a:r>
+              <a:rPr lang="en-US" sz="1500" dirty="0">
+                <a:solidFill>
+                  <a:srgbClr val="98A2B3"/>
+                </a:solidFill>
+              </a:rPr>
+              <a:t>답: ____________</a:t>
+            </a:r>
+            <a:endParaRPr lang="en-US" sz="1500" dirty="0"/>
+          </a:p>
+        </p:txBody>
+      </p:sp>
+      <p:sp>
+        <p:nvSpPr>
+          <p:cNvPr id="8" name="질문_2"/>
+          <p:cNvSpPr/>
+          <p:nvPr/>
+        </p:nvSpPr>
+        <p:spPr>
+          <a:xfrm>
+            <a:off x="548640" y="2697480"/>
+            <a:ext cx="11094415" cy="1097280"/>
+          </a:xfrm>
+          <a:prstGeom prst="roundRect">
+            <a:avLst>
+              <a:gd name="adj" fmla="val 10000"/>
+            </a:avLst>
+          </a:prstGeom>
+          <a:solidFill>
+            <a:srgbClr val="F2F4F7"/>
+          </a:solidFill>
+          <a:ln w="12700">
+            <a:solidFill>
+              <a:srgbClr val="F2F4F7"/>
+            </a:solidFill>
+            <a:prstDash val="solid"/>
+          </a:ln>
+        </p:spPr>
+      </p:sp>
+      <p:sp>
+        <p:nvSpPr>
+          <p:cNvPr id="9" name="Text 7"/>
+          <p:cNvSpPr txBox="1"/>
+          <p:nvPr/>
+        </p:nvSpPr>
+        <p:spPr>
+          <a:xfrm>
+            <a:off x="822960" y="2944368"/>
+            <a:ext cx="822960" cy="603504"/>
+          </a:xfrm>
+          <a:prstGeom prst="roundRect">
+            <a:avLst>
+              <a:gd name="adj" fmla="val 18182"/>
+            </a:avLst>
+          </a:prstGeom>
+          <a:solidFill>
+            <a:srgbClr val="FFC400"/>
+          </a:solidFill>
+          <a:ln/>
+        </p:spPr>
+        <p:txBody>
+          <a:bodyPr wrap="square" lIns="0" tIns="0" rIns="0" bIns="0" rtlCol="0" anchor="ctr"/>
+          <a:lstStyle/>
+          <a:p>
+            <a:pPr algn="ctr" indent="0" marL="0">
+              <a:buNone/>
+            </a:pPr>
+            <a:r>
+              <a:rPr lang="en-US" sz="2200" b="1" dirty="0">
+                <a:solidFill>
+                  <a:srgbClr val="0E1B2E"/>
+                </a:solidFill>
+              </a:rPr>
+              <a:t>Q2</a:t>
+            </a:r>
+            <a:endParaRPr lang="en-US" sz="2200" dirty="0"/>
+          </a:p>
+        </p:txBody>
+      </p:sp>
+      <p:sp>
+        <p:nvSpPr>
+          <p:cNvPr id="10" name="질문문구_2"/>
+          <p:cNvSpPr txBox="1"/>
+          <p:nvPr/>
+        </p:nvSpPr>
+        <p:spPr>
+          <a:xfrm>
+            <a:off x="1874520" y="2697480"/>
+            <a:ext cx="7253935" cy="1097280"/>
+          </a:xfrm>
+          <a:prstGeom prst="rect">
+            <a:avLst/>
+          </a:prstGeom>
+          <a:noFill/>
+          <a:ln/>
+        </p:spPr>
+        <p:txBody>
+          <a:bodyPr wrap="square" lIns="0" tIns="0" rIns="0" bIns="0" rtlCol="0" anchor="ctr"/>
+          <a:lstStyle/>
+          <a:p>
+            <a:pPr indent="0" marL="0">
+              <a:buNone/>
+            </a:pPr>
+            <a:r>
+              <a:rPr lang="en-US" sz="2000" b="1" dirty="0">
+                <a:solidFill>
+                  <a:srgbClr val="1D2939"/>
+                </a:solidFill>
+              </a:rPr>
+              <a:t>잠금은 누가 풀 수 있나요?</a:t>
+            </a:r>
+            <a:endParaRPr lang="en-US" sz="2000" dirty="0"/>
+          </a:p>
+        </p:txBody>
+      </p:sp>
+      <p:sp>
+        <p:nvSpPr>
+          <p:cNvPr id="11" name="Text 9"/>
+          <p:cNvSpPr txBox="1"/>
+          <p:nvPr/>
+        </p:nvSpPr>
+        <p:spPr>
+          <a:xfrm>
+            <a:off x="8991295" y="2697480"/>
+            <a:ext cx="2377440" cy="1097280"/>
+          </a:xfrm>
+          <a:prstGeom prst="rect">
+            <a:avLst/>
+          </a:prstGeom>
+          <a:noFill/>
+          <a:ln/>
+        </p:spPr>
+        <p:txBody>
+          <a:bodyPr wrap="square" lIns="0" tIns="0" rIns="0" bIns="0" rtlCol="0" anchor="ctr"/>
+          <a:lstStyle/>
+          <a:p>
+            <a:pPr algn="r" indent="0" marL="0">
+              <a:buNone/>
+            </a:pPr>
+            <a:r>
+              <a:rPr lang="en-US" sz="1500" dirty="0">
+                <a:solidFill>
+                  <a:srgbClr val="98A2B3"/>
+                </a:solidFill>
+              </a:rPr>
+              <a:t>답: ____________</a:t>
+            </a:r>
+            <a:endParaRPr lang="en-US" sz="1500" dirty="0"/>
+          </a:p>
+        </p:txBody>
+      </p:sp>
+      <p:sp>
+        <p:nvSpPr>
+          <p:cNvPr id="12" name="질문_3"/>
+          <p:cNvSpPr/>
+          <p:nvPr/>
+        </p:nvSpPr>
+        <p:spPr>
+          <a:xfrm>
+            <a:off x="548640" y="4023360"/>
+            <a:ext cx="11094415" cy="1097280"/>
+          </a:xfrm>
+          <a:prstGeom prst="roundRect">
+            <a:avLst>
+              <a:gd name="adj" fmla="val 10000"/>
+            </a:avLst>
+          </a:prstGeom>
+          <a:solidFill>
+            <a:srgbClr val="F2F4F7"/>
+          </a:solidFill>
+          <a:ln w="12700">
+            <a:solidFill>
+              <a:srgbClr val="F2F4F7"/>
+            </a:solidFill>
+            <a:prstDash val="solid"/>
+          </a:ln>
+        </p:spPr>
+      </p:sp>
+      <p:sp>
+        <p:nvSpPr>
+          <p:cNvPr id="13" name="Text 11"/>
+          <p:cNvSpPr txBox="1"/>
+          <p:nvPr/>
+        </p:nvSpPr>
+        <p:spPr>
+          <a:xfrm>
+            <a:off x="822960" y="4270248"/>
+            <a:ext cx="822960" cy="603504"/>
+          </a:xfrm>
+          <a:prstGeom prst="roundRect">
+            <a:avLst>
+              <a:gd name="adj" fmla="val 18182"/>
+            </a:avLst>
+          </a:prstGeom>
+          <a:solidFill>
+            <a:srgbClr val="FFC400"/>
+          </a:solidFill>
+          <a:ln/>
+        </p:spPr>
+        <p:txBody>
+          <a:bodyPr wrap="square" lIns="0" tIns="0" rIns="0" bIns="0" rtlCol="0" anchor="ctr"/>
+          <a:lstStyle/>
+          <a:p>
+            <a:pPr algn="ctr" indent="0" marL="0">
+              <a:buNone/>
+            </a:pPr>
+            <a:r>
+              <a:rPr lang="en-US" sz="2200" b="1" dirty="0">
+                <a:solidFill>
+                  <a:srgbClr val="0E1B2E"/>
+                </a:solidFill>
+              </a:rPr>
+              <a:t>Q3</a:t>
+            </a:r>
+            <a:endParaRPr lang="en-US" sz="2200" dirty="0"/>
+          </a:p>
+        </p:txBody>
+      </p:sp>
+      <p:sp>
+        <p:nvSpPr>
+          <p:cNvPr id="14" name="질문문구_3"/>
+          <p:cNvSpPr txBox="1"/>
+          <p:nvPr/>
+        </p:nvSpPr>
+        <p:spPr>
+          <a:xfrm>
+            <a:off x="1874520" y="4023360"/>
+            <a:ext cx="7253935" cy="1097280"/>
+          </a:xfrm>
+          <a:prstGeom prst="rect">
+            <a:avLst/>
+          </a:prstGeom>
+          <a:noFill/>
+          <a:ln/>
+        </p:spPr>
+        <p:txBody>
+          <a:bodyPr wrap="square" lIns="0" tIns="0" rIns="0" bIns="0" rtlCol="0" anchor="ctr"/>
+          <a:lstStyle/>
+          <a:p>
+            <a:pPr indent="0" marL="0">
+              <a:buNone/>
+            </a:pPr>
+            <a:r>
+              <a:rPr lang="en-US" sz="2000" b="1" dirty="0">
+                <a:solidFill>
+                  <a:srgbClr val="1D2939"/>
+                </a:solidFill>
+              </a:rPr>
+              <a:t>작업 중 끼임이 생기면 가장 먼저 무엇을 하나요?</a:t>
+            </a:r>
+            <a:endParaRPr lang="en-US" sz="2000" dirty="0"/>
+          </a:p>
+        </p:txBody>
+      </p:sp>
+      <p:sp>
+        <p:nvSpPr>
+          <p:cNvPr id="15" name="Text 13"/>
+          <p:cNvSpPr txBox="1"/>
+          <p:nvPr/>
+        </p:nvSpPr>
+        <p:spPr>
+          <a:xfrm>
+            <a:off x="8991295" y="4023360"/>
+            <a:ext cx="2377440" cy="1097280"/>
+          </a:xfrm>
+          <a:prstGeom prst="rect">
+            <a:avLst/>
+          </a:prstGeom>
+          <a:noFill/>
+          <a:ln/>
+        </p:spPr>
+        <p:txBody>
+          <a:bodyPr wrap="square" lIns="0" tIns="0" rIns="0" bIns="0" rtlCol="0" anchor="ctr"/>
+          <a:lstStyle/>
+          <a:p>
+            <a:pPr algn="r" indent="0" marL="0">
+              <a:buNone/>
+            </a:pPr>
+            <a:r>
+              <a:rPr lang="en-US" sz="1500" dirty="0">
+                <a:solidFill>
+                  <a:srgbClr val="98A2B3"/>
+                </a:solidFill>
+              </a:rPr>
+              <a:t>답: ____________</a:t>
+            </a:r>
+            <a:endParaRPr lang="en-US" sz="1500" dirty="0"/>
+          </a:p>
+        </p:txBody>
+      </p:sp>
+      <p:sp>
+        <p:nvSpPr>
+          <p:cNvPr id="25" name="Slide Number Placeholder 0"/>
+          <p:cNvSpPr>
+            <a:spLocks noGrp="1"/>
+          </p:cNvSpPr>
+          <p:nvPr>
+            <p:ph type="sldNum" sz="quarter" idx="4294967295"/>
+          </p:nvPr>
+        </p:nvSpPr>
+        <p:spPr>
+          <a:xfrm>
+            <a:off x="11094415" y="6473952"/>
+            <a:ext cx="548640" cy="274320"/>
+          </a:xfrm>
+          <a:prstGeom prst="rect">
+            <a:avLst/>
+          </a:prstGeom>
+          <a:extLst>
+            <a:ext uri="{C572A759-6A51-4108-AA02-DFA0A04FC94B}">
+              <ma14:wrappingTextBoxFlag xmlns:ma14="http://schemas.microsoft.com/office/mac/drawingml/2011/main" val="0"/>
+            </a:ext>
+          </a:extLst>
+        </p:spPr>
+        <p:txBody>
+          <a:bodyPr/>
+          <a:lstStyle>
+            <a:lvl1pPr>
+              <a:defRPr sz="900">
+                <a:solidFill>
+                  <a:srgbClr val="98A2B3"/>
+                </a:solidFill>
+              </a:defRPr>
+            </a:lvl1pPr>
+          </a:lstStyle>
+          <a:p>
+            <a:pPr algn="r"/>
+            <a:fld id="{F7021451-1387-4CA6-816F-3879F97B5CBC}" type="slidenum">
+              <a:rPr b="0" lang="en-US"/>
+              <a:t>11</a:t>
+            </a:fld>
+            <a:endParaRPr lang="en-US"/>
+          </a:p>
+        </p:txBody>
+      </p:sp>
+    </p:spTree>
+  </p:cSld>
+  <p:clrMapOvr>
+    <a:masterClrMapping/>
+  </p:clrMapOvr>
+</p:sld>
+</file>
+
+<file path=ppt/slides/slide12.xml><?xml version="1.0" encoding="utf-8"?>
+<p:sld xmlns:a="http://schemas.openxmlformats.org/drawingml/2006/main" xmlns:r="http://schemas.openxmlformats.org/officeDocument/2006/relationships" xmlns:p="http://schemas.openxmlformats.org/presentationml/2006/main">
+  <p:cSld name="Slide 12">
+    <p:spTree>
+      <p:nvGrpSpPr>
+        <p:cNvPr id="1" name=""/>
+        <p:cNvGrpSpPr/>
+        <p:nvPr/>
+      </p:nvGrpSpPr>
+      <p:grpSpPr>
+        <a:xfrm>
+          <a:off x="0" y="0"/>
+          <a:ext cx="0" cy="0"/>
+          <a:chOff x="0" y="0"/>
+          <a:chExt cx="0" cy="0"/>
+        </a:xfrm>
+      </p:grpSpPr>
+      <p:sp>
+        <p:nvSpPr>
+          <p:cNvPr id="2" name="Text 0"/>
+          <p:cNvSpPr/>
+          <p:nvPr>
+            <p:ph idx="100" type="title" hasCustomPrompt="1"/>
+          </p:nvPr>
+        </p:nvSpPr>
+        <p:spPr>
+          <a:xfrm>
+            <a:off x="548640" y="347472"/>
+            <a:ext cx="8778240" cy="640080"/>
+          </a:xfrm>
+          <a:prstGeom prst="rect">
+            <a:avLst/>
+          </a:prstGeom>
+          <a:noFill/>
+          <a:ln/>
+        </p:spPr>
+        <p:txBody>
+          <a:bodyPr wrap="square" lIns="0" tIns="0" rIns="0" bIns="0" rtlCol="0" anchor="ctr"/>
+          <a:lstStyle/>
+          <a:p>
+            <a:pPr algn="l" indent="0" marL="0">
+              <a:buNone/>
+            </a:pPr>
+            <a:r>
+              <a:rPr lang="en-US" sz="2600" b="1" dirty="0">
+                <a:solidFill>
+                  <a:schemeClr val="tx2"/>
+                </a:solidFill>
+              </a:rPr>
+              <a:t>교육 확인과 이 자료 고쳐 쓰는 법</a:t>
+            </a:r>
+            <a:endParaRPr lang="en-US" sz="2600" dirty="0"/>
+          </a:p>
+        </p:txBody>
+      </p:sp>
+      <p:sp>
+        <p:nvSpPr>
+          <p:cNvPr id="3" name="방법_1"/>
+          <p:cNvSpPr/>
+          <p:nvPr/>
+        </p:nvSpPr>
+        <p:spPr>
+          <a:xfrm>
+            <a:off x="548640" y="1325880"/>
+            <a:ext cx="2567864" cy="3429000"/>
+          </a:xfrm>
+          <a:prstGeom prst="roundRect">
+            <a:avLst>
+              <a:gd name="adj" fmla="val 4273"/>
+            </a:avLst>
+          </a:prstGeom>
+          <a:solidFill>
+            <a:srgbClr val="F2F4F7"/>
+          </a:solidFill>
+          <a:ln w="12700">
+            <a:solidFill>
+              <a:srgbClr val="F2F4F7"/>
+            </a:solidFill>
+            <a:prstDash val="solid"/>
+          </a:ln>
+        </p:spPr>
+      </p:sp>
+      <p:sp>
+        <p:nvSpPr>
+          <p:cNvPr id="4" name="방법아이콘_1_dot"/>
+          <p:cNvSpPr/>
+          <p:nvPr/>
+        </p:nvSpPr>
+        <p:spPr>
+          <a:xfrm>
+            <a:off x="822960" y="1645920"/>
+            <a:ext cx="640080" cy="640080"/>
+          </a:xfrm>
+          <a:prstGeom prst="ellipse">
+            <a:avLst/>
+          </a:prstGeom>
+          <a:solidFill>
+            <a:srgbClr val="FFC400"/>
+          </a:solidFill>
+          <a:ln w="12700">
+            <a:solidFill>
+              <a:srgbClr val="FFC400"/>
+            </a:solidFill>
+            <a:prstDash val="solid"/>
+          </a:ln>
+        </p:spPr>
+      </p:sp>
+      <p:pic>
+        <p:nvPicPr>
+          <p:cNvPr id="5" name="방법아이콘_1_icon" descr="preencoded.png">    </p:cNvPr>
+          <p:cNvPicPr>
+            <a:picLocks noChangeAspect="1"/>
+          </p:cNvPicPr>
+          <p:nvPr/>
+        </p:nvPicPr>
+        <p:blipFill>
+          <a:blip r:embed="rId1"/>
+          <a:stretch>
+            <a:fillRect/>
+          </a:stretch>
+        </p:blipFill>
+        <p:spPr>
+          <a:xfrm>
+            <a:off x="976579" y="1799539"/>
+            <a:ext cx="332842" cy="332842"/>
+          </a:xfrm>
+          <a:prstGeom prst="rect">
+            <a:avLst/>
+          </a:prstGeom>
+        </p:spPr>
+      </p:pic>
+      <p:sp>
+        <p:nvSpPr>
+          <p:cNvPr id="6" name="Text 3"/>
+          <p:cNvSpPr txBox="1"/>
+          <p:nvPr/>
+        </p:nvSpPr>
+        <p:spPr>
+          <a:xfrm>
+            <a:off x="2247824" y="1673352"/>
+            <a:ext cx="594360" cy="457200"/>
+          </a:xfrm>
+          <a:prstGeom prst="rect">
+            <a:avLst/>
+          </a:prstGeom>
+          <a:noFill/>
+          <a:ln/>
+        </p:spPr>
+        <p:txBody>
+          <a:bodyPr wrap="square" lIns="0" tIns="0" rIns="0" bIns="0" rtlCol="0" anchor="ctr"/>
+          <a:lstStyle/>
+          <a:p>
+            <a:pPr algn="r" indent="0" marL="0">
+              <a:buNone/>
+            </a:pPr>
+            <a:r>
+              <a:rPr lang="en-US" sz="2200" b="1" dirty="0">
+                <a:solidFill>
+                  <a:srgbClr val="D0D5DD"/>
+                </a:solidFill>
+              </a:rPr>
+              <a:t>01</a:t>
+            </a:r>
+            <a:endParaRPr lang="en-US" sz="2200" dirty="0"/>
+          </a:p>
+        </p:txBody>
+      </p:sp>
+      <p:sp>
+        <p:nvSpPr>
+          <p:cNvPr id="7" name="Text 4"/>
+          <p:cNvSpPr txBox="1"/>
+          <p:nvPr/>
+        </p:nvSpPr>
+        <p:spPr>
+          <a:xfrm>
+            <a:off x="822960" y="2514600"/>
+            <a:ext cx="2019224" cy="411480"/>
+          </a:xfrm>
+          <a:prstGeom prst="rect">
+            <a:avLst/>
+          </a:prstGeom>
+          <a:noFill/>
+          <a:ln/>
+        </p:spPr>
+        <p:txBody>
+          <a:bodyPr wrap="square" lIns="0" tIns="0" rIns="0" bIns="0" rtlCol="0" anchor="ctr"/>
+          <a:lstStyle/>
+          <a:p>
+            <a:pPr indent="0" marL="0">
+              <a:buNone/>
+            </a:pPr>
+            <a:r>
+              <a:rPr lang="en-US" sz="1700" b="1" dirty="0">
+                <a:solidFill>
+                  <a:schemeClr val="tx2"/>
+                </a:solidFill>
+              </a:rPr>
+              <a:t>교육 확인 서명</a:t>
+            </a:r>
+            <a:endParaRPr lang="en-US" sz="1700" dirty="0"/>
+          </a:p>
+        </p:txBody>
+      </p:sp>
+      <p:sp>
+        <p:nvSpPr>
+          <p:cNvPr id="8" name="Text 5"/>
+          <p:cNvSpPr txBox="1"/>
+          <p:nvPr/>
+        </p:nvSpPr>
+        <p:spPr>
+          <a:xfrm>
+            <a:off x="822960" y="3017520"/>
+            <a:ext cx="2019224" cy="1645920"/>
+          </a:xfrm>
+          <a:prstGeom prst="rect">
+            <a:avLst/>
+          </a:prstGeom>
+          <a:noFill/>
+          <a:ln/>
+        </p:spPr>
+        <p:txBody>
+          <a:bodyPr wrap="square" lIns="0" tIns="0" rIns="0" bIns="0" rtlCol="0" anchor="t"/>
+          <a:lstStyle/>
+          <a:p>
+            <a:pPr indent="0" marL="0">
+              <a:buNone/>
+            </a:pPr>
+            <a:r>
+              <a:rPr lang="en-US" sz="1300" dirty="0">
+                <a:solidFill>
+                  <a:srgbClr val="475467"/>
+                </a:solidFill>
+              </a:rPr>
+              <a:t>교육이 끝나면 이해도 질문 결과와 참석자 서명을 남깁니다. SafePlum 표준안전작업절차서 작성기나 엑셀 양식의 '교육 확인 서명부'를 쓰세요.</a:t>
+            </a:r>
+            <a:endParaRPr lang="en-US" sz="1300" dirty="0"/>
+          </a:p>
+        </p:txBody>
+      </p:sp>
+      <p:sp>
+        <p:nvSpPr>
+          <p:cNvPr id="9" name="방법_2"/>
+          <p:cNvSpPr/>
+          <p:nvPr/>
+        </p:nvSpPr>
+        <p:spPr>
+          <a:xfrm>
+            <a:off x="3390824" y="1325880"/>
+            <a:ext cx="2567864" cy="3429000"/>
+          </a:xfrm>
+          <a:prstGeom prst="roundRect">
+            <a:avLst>
+              <a:gd name="adj" fmla="val 4273"/>
+            </a:avLst>
+          </a:prstGeom>
+          <a:solidFill>
+            <a:srgbClr val="F2F4F7"/>
+          </a:solidFill>
+          <a:ln w="12700">
+            <a:solidFill>
+              <a:srgbClr val="F2F4F7"/>
+            </a:solidFill>
+            <a:prstDash val="solid"/>
+          </a:ln>
+        </p:spPr>
+      </p:sp>
+      <p:sp>
+        <p:nvSpPr>
+          <p:cNvPr id="10" name="방법아이콘_2_dot"/>
+          <p:cNvSpPr/>
+          <p:nvPr/>
+        </p:nvSpPr>
+        <p:spPr>
+          <a:xfrm>
+            <a:off x="3665144" y="1645920"/>
+            <a:ext cx="640080" cy="640080"/>
+          </a:xfrm>
+          <a:prstGeom prst="ellipse">
+            <a:avLst/>
+          </a:prstGeom>
+          <a:solidFill>
+            <a:srgbClr val="FFC400"/>
+          </a:solidFill>
+          <a:ln w="12700">
+            <a:solidFill>
+              <a:srgbClr val="FFC400"/>
+            </a:solidFill>
+            <a:prstDash val="solid"/>
+          </a:ln>
+        </p:spPr>
+      </p:sp>
+      <p:pic>
+        <p:nvPicPr>
+          <p:cNvPr id="11" name="방법아이콘_2_icon" descr="preencoded.png">    </p:cNvPr>
+          <p:cNvPicPr>
+            <a:picLocks noChangeAspect="1"/>
+          </p:cNvPicPr>
+          <p:nvPr/>
+        </p:nvPicPr>
+        <p:blipFill>
+          <a:blip r:embed="rId2"/>
+          <a:stretch>
+            <a:fillRect/>
+          </a:stretch>
+        </p:blipFill>
+        <p:spPr>
+          <a:xfrm>
+            <a:off x="3818763" y="1799539"/>
+            <a:ext cx="332842" cy="332842"/>
+          </a:xfrm>
+          <a:prstGeom prst="rect">
+            <a:avLst/>
+          </a:prstGeom>
+        </p:spPr>
+      </p:pic>
+      <p:sp>
+        <p:nvSpPr>
+          <p:cNvPr id="12" name="Text 8"/>
+          <p:cNvSpPr txBox="1"/>
+          <p:nvPr/>
+        </p:nvSpPr>
+        <p:spPr>
+          <a:xfrm>
+            <a:off x="5090008" y="1673352"/>
+            <a:ext cx="594360" cy="457200"/>
+          </a:xfrm>
+          <a:prstGeom prst="rect">
+            <a:avLst/>
+          </a:prstGeom>
+          <a:noFill/>
+          <a:ln/>
+        </p:spPr>
+        <p:txBody>
+          <a:bodyPr wrap="square" lIns="0" tIns="0" rIns="0" bIns="0" rtlCol="0" anchor="ctr"/>
+          <a:lstStyle/>
+          <a:p>
+            <a:pPr algn="r" indent="0" marL="0">
+              <a:buNone/>
+            </a:pPr>
+            <a:r>
+              <a:rPr lang="en-US" sz="2200" b="1" dirty="0">
+                <a:solidFill>
+                  <a:srgbClr val="D0D5DD"/>
+                </a:solidFill>
+              </a:rPr>
+              <a:t>02</a:t>
+            </a:r>
+            <a:endParaRPr lang="en-US" sz="2200" dirty="0"/>
+          </a:p>
+        </p:txBody>
+      </p:sp>
+      <p:sp>
+        <p:nvSpPr>
+          <p:cNvPr id="13" name="Text 9"/>
+          <p:cNvSpPr txBox="1"/>
+          <p:nvPr/>
+        </p:nvSpPr>
+        <p:spPr>
+          <a:xfrm>
+            <a:off x="3665144" y="2514600"/>
+            <a:ext cx="2019224" cy="411480"/>
+          </a:xfrm>
+          <a:prstGeom prst="rect">
+            <a:avLst/>
+          </a:prstGeom>
+          <a:noFill/>
+          <a:ln/>
+        </p:spPr>
+        <p:txBody>
+          <a:bodyPr wrap="square" lIns="0" tIns="0" rIns="0" bIns="0" rtlCol="0" anchor="ctr"/>
+          <a:lstStyle/>
+          <a:p>
+            <a:pPr indent="0" marL="0">
+              <a:buNone/>
+            </a:pPr>
+            <a:r>
+              <a:rPr lang="en-US" sz="1700" b="1" dirty="0">
+                <a:solidFill>
+                  <a:schemeClr val="tx2"/>
+                </a:solidFill>
+              </a:rPr>
+              <a:t>작업 바꾸기</a:t>
+            </a:r>
+            <a:endParaRPr lang="en-US" sz="1700" dirty="0"/>
+          </a:p>
+        </p:txBody>
+      </p:sp>
+      <p:sp>
+        <p:nvSpPr>
+          <p:cNvPr id="14" name="Text 10"/>
+          <p:cNvSpPr txBox="1"/>
+          <p:nvPr/>
+        </p:nvSpPr>
+        <p:spPr>
+          <a:xfrm>
+            <a:off x="3665144" y="3017520"/>
+            <a:ext cx="2019224" cy="1645920"/>
+          </a:xfrm>
+          <a:prstGeom prst="rect">
+            <a:avLst/>
+          </a:prstGeom>
+          <a:noFill/>
+          <a:ln/>
+        </p:spPr>
+        <p:txBody>
+          <a:bodyPr wrap="square" lIns="0" tIns="0" rIns="0" bIns="0" rtlCol="0" anchor="t"/>
+          <a:lstStyle/>
+          <a:p>
+            <a:pPr indent="0" marL="0">
+              <a:buNone/>
+            </a:pPr>
+            <a:r>
+              <a:rPr lang="en-US" sz="1300" dirty="0">
+                <a:solidFill>
+                  <a:srgbClr val="475467"/>
+                </a:solidFill>
+              </a:rPr>
+              <a:t>표지·개요·단계 장의 글자를 사업장 작업으로 바꿉니다. 단계가 더 있으면 '작업 절차' 장을 Ctrl+D로 복제하세요.</a:t>
+            </a:r>
+            <a:endParaRPr lang="en-US" sz="1300" dirty="0"/>
+          </a:p>
+        </p:txBody>
+      </p:sp>
+      <p:sp>
+        <p:nvSpPr>
+          <p:cNvPr id="15" name="방법_3"/>
+          <p:cNvSpPr/>
+          <p:nvPr/>
+        </p:nvSpPr>
+        <p:spPr>
+          <a:xfrm>
+            <a:off x="6233008" y="1325880"/>
+            <a:ext cx="2567864" cy="3429000"/>
+          </a:xfrm>
+          <a:prstGeom prst="roundRect">
+            <a:avLst>
+              <a:gd name="adj" fmla="val 4273"/>
+            </a:avLst>
+          </a:prstGeom>
+          <a:solidFill>
+            <a:srgbClr val="F2F4F7"/>
+          </a:solidFill>
+          <a:ln w="12700">
+            <a:solidFill>
+              <a:srgbClr val="F2F4F7"/>
+            </a:solidFill>
+            <a:prstDash val="solid"/>
+          </a:ln>
+        </p:spPr>
+      </p:sp>
+      <p:sp>
+        <p:nvSpPr>
+          <p:cNvPr id="16" name="방법아이콘_3_dot"/>
+          <p:cNvSpPr/>
+          <p:nvPr/>
+        </p:nvSpPr>
+        <p:spPr>
+          <a:xfrm>
+            <a:off x="6507328" y="1645920"/>
+            <a:ext cx="640080" cy="640080"/>
+          </a:xfrm>
+          <a:prstGeom prst="ellipse">
+            <a:avLst/>
+          </a:prstGeom>
+          <a:solidFill>
+            <a:srgbClr val="FFC400"/>
+          </a:solidFill>
+          <a:ln w="12700">
+            <a:solidFill>
+              <a:srgbClr val="FFC400"/>
+            </a:solidFill>
+            <a:prstDash val="solid"/>
+          </a:ln>
+        </p:spPr>
+      </p:sp>
+      <p:pic>
+        <p:nvPicPr>
+          <p:cNvPr id="17" name="방법아이콘_3_icon" descr="preencoded.png">    </p:cNvPr>
+          <p:cNvPicPr>
+            <a:picLocks noChangeAspect="1"/>
+          </p:cNvPicPr>
+          <p:nvPr/>
+        </p:nvPicPr>
+        <p:blipFill>
+          <a:blip r:embed="rId3"/>
+          <a:stretch>
+            <a:fillRect/>
+          </a:stretch>
+        </p:blipFill>
+        <p:spPr>
+          <a:xfrm>
+            <a:off x="6660947" y="1799539"/>
+            <a:ext cx="332842" cy="332842"/>
+          </a:xfrm>
+          <a:prstGeom prst="rect">
+            <a:avLst/>
+          </a:prstGeom>
+        </p:spPr>
+      </p:pic>
+      <p:sp>
+        <p:nvSpPr>
+          <p:cNvPr id="18" name="Text 13"/>
+          <p:cNvSpPr txBox="1"/>
+          <p:nvPr/>
+        </p:nvSpPr>
+        <p:spPr>
+          <a:xfrm>
+            <a:off x="7932191" y="1673352"/>
+            <a:ext cx="594360" cy="457200"/>
+          </a:xfrm>
+          <a:prstGeom prst="rect">
+            <a:avLst/>
+          </a:prstGeom>
+          <a:noFill/>
+          <a:ln/>
+        </p:spPr>
+        <p:txBody>
+          <a:bodyPr wrap="square" lIns="0" tIns="0" rIns="0" bIns="0" rtlCol="0" anchor="ctr"/>
+          <a:lstStyle/>
+          <a:p>
+            <a:pPr algn="r" indent="0" marL="0">
+              <a:buNone/>
+            </a:pPr>
+            <a:r>
+              <a:rPr lang="en-US" sz="2200" b="1" dirty="0">
+                <a:solidFill>
+                  <a:srgbClr val="D0D5DD"/>
+                </a:solidFill>
+              </a:rPr>
+              <a:t>03</a:t>
+            </a:r>
+            <a:endParaRPr lang="en-US" sz="2200" dirty="0"/>
+          </a:p>
+        </p:txBody>
+      </p:sp>
+      <p:sp>
+        <p:nvSpPr>
+          <p:cNvPr id="19" name="Text 14"/>
+          <p:cNvSpPr txBox="1"/>
+          <p:nvPr/>
+        </p:nvSpPr>
+        <p:spPr>
+          <a:xfrm>
+            <a:off x="6507328" y="2514600"/>
+            <a:ext cx="2019224" cy="411480"/>
+          </a:xfrm>
+          <a:prstGeom prst="rect">
+            <a:avLst/>
+          </a:prstGeom>
+          <a:noFill/>
+          <a:ln/>
+        </p:spPr>
+        <p:txBody>
+          <a:bodyPr wrap="square" lIns="0" tIns="0" rIns="0" bIns="0" rtlCol="0" anchor="ctr"/>
+          <a:lstStyle/>
+          <a:p>
+            <a:pPr indent="0" marL="0">
+              <a:buNone/>
+            </a:pPr>
+            <a:r>
+              <a:rPr lang="en-US" sz="1700" b="1" dirty="0">
+                <a:solidFill>
+                  <a:schemeClr val="tx2"/>
+                </a:solidFill>
+              </a:rPr>
+              <a:t>사진 넣기</a:t>
+            </a:r>
+            <a:endParaRPr lang="en-US" sz="1700" dirty="0"/>
+          </a:p>
+        </p:txBody>
+      </p:sp>
+      <p:sp>
+        <p:nvSpPr>
+          <p:cNvPr id="20" name="Text 15"/>
+          <p:cNvSpPr txBox="1"/>
+          <p:nvPr/>
+        </p:nvSpPr>
+        <p:spPr>
+          <a:xfrm>
+            <a:off x="6507328" y="3017520"/>
+            <a:ext cx="2019224" cy="1645920"/>
+          </a:xfrm>
+          <a:prstGeom prst="rect">
+            <a:avLst/>
+          </a:prstGeom>
+          <a:noFill/>
+          <a:ln/>
+        </p:spPr>
+        <p:txBody>
+          <a:bodyPr wrap="square" lIns="0" tIns="0" rIns="0" bIns="0" rtlCol="0" anchor="t"/>
+          <a:lstStyle/>
+          <a:p>
+            <a:pPr indent="0" marL="0">
+              <a:buNone/>
+            </a:pPr>
+            <a:r>
+              <a:rPr lang="en-US" sz="1300" dirty="0">
+                <a:solidFill>
+                  <a:srgbClr val="475467"/>
+                </a:solidFill>
+              </a:rPr>
+              <a:t>단계 사진 칸을 우클릭 → [그림 바꾸기]로 실제 설비 사진을 넣습니다. 크기·위치는 그대로 유지됩니다.</a:t>
+            </a:r>
+            <a:endParaRPr lang="en-US" sz="1300" dirty="0"/>
+          </a:p>
+        </p:txBody>
+      </p:sp>
+      <p:sp>
+        <p:nvSpPr>
+          <p:cNvPr id="21" name="방법_4"/>
+          <p:cNvSpPr/>
+          <p:nvPr/>
+        </p:nvSpPr>
+        <p:spPr>
+          <a:xfrm>
+            <a:off x="9075191" y="1325880"/>
+            <a:ext cx="2567864" cy="3429000"/>
+          </a:xfrm>
+          <a:prstGeom prst="roundRect">
+            <a:avLst>
+              <a:gd name="adj" fmla="val 4273"/>
+            </a:avLst>
+          </a:prstGeom>
+          <a:solidFill>
+            <a:srgbClr val="F2F4F7"/>
+          </a:solidFill>
+          <a:ln w="12700">
+            <a:solidFill>
+              <a:srgbClr val="F2F4F7"/>
+            </a:solidFill>
+            <a:prstDash val="solid"/>
+          </a:ln>
+        </p:spPr>
+      </p:sp>
+      <p:sp>
+        <p:nvSpPr>
+          <p:cNvPr id="22" name="방법아이콘_4_dot"/>
+          <p:cNvSpPr/>
+          <p:nvPr/>
+        </p:nvSpPr>
+        <p:spPr>
+          <a:xfrm>
+            <a:off x="9349511" y="1645920"/>
+            <a:ext cx="640080" cy="640080"/>
+          </a:xfrm>
+          <a:prstGeom prst="ellipse">
+            <a:avLst/>
+          </a:prstGeom>
+          <a:solidFill>
+            <a:srgbClr val="FFC400"/>
+          </a:solidFill>
+          <a:ln w="12700">
+            <a:solidFill>
+              <a:srgbClr val="FFC400"/>
+            </a:solidFill>
+            <a:prstDash val="solid"/>
+          </a:ln>
+        </p:spPr>
+      </p:sp>
+      <p:pic>
+        <p:nvPicPr>
+          <p:cNvPr id="23" name="방법아이콘_4_icon" descr="preencoded.png">    </p:cNvPr>
+          <p:cNvPicPr>
+            <a:picLocks noChangeAspect="1"/>
+          </p:cNvPicPr>
+          <p:nvPr/>
+        </p:nvPicPr>
+        <p:blipFill>
+          <a:blip r:embed="rId4"/>
+          <a:stretch>
+            <a:fillRect/>
+          </a:stretch>
+        </p:blipFill>
+        <p:spPr>
+          <a:xfrm>
+            <a:off x="9503131" y="1799539"/>
+            <a:ext cx="332842" cy="332842"/>
+          </a:xfrm>
+          <a:prstGeom prst="rect">
+            <a:avLst/>
+          </a:prstGeom>
+        </p:spPr>
+      </p:pic>
+      <p:sp>
+        <p:nvSpPr>
+          <p:cNvPr id="24" name="Text 18"/>
+          <p:cNvSpPr txBox="1"/>
+          <p:nvPr/>
+        </p:nvSpPr>
+        <p:spPr>
+          <a:xfrm>
+            <a:off x="10774375" y="1673352"/>
+            <a:ext cx="594360" cy="457200"/>
+          </a:xfrm>
+          <a:prstGeom prst="rect">
+            <a:avLst/>
+          </a:prstGeom>
+          <a:noFill/>
+          <a:ln/>
+        </p:spPr>
+        <p:txBody>
+          <a:bodyPr wrap="square" lIns="0" tIns="0" rIns="0" bIns="0" rtlCol="0" anchor="ctr"/>
+          <a:lstStyle/>
+          <a:p>
+            <a:pPr algn="r" indent="0" marL="0">
+              <a:buNone/>
+            </a:pPr>
+            <a:r>
+              <a:rPr lang="en-US" sz="2200" b="1" dirty="0">
+                <a:solidFill>
+                  <a:srgbClr val="D0D5DD"/>
+                </a:solidFill>
+              </a:rPr>
+              <a:t>04</a:t>
+            </a:r>
+            <a:endParaRPr lang="en-US" sz="2200" dirty="0"/>
+          </a:p>
+        </p:txBody>
+      </p:sp>
+      <p:sp>
+        <p:nvSpPr>
+          <p:cNvPr id="25" name="Text 19"/>
+          <p:cNvSpPr txBox="1"/>
+          <p:nvPr/>
+        </p:nvSpPr>
+        <p:spPr>
+          <a:xfrm>
+            <a:off x="9349511" y="2514600"/>
+            <a:ext cx="2019224" cy="411480"/>
+          </a:xfrm>
+          <a:prstGeom prst="rect">
+            <a:avLst/>
+          </a:prstGeom>
+          <a:noFill/>
+          <a:ln/>
+        </p:spPr>
+        <p:txBody>
+          <a:bodyPr wrap="square" lIns="0" tIns="0" rIns="0" bIns="0" rtlCol="0" anchor="ctr"/>
+          <a:lstStyle/>
+          <a:p>
+            <a:pPr indent="0" marL="0">
+              <a:buNone/>
+            </a:pPr>
+            <a:r>
+              <a:rPr lang="en-US" sz="1700" b="1" dirty="0">
+                <a:solidFill>
+                  <a:schemeClr val="tx2"/>
+                </a:solidFill>
+              </a:rPr>
+              <a:t>절차서와 맞추기</a:t>
+            </a:r>
+            <a:endParaRPr lang="en-US" sz="1700" dirty="0"/>
+          </a:p>
+        </p:txBody>
+      </p:sp>
+      <p:sp>
+        <p:nvSpPr>
+          <p:cNvPr id="26" name="Text 20"/>
+          <p:cNvSpPr txBox="1"/>
+          <p:nvPr/>
+        </p:nvSpPr>
+        <p:spPr>
+          <a:xfrm>
+            <a:off x="9349511" y="3017520"/>
+            <a:ext cx="2019224" cy="1645920"/>
+          </a:xfrm>
+          <a:prstGeom prst="rect">
+            <a:avLst/>
+          </a:prstGeom>
+          <a:noFill/>
+          <a:ln/>
+        </p:spPr>
+        <p:txBody>
+          <a:bodyPr wrap="square" lIns="0" tIns="0" rIns="0" bIns="0" rtlCol="0" anchor="t"/>
+          <a:lstStyle/>
+          <a:p>
+            <a:pPr indent="0" marL="0">
+              <a:buNone/>
+            </a:pPr>
+            <a:r>
+              <a:rPr lang="en-US" sz="1300" dirty="0">
+                <a:solidFill>
+                  <a:srgbClr val="475467"/>
+                </a:solidFill>
+              </a:rPr>
+              <a:t>이 자료의 내용은 표준안전작업절차서(문서)와 같아야 합니다. 절차서를 개정하면 이 자료도 함께 고치세요.</a:t>
+            </a:r>
+            <a:endParaRPr lang="en-US" sz="1300" dirty="0"/>
+          </a:p>
+        </p:txBody>
+      </p:sp>
+      <p:sp>
+        <p:nvSpPr>
+          <p:cNvPr id="27" name="방법_안내"/>
+          <p:cNvSpPr/>
+          <p:nvPr/>
+        </p:nvSpPr>
+        <p:spPr>
+          <a:xfrm>
+            <a:off x="548640" y="5029200"/>
+            <a:ext cx="11094415" cy="868680"/>
+          </a:xfrm>
+          <a:prstGeom prst="roundRect">
+            <a:avLst>
+              <a:gd name="adj" fmla="val 12632"/>
+            </a:avLst>
+          </a:prstGeom>
+          <a:solidFill>
+            <a:srgbClr val="FFF6D6"/>
+          </a:solidFill>
+          <a:ln w="12700">
+            <a:solidFill>
+              <a:srgbClr val="FFF6D6"/>
+            </a:solidFill>
+            <a:prstDash val="solid"/>
+          </a:ln>
+        </p:spPr>
+      </p:sp>
+      <p:sp>
+        <p:nvSpPr>
+          <p:cNvPr id="28" name="Text 22"/>
+          <p:cNvSpPr txBox="1"/>
+          <p:nvPr/>
+        </p:nvSpPr>
+        <p:spPr>
+          <a:xfrm>
+            <a:off x="822960" y="5120640"/>
+            <a:ext cx="10545775" cy="685800"/>
+          </a:xfrm>
+          <a:prstGeom prst="rect">
+            <a:avLst/>
+          </a:prstGeom>
+          <a:noFill/>
+          <a:ln/>
+        </p:spPr>
+        <p:txBody>
+          <a:bodyPr wrap="square" lIns="0" tIns="0" rIns="0" bIns="0" rtlCol="0" anchor="ctr"/>
+          <a:lstStyle/>
+          <a:p>
+            <a:pPr indent="0" marL="0">
+              <a:buNone/>
+            </a:pPr>
+            <a:r>
+              <a:rPr lang="en-US" sz="1300" b="1" dirty="0">
+                <a:solidFill>
+                  <a:schemeClr val="tx2"/>
+                </a:solidFill>
+              </a:rPr>
+              <a:t>작성기  </a:t>
+            </a:r>
+            <a:pPr indent="0" marL="0">
+              <a:buNone/>
+            </a:pPr>
+            <a:r>
+              <a:rPr lang="en-US" sz="1300" dirty="0">
+                <a:solidFill>
+                  <a:srgbClr val="475467"/>
+                </a:solidFill>
+              </a:rPr>
+              <a:t>safeplum.com/tools/forms/sop — 예시 작업 고르기, 단계별 사진, 이해도 질문·서명까지 화면에서 작성하고 A4로 인쇄. 이 장은 교육 전에 지우세요.</a:t>
+            </a:r>
+            <a:endParaRPr lang="en-US" sz="1300" dirty="0"/>
+          </a:p>
+        </p:txBody>
+      </p:sp>
+      <p:sp>
+        <p:nvSpPr>
+          <p:cNvPr id="25" name="Slide Number Placeholder 0"/>
+          <p:cNvSpPr>
+            <a:spLocks noGrp="1"/>
+          </p:cNvSpPr>
+          <p:nvPr>
+            <p:ph type="sldNum" sz="quarter" idx="4294967295"/>
+          </p:nvPr>
+        </p:nvSpPr>
+        <p:spPr>
+          <a:xfrm>
+            <a:off x="11094415" y="6473952"/>
+            <a:ext cx="548640" cy="274320"/>
+          </a:xfrm>
+          <a:prstGeom prst="rect">
+            <a:avLst/>
+          </a:prstGeom>
+          <a:extLst>
+            <a:ext uri="{C572A759-6A51-4108-AA02-DFA0A04FC94B}">
+              <ma14:wrappingTextBoxFlag xmlns:ma14="http://schemas.microsoft.com/office/mac/drawingml/2011/main" val="0"/>
+            </a:ext>
+          </a:extLst>
+        </p:spPr>
+        <p:txBody>
+          <a:bodyPr/>
+          <a:lstStyle>
+            <a:lvl1pPr>
+              <a:defRPr sz="900">
+                <a:solidFill>
+                  <a:srgbClr val="98A2B3"/>
+                </a:solidFill>
+              </a:defRPr>
+            </a:lvl1pPr>
+          </a:lstStyle>
+          <a:p>
+            <a:pPr algn="r"/>
+            <a:fld id="{F7021451-1387-4CA6-816F-3879F97B5CBC}" type="slidenum">
+              <a:rPr b="0" lang="en-US"/>
+              <a:t>12</a:t>
             </a:fld>
             <a:endParaRPr lang="en-US"/>
           </a:p>
@@ -6102,12 +7759,12 @@
         </p:nvSpPr>
         <p:spPr>
           <a:xfrm>
-            <a:off x="548640" y="1371600"/>
-            <a:ext cx="6949440" cy="694944"/>
+            <a:off x="548640" y="1280160"/>
+            <a:ext cx="6949440" cy="621792"/>
           </a:xfrm>
           <a:prstGeom prst="roundRect">
             <a:avLst>
-              <a:gd name="adj" fmla="val 15789"/>
+              <a:gd name="adj" fmla="val 17647"/>
             </a:avLst>
           </a:prstGeom>
           <a:solidFill>
@@ -6129,7 +7786,7 @@
         </p:nvSpPr>
         <p:spPr>
           <a:xfrm>
-            <a:off x="731520" y="1499616"/>
+            <a:off x="731520" y="1371600"/>
             <a:ext cx="438912" cy="438912"/>
           </a:xfrm>
           <a:prstGeom prst="ellipse">
@@ -6162,7 +7819,7 @@
         </p:blipFill>
         <p:spPr>
           <a:xfrm>
-            <a:off x="836859" y="1604955"/>
+            <a:off x="836859" y="1476939"/>
             <a:ext cx="228234" cy="228234"/>
           </a:xfrm>
           <a:prstGeom prst="rect">
@@ -6178,8 +7835,8 @@
         </p:nvSpPr>
         <p:spPr>
           <a:xfrm>
-            <a:off x="1371600" y="1371600"/>
-            <a:ext cx="5943600" cy="694944"/>
+            <a:off x="1371600" y="1280160"/>
+            <a:ext cx="5943600" cy="621792"/>
           </a:xfrm>
           <a:prstGeom prst="rect">
             <a:avLst/>
@@ -6195,14 +7852,14 @@
               <a:buNone/>
             </a:pPr>
             <a:r>
-              <a:rPr lang="en-US" sz="1700" dirty="0">
+              <a:rPr lang="en-US" sz="1600" dirty="0">
                 <a:solidFill>
                   <a:srgbClr val="1D2939"/>
                 </a:solidFill>
               </a:rPr>
               <a:t>작업 구역 정리, 통로 확보</a:t>
             </a:r>
-            <a:endParaRPr lang="en-US" sz="1700" dirty="0"/>
+            <a:endParaRPr lang="en-US" sz="1600" dirty="0"/>
           </a:p>
         </p:txBody>
       </p:sp>
@@ -6214,12 +7871,12 @@
         </p:nvSpPr>
         <p:spPr>
           <a:xfrm>
-            <a:off x="548640" y="2212848"/>
-            <a:ext cx="6949440" cy="694944"/>
+            <a:off x="548640" y="2011680"/>
+            <a:ext cx="6949440" cy="621792"/>
           </a:xfrm>
           <a:prstGeom prst="roundRect">
             <a:avLst>
-              <a:gd name="adj" fmla="val 15789"/>
+              <a:gd name="adj" fmla="val 17647"/>
             </a:avLst>
           </a:prstGeom>
           <a:solidFill>
@@ -6241,7 +7898,7 @@
         </p:nvSpPr>
         <p:spPr>
           <a:xfrm>
-            <a:off x="731520" y="2340864"/>
+            <a:off x="731520" y="2103120"/>
             <a:ext cx="438912" cy="438912"/>
           </a:xfrm>
           <a:prstGeom prst="ellipse">
@@ -6274,7 +7931,7 @@
         </p:blipFill>
         <p:spPr>
           <a:xfrm>
-            <a:off x="836859" y="2446203"/>
+            <a:off x="836859" y="2208459"/>
             <a:ext cx="228234" cy="228234"/>
           </a:xfrm>
           <a:prstGeom prst="rect">
@@ -6290,8 +7947,8 @@
         </p:nvSpPr>
         <p:spPr>
           <a:xfrm>
-            <a:off x="1371600" y="2212848"/>
-            <a:ext cx="5943600" cy="694944"/>
+            <a:off x="1371600" y="2011680"/>
+            <a:ext cx="5943600" cy="621792"/>
           </a:xfrm>
           <a:prstGeom prst="rect">
             <a:avLst/>
@@ -6307,14 +7964,14 @@
               <a:buNone/>
             </a:pPr>
             <a:r>
-              <a:rPr lang="en-US" sz="1700" dirty="0">
+              <a:rPr lang="en-US" sz="1600" dirty="0">
                 <a:solidFill>
                   <a:srgbClr val="1D2939"/>
                 </a:solidFill>
               </a:rPr>
               <a:t>보호구 상태 확인·착용</a:t>
             </a:r>
-            <a:endParaRPr lang="en-US" sz="1700" dirty="0"/>
+            <a:endParaRPr lang="en-US" sz="1600" dirty="0"/>
           </a:p>
         </p:txBody>
       </p:sp>
@@ -6326,12 +7983,12 @@
         </p:nvSpPr>
         <p:spPr>
           <a:xfrm>
-            <a:off x="548640" y="3054096"/>
-            <a:ext cx="6949440" cy="694944"/>
+            <a:off x="548640" y="2743200"/>
+            <a:ext cx="6949440" cy="621792"/>
           </a:xfrm>
           <a:prstGeom prst="roundRect">
             <a:avLst>
-              <a:gd name="adj" fmla="val 15789"/>
+              <a:gd name="adj" fmla="val 17647"/>
             </a:avLst>
           </a:prstGeom>
           <a:solidFill>
@@ -6353,7 +8010,7 @@
         </p:nvSpPr>
         <p:spPr>
           <a:xfrm>
-            <a:off x="731520" y="3182112"/>
+            <a:off x="731520" y="2834640"/>
             <a:ext cx="438912" cy="438912"/>
           </a:xfrm>
           <a:prstGeom prst="ellipse">
@@ -6386,7 +8043,7 @@
         </p:blipFill>
         <p:spPr>
           <a:xfrm>
-            <a:off x="836859" y="3287451"/>
+            <a:off x="836859" y="2939979"/>
             <a:ext cx="228234" cy="228234"/>
           </a:xfrm>
           <a:prstGeom prst="rect">
@@ -6402,8 +8059,8 @@
         </p:nvSpPr>
         <p:spPr>
           <a:xfrm>
-            <a:off x="1371600" y="3054096"/>
-            <a:ext cx="5943600" cy="694944"/>
+            <a:off x="1371600" y="2743200"/>
+            <a:ext cx="5943600" cy="621792"/>
           </a:xfrm>
           <a:prstGeom prst="rect">
             <a:avLst/>
@@ -6419,14 +8076,14 @@
               <a:buNone/>
             </a:pPr>
             <a:r>
-              <a:rPr lang="en-US" sz="1700" dirty="0">
+              <a:rPr lang="en-US" sz="1600" dirty="0">
                 <a:solidFill>
                   <a:srgbClr val="1D2939"/>
                 </a:solidFill>
               </a:rPr>
               <a:t>잠금장치·꼬리표 등 필요한 도구 준비</a:t>
             </a:r>
-            <a:endParaRPr lang="en-US" sz="1700" dirty="0"/>
+            <a:endParaRPr lang="en-US" sz="1600" dirty="0"/>
           </a:p>
         </p:txBody>
       </p:sp>
@@ -6438,12 +8095,12 @@
         </p:nvSpPr>
         <p:spPr>
           <a:xfrm>
-            <a:off x="548640" y="3895344"/>
-            <a:ext cx="6949440" cy="694944"/>
+            <a:off x="548640" y="3474720"/>
+            <a:ext cx="6949440" cy="621792"/>
           </a:xfrm>
           <a:prstGeom prst="roundRect">
             <a:avLst>
-              <a:gd name="adj" fmla="val 15789"/>
+              <a:gd name="adj" fmla="val 17647"/>
             </a:avLst>
           </a:prstGeom>
           <a:solidFill>
@@ -6465,7 +8122,7 @@
         </p:nvSpPr>
         <p:spPr>
           <a:xfrm>
-            <a:off x="731520" y="4023360"/>
+            <a:off x="731520" y="3566160"/>
             <a:ext cx="438912" cy="438912"/>
           </a:xfrm>
           <a:prstGeom prst="ellipse">
@@ -6498,7 +8155,7 @@
         </p:blipFill>
         <p:spPr>
           <a:xfrm>
-            <a:off x="836859" y="4128699"/>
+            <a:off x="836859" y="3671499"/>
             <a:ext cx="228234" cy="228234"/>
           </a:xfrm>
           <a:prstGeom prst="rect">
@@ -6514,8 +8171,8 @@
         </p:nvSpPr>
         <p:spPr>
           <a:xfrm>
-            <a:off x="1371600" y="3895344"/>
-            <a:ext cx="5943600" cy="694944"/>
+            <a:off x="1371600" y="3474720"/>
+            <a:ext cx="5943600" cy="621792"/>
           </a:xfrm>
           <a:prstGeom prst="rect">
             <a:avLst/>
@@ -6531,14 +8188,14 @@
               <a:buNone/>
             </a:pPr>
             <a:r>
-              <a:rPr lang="en-US" sz="1700" dirty="0">
+              <a:rPr lang="en-US" sz="1600" dirty="0">
                 <a:solidFill>
                   <a:srgbClr val="1D2939"/>
                 </a:solidFill>
               </a:rPr>
               <a:t>비상정지 스위치 위치·비상연락 방법 확인</a:t>
             </a:r>
-            <a:endParaRPr lang="en-US" sz="1700" dirty="0"/>
+            <a:endParaRPr lang="en-US" sz="1600" dirty="0"/>
           </a:p>
         </p:txBody>
       </p:sp>
@@ -6550,12 +8207,12 @@
         </p:nvSpPr>
         <p:spPr>
           <a:xfrm>
-            <a:off x="548640" y="4736592"/>
-            <a:ext cx="6949440" cy="694944"/>
+            <a:off x="548640" y="4206240"/>
+            <a:ext cx="6949440" cy="621792"/>
           </a:xfrm>
           <a:prstGeom prst="roundRect">
             <a:avLst>
-              <a:gd name="adj" fmla="val 15789"/>
+              <a:gd name="adj" fmla="val 17647"/>
             </a:avLst>
           </a:prstGeom>
           <a:solidFill>
@@ -6577,7 +8234,7 @@
         </p:nvSpPr>
         <p:spPr>
           <a:xfrm>
-            <a:off x="731520" y="4864608"/>
+            <a:off x="731520" y="4297680"/>
             <a:ext cx="438912" cy="438912"/>
           </a:xfrm>
           <a:prstGeom prst="ellipse">
@@ -6610,7 +8267,7 @@
         </p:blipFill>
         <p:spPr>
           <a:xfrm>
-            <a:off x="836859" y="4969947"/>
+            <a:off x="836859" y="4403019"/>
             <a:ext cx="228234" cy="228234"/>
           </a:xfrm>
           <a:prstGeom prst="rect">
@@ -6626,8 +8283,8 @@
         </p:nvSpPr>
         <p:spPr>
           <a:xfrm>
-            <a:off x="1371600" y="4736592"/>
-            <a:ext cx="5943600" cy="694944"/>
+            <a:off x="1371600" y="4206240"/>
+            <a:ext cx="5943600" cy="621792"/>
           </a:xfrm>
           <a:prstGeom prst="rect">
             <a:avLst/>
@@ -6643,39 +8300,39 @@
               <a:buNone/>
             </a:pPr>
             <a:r>
-              <a:rPr lang="en-US" sz="1700" dirty="0">
+              <a:rPr lang="en-US" sz="1600" dirty="0">
                 <a:solidFill>
                   <a:srgbClr val="1D2939"/>
                 </a:solidFill>
               </a:rPr>
-              <a:t>함께 일하는 사람에게 오늘 작업 순서·위험 공유(TBM)</a:t>
-            </a:r>
-            <a:endParaRPr lang="en-US" sz="1700" dirty="0"/>
-          </a:p>
-        </p:txBody>
-      </p:sp>
-      <p:sp>
-        <p:nvSpPr>
-          <p:cNvPr id="24" name="잠금카드"/>
+              <a:t>함께 일하는 사람에게 작업 순서·핵심 위험 공유(TBM)</a:t>
+            </a:r>
+            <a:endParaRPr lang="en-US" sz="1600" dirty="0"/>
+          </a:p>
+        </p:txBody>
+      </p:sp>
+      <p:sp>
+        <p:nvSpPr>
+          <p:cNvPr id="24" name="확인_6"/>
           <p:cNvSpPr/>
           <p:nvPr/>
         </p:nvSpPr>
         <p:spPr>
           <a:xfrm>
-            <a:off x="7863840" y="1371600"/>
-            <a:ext cx="3779215" cy="4059936"/>
+            <a:off x="548640" y="4937760"/>
+            <a:ext cx="6949440" cy="621792"/>
           </a:xfrm>
           <a:prstGeom prst="roundRect">
             <a:avLst>
-              <a:gd name="adj" fmla="val 2903"/>
+              <a:gd name="adj" fmla="val 17647"/>
             </a:avLst>
           </a:prstGeom>
           <a:solidFill>
-            <a:srgbClr val="0E1B2E"/>
+            <a:srgbClr val="FFFFFF"/>
           </a:solidFill>
           <a:ln w="12700">
             <a:solidFill>
-              <a:srgbClr val="0E1B2E"/>
+              <a:srgbClr val="E4E7EC"/>
             </a:solidFill>
             <a:prstDash val="solid"/>
           </a:ln>
@@ -6683,24 +8340,24 @@
       </p:sp>
       <p:sp>
         <p:nvSpPr>
-          <p:cNvPr id="25" name="잠금아이콘_dot"/>
+          <p:cNvPr id="25" name="확인아이콘_6_dot"/>
           <p:cNvSpPr/>
           <p:nvPr/>
         </p:nvSpPr>
         <p:spPr>
           <a:xfrm>
-            <a:off x="8183880" y="1645920"/>
-            <a:ext cx="713232" cy="713232"/>
+            <a:off x="731520" y="5029200"/>
+            <a:ext cx="438912" cy="438912"/>
           </a:xfrm>
           <a:prstGeom prst="ellipse">
             <a:avLst/>
           </a:prstGeom>
           <a:solidFill>
-            <a:srgbClr val="FFC400"/>
+            <a:srgbClr val="079455"/>
           </a:solidFill>
           <a:ln w="12700">
             <a:solidFill>
-              <a:srgbClr val="FFC400"/>
+              <a:srgbClr val="079455"/>
             </a:solidFill>
             <a:prstDash val="solid"/>
           </a:ln>
@@ -6708,7 +8365,7 @@
       </p:sp>
       <p:pic>
         <p:nvPicPr>
-          <p:cNvPr id="26" name="잠금아이콘_icon" descr="preencoded.png">    </p:cNvPr>
+          <p:cNvPr id="26" name="확인아이콘_6_icon" descr="preencoded.png">    </p:cNvPr>
           <p:cNvPicPr>
             <a:picLocks noChangeAspect="1"/>
           </p:cNvPicPr>
@@ -6722,6 +8379,118 @@
         </p:blipFill>
         <p:spPr>
           <a:xfrm>
+            <a:off x="836859" y="5134539"/>
+            <a:ext cx="228234" cy="228234"/>
+          </a:xfrm>
+          <a:prstGeom prst="rect">
+            <a:avLst/>
+          </a:prstGeom>
+        </p:spPr>
+      </p:pic>
+      <p:sp>
+        <p:nvSpPr>
+          <p:cNvPr id="27" name="Text 19"/>
+          <p:cNvSpPr txBox="1"/>
+          <p:nvPr/>
+        </p:nvSpPr>
+        <p:spPr>
+          <a:xfrm>
+            <a:off x="1371600" y="4937760"/>
+            <a:ext cx="5943600" cy="621792"/>
+          </a:xfrm>
+          <a:prstGeom prst="rect">
+            <a:avLst/>
+          </a:prstGeom>
+          <a:noFill/>
+          <a:ln/>
+        </p:spPr>
+        <p:txBody>
+          <a:bodyPr wrap="square" lIns="0" tIns="0" rIns="0" bIns="0" rtlCol="0" anchor="ctr"/>
+          <a:lstStyle/>
+          <a:p>
+            <a:pPr indent="0" marL="0">
+              <a:buNone/>
+            </a:pPr>
+            <a:r>
+              <a:rPr lang="en-US" sz="1600" dirty="0">
+                <a:solidFill>
+                  <a:srgbClr val="1D2939"/>
+                </a:solidFill>
+              </a:rPr>
+              <a:t>작업중지 기준 함께 확인</a:t>
+            </a:r>
+            <a:endParaRPr lang="en-US" sz="1600" dirty="0"/>
+          </a:p>
+        </p:txBody>
+      </p:sp>
+      <p:sp>
+        <p:nvSpPr>
+          <p:cNvPr id="28" name="잠금카드"/>
+          <p:cNvSpPr/>
+          <p:nvPr/>
+        </p:nvSpPr>
+        <p:spPr>
+          <a:xfrm>
+            <a:off x="7863840" y="1371600"/>
+            <a:ext cx="3779215" cy="4059936"/>
+          </a:xfrm>
+          <a:prstGeom prst="roundRect">
+            <a:avLst>
+              <a:gd name="adj" fmla="val 2903"/>
+            </a:avLst>
+          </a:prstGeom>
+          <a:solidFill>
+            <a:srgbClr val="0E1B2E"/>
+          </a:solidFill>
+          <a:ln w="12700">
+            <a:solidFill>
+              <a:srgbClr val="0E1B2E"/>
+            </a:solidFill>
+            <a:prstDash val="solid"/>
+          </a:ln>
+        </p:spPr>
+      </p:sp>
+      <p:sp>
+        <p:nvSpPr>
+          <p:cNvPr id="29" name="잠금아이콘_dot"/>
+          <p:cNvSpPr/>
+          <p:nvPr/>
+        </p:nvSpPr>
+        <p:spPr>
+          <a:xfrm>
+            <a:off x="8183880" y="1645920"/>
+            <a:ext cx="713232" cy="713232"/>
+          </a:xfrm>
+          <a:prstGeom prst="ellipse">
+            <a:avLst/>
+          </a:prstGeom>
+          <a:solidFill>
+            <a:srgbClr val="FFC400"/>
+          </a:solidFill>
+          <a:ln w="12700">
+            <a:solidFill>
+              <a:srgbClr val="FFC400"/>
+            </a:solidFill>
+            <a:prstDash val="solid"/>
+          </a:ln>
+        </p:spPr>
+      </p:sp>
+      <p:pic>
+        <p:nvPicPr>
+          <p:cNvPr id="30" name="잠금아이콘_icon" descr="preencoded.png">    </p:cNvPr>
+          <p:cNvPicPr>
+            <a:picLocks noChangeAspect="1"/>
+          </p:cNvPicPr>
+          <p:nvPr/>
+        </p:nvPicPr>
+        <p:blipFill>
+          <a:blip r:embed="rId7"/>
+          <a:stretch>
+            <a:fillRect/>
+          </a:stretch>
+        </p:blipFill>
+        <p:spPr>
+          <a:xfrm>
             <a:off x="8355056" y="1817096"/>
             <a:ext cx="370881" cy="370881"/>
           </a:xfrm>
@@ -6732,7 +8501,7 @@
       </p:pic>
       <p:sp>
         <p:nvSpPr>
-          <p:cNvPr id="27" name="Text 19"/>
+          <p:cNvPr id="31" name="Text 22"/>
           <p:cNvSpPr txBox="1"/>
           <p:nvPr/>
         </p:nvSpPr>
@@ -6768,7 +8537,7 @@
       </p:sp>
       <p:sp>
         <p:nvSpPr>
-          <p:cNvPr id="28" name="Text 20"/>
+          <p:cNvPr id="32" name="Text 23"/>
           <p:cNvSpPr txBox="1"/>
           <p:nvPr/>
         </p:nvSpPr>
@@ -7013,7 +8782,7 @@
         <p:spPr>
           <a:xfrm>
             <a:off x="548640" y="1234440"/>
-            <a:ext cx="3515258" cy="4892040"/>
+            <a:ext cx="3515258" cy="4800600"/>
           </a:xfrm>
           <a:prstGeom prst="roundRect">
             <a:avLst>
@@ -7199,7 +8968,7 @@
                   <a:srgbClr val="B42318"/>
                 </a:solidFill>
               </a:rPr>
-              <a:t>작업 순서를 모른 채 시작</a:t>
+              <a:t>순서·위험을 모른 채 시작해 잠금을 빠뜨림</a:t>
             </a:r>
             <a:endParaRPr lang="en-US" sz="1300" dirty="0"/>
           </a:p>
@@ -7275,7 +9044,7 @@
                   <a:srgbClr val="05603A"/>
                 </a:solidFill>
               </a:rPr>
-              <a:t>TBM에서 청소 구간·담당·잠금 순서 공유, 보호구 착용 서로 확인</a:t>
+              <a:t>TBM에서 청소 구간·담당·잠금 순서와 핵심 위험 공유, 보호구 착용 서로 확인</a:t>
             </a:r>
             <a:endParaRPr lang="en-US" sz="1300" dirty="0"/>
           </a:p>
@@ -7283,14 +9052,90 @@
       </p:sp>
       <p:sp>
         <p:nvSpPr>
-          <p:cNvPr id="12" name="단계카드_2"/>
+          <p:cNvPr id="12" name="대책구분_1"/>
+          <p:cNvSpPr txBox="1"/>
+          <p:nvPr/>
+        </p:nvSpPr>
+        <p:spPr>
+          <a:xfrm>
+            <a:off x="731520" y="5733288"/>
+            <a:ext cx="868680" cy="274320"/>
+          </a:xfrm>
+          <a:prstGeom prst="roundRect">
+            <a:avLst>
+              <a:gd name="adj" fmla="val 50000"/>
+            </a:avLst>
+          </a:prstGeom>
+          <a:solidFill>
+            <a:srgbClr val="475467"/>
+          </a:solidFill>
+          <a:ln/>
+        </p:spPr>
+        <p:txBody>
+          <a:bodyPr wrap="square" lIns="0" tIns="0" rIns="0" bIns="0" rtlCol="0" anchor="ctr"/>
+          <a:lstStyle/>
+          <a:p>
+            <a:pPr algn="ctr" indent="0" marL="0">
+              <a:buNone/>
+            </a:pPr>
+            <a:r>
+              <a:rPr lang="en-US" sz="1050" b="1" dirty="0">
+                <a:solidFill>
+                  <a:srgbClr val="FFFFFF"/>
+                </a:solidFill>
+              </a:rPr>
+              <a:t>관리적</a:t>
+            </a:r>
+            <a:endParaRPr lang="en-US" sz="1050" dirty="0"/>
+          </a:p>
+        </p:txBody>
+      </p:sp>
+      <p:sp>
+        <p:nvSpPr>
+          <p:cNvPr id="13" name="담당_1"/>
+          <p:cNvSpPr txBox="1"/>
+          <p:nvPr/>
+        </p:nvSpPr>
+        <p:spPr>
+          <a:xfrm>
+            <a:off x="1691640" y="5733288"/>
+            <a:ext cx="2189378" cy="274320"/>
+          </a:xfrm>
+          <a:prstGeom prst="rect">
+            <a:avLst/>
+          </a:prstGeom>
+          <a:noFill/>
+          <a:ln/>
+        </p:spPr>
+        <p:txBody>
+          <a:bodyPr wrap="square" lIns="0" tIns="0" rIns="0" bIns="0" rtlCol="0" anchor="ctr"/>
+          <a:lstStyle/>
+          <a:p>
+            <a:pPr indent="0" marL="0">
+              <a:buNone/>
+            </a:pPr>
+            <a:r>
+              <a:rPr lang="en-US" sz="1150" dirty="0">
+                <a:solidFill>
+                  <a:srgbClr val="667085"/>
+                </a:solidFill>
+              </a:rPr>
+              <a:t>담당 전원</a:t>
+            </a:r>
+            <a:endParaRPr lang="en-US" sz="1150" dirty="0"/>
+          </a:p>
+        </p:txBody>
+      </p:sp>
+      <p:sp>
+        <p:nvSpPr>
+          <p:cNvPr id="14" name="단계카드_2"/>
           <p:cNvSpPr/>
           <p:nvPr/>
         </p:nvSpPr>
         <p:spPr>
           <a:xfrm>
             <a:off x="4338218" y="1234440"/>
-            <a:ext cx="3515258" cy="4892040"/>
+            <a:ext cx="3515258" cy="4800600"/>
           </a:xfrm>
           <a:prstGeom prst="roundRect">
             <a:avLst>
@@ -7310,7 +9155,7 @@
       </p:sp>
       <p:pic>
         <p:nvPicPr>
-          <p:cNvPr id="13" name="단계사진_2" descr="preencoded.png">    </p:cNvPr>
+          <p:cNvPr id="15" name="단계사진_2" descr="preencoded.png">    </p:cNvPr>
           <p:cNvPicPr>
             <a:picLocks noChangeAspect="1"/>
           </p:cNvPicPr>
@@ -7334,7 +9179,7 @@
       </p:pic>
       <p:sp>
         <p:nvSpPr>
-          <p:cNvPr id="14" name="Text 10"/>
+          <p:cNvPr id="16" name="Text 12"/>
           <p:cNvSpPr txBox="1"/>
           <p:nvPr/>
         </p:nvSpPr>
@@ -7372,7 +9217,7 @@
       </p:sp>
       <p:sp>
         <p:nvSpPr>
-          <p:cNvPr id="15" name="단계명_2"/>
+          <p:cNvPr id="17" name="단계명_2"/>
           <p:cNvSpPr txBox="1"/>
           <p:nvPr/>
         </p:nvSpPr>
@@ -7400,7 +9245,7 @@
                   <a:schemeClr val="tx2"/>
                 </a:solidFill>
               </a:rPr>
-              <a:t>운전 정지·전원 차단</a:t>
+              <a:t>운전 정지·차단기 내림</a:t>
             </a:r>
             <a:endParaRPr lang="en-US" sz="1700" dirty="0"/>
           </a:p>
@@ -7408,7 +9253,7 @@
       </p:sp>
       <p:sp>
         <p:nvSpPr>
-          <p:cNvPr id="16" name="Text 12"/>
+          <p:cNvPr id="18" name="Text 14"/>
           <p:cNvSpPr txBox="1"/>
           <p:nvPr/>
         </p:nvSpPr>
@@ -7448,7 +9293,7 @@
       </p:sp>
       <p:sp>
         <p:nvSpPr>
-          <p:cNvPr id="17" name="위험_2"/>
+          <p:cNvPr id="19" name="위험_2"/>
           <p:cNvSpPr txBox="1"/>
           <p:nvPr/>
         </p:nvSpPr>
@@ -7476,7 +9321,7 @@
                   <a:srgbClr val="B42318"/>
                 </a:solidFill>
               </a:rPr>
-              <a:t>다른 사람이 운전 스위치를 켬</a:t>
+              <a:t>다른 사람이 운전 스위치를 켜 벨트가 움직임</a:t>
             </a:r>
             <a:endParaRPr lang="en-US" sz="1300" dirty="0"/>
           </a:p>
@@ -7484,7 +9329,7 @@
       </p:sp>
       <p:sp>
         <p:nvSpPr>
-          <p:cNvPr id="18" name="Text 14"/>
+          <p:cNvPr id="20" name="Text 16"/>
           <p:cNvSpPr txBox="1"/>
           <p:nvPr/>
         </p:nvSpPr>
@@ -7524,7 +9369,7 @@
       </p:sp>
       <p:sp>
         <p:nvSpPr>
-          <p:cNvPr id="19" name="안전포인트_2"/>
+          <p:cNvPr id="21" name="안전포인트_2"/>
           <p:cNvSpPr txBox="1"/>
           <p:nvPr/>
         </p:nvSpPr>
@@ -7552,7 +9397,7 @@
                   <a:srgbClr val="05603A"/>
                 </a:solidFill>
               </a:rPr>
-              <a:t>정지 버튼으로 멈춘 뒤 해당 컨베이어 차단기를 내림</a:t>
+              <a:t>조작반 정지 버튼 → 해당 컨베이어 차단기 OFF (차단기 번호는 현장 표지로 확인)</a:t>
             </a:r>
             <a:endParaRPr lang="en-US" sz="1300" dirty="0"/>
           </a:p>
@@ -7560,14 +9405,90 @@
       </p:sp>
       <p:sp>
         <p:nvSpPr>
-          <p:cNvPr id="20" name="단계카드_3"/>
+          <p:cNvPr id="22" name="대책구분_2"/>
+          <p:cNvSpPr txBox="1"/>
+          <p:nvPr/>
+        </p:nvSpPr>
+        <p:spPr>
+          <a:xfrm>
+            <a:off x="4521098" y="5733288"/>
+            <a:ext cx="868680" cy="274320"/>
+          </a:xfrm>
+          <a:prstGeom prst="roundRect">
+            <a:avLst>
+              <a:gd name="adj" fmla="val 50000"/>
+            </a:avLst>
+          </a:prstGeom>
+          <a:solidFill>
+            <a:srgbClr val="2E5AAC"/>
+          </a:solidFill>
+          <a:ln/>
+        </p:spPr>
+        <p:txBody>
+          <a:bodyPr wrap="square" lIns="0" tIns="0" rIns="0" bIns="0" rtlCol="0" anchor="ctr"/>
+          <a:lstStyle/>
+          <a:p>
+            <a:pPr algn="ctr" indent="0" marL="0">
+              <a:buNone/>
+            </a:pPr>
+            <a:r>
+              <a:rPr lang="en-US" sz="1050" b="1" dirty="0">
+                <a:solidFill>
+                  <a:srgbClr val="FFFFFF"/>
+                </a:solidFill>
+              </a:rPr>
+              <a:t>공학적</a:t>
+            </a:r>
+            <a:endParaRPr lang="en-US" sz="1050" dirty="0"/>
+          </a:p>
+        </p:txBody>
+      </p:sp>
+      <p:sp>
+        <p:nvSpPr>
+          <p:cNvPr id="23" name="담당_2"/>
+          <p:cNvSpPr txBox="1"/>
+          <p:nvPr/>
+        </p:nvSpPr>
+        <p:spPr>
+          <a:xfrm>
+            <a:off x="5481218" y="5733288"/>
+            <a:ext cx="2189378" cy="274320"/>
+          </a:xfrm>
+          <a:prstGeom prst="rect">
+            <a:avLst/>
+          </a:prstGeom>
+          <a:noFill/>
+          <a:ln/>
+        </p:spPr>
+        <p:txBody>
+          <a:bodyPr wrap="square" lIns="0" tIns="0" rIns="0" bIns="0" rtlCol="0" anchor="ctr"/>
+          <a:lstStyle/>
+          <a:p>
+            <a:pPr indent="0" marL="0">
+              <a:buNone/>
+            </a:pPr>
+            <a:r>
+              <a:rPr lang="en-US" sz="1150" dirty="0">
+                <a:solidFill>
+                  <a:srgbClr val="667085"/>
+                </a:solidFill>
+              </a:rPr>
+              <a:t>담당 작업자</a:t>
+            </a:r>
+            <a:endParaRPr lang="en-US" sz="1150" dirty="0"/>
+          </a:p>
+        </p:txBody>
+      </p:sp>
+      <p:sp>
+        <p:nvSpPr>
+          <p:cNvPr id="24" name="단계카드_3"/>
           <p:cNvSpPr/>
           <p:nvPr/>
         </p:nvSpPr>
         <p:spPr>
           <a:xfrm>
             <a:off x="8127797" y="1234440"/>
-            <a:ext cx="3515258" cy="4892040"/>
+            <a:ext cx="3515258" cy="4800600"/>
           </a:xfrm>
           <a:prstGeom prst="roundRect">
             <a:avLst>
@@ -7587,7 +9508,7 @@
       </p:sp>
       <p:pic>
         <p:nvPicPr>
-          <p:cNvPr id="21" name="단계사진_3" descr="preencoded.png">    </p:cNvPr>
+          <p:cNvPr id="25" name="단계사진_3" descr="preencoded.png">    </p:cNvPr>
           <p:cNvPicPr>
             <a:picLocks noChangeAspect="1"/>
           </p:cNvPicPr>
@@ -7611,7 +9532,7 @@
       </p:pic>
       <p:sp>
         <p:nvSpPr>
-          <p:cNvPr id="22" name="Text 17"/>
+          <p:cNvPr id="26" name="Text 21"/>
           <p:cNvSpPr txBox="1"/>
           <p:nvPr/>
         </p:nvSpPr>
@@ -7649,7 +9570,7 @@
       </p:sp>
       <p:sp>
         <p:nvSpPr>
-          <p:cNvPr id="23" name="단계명_3"/>
+          <p:cNvPr id="27" name="단계명_3"/>
           <p:cNvSpPr txBox="1"/>
           <p:nvPr/>
         </p:nvSpPr>
@@ -7677,7 +9598,7 @@
                   <a:schemeClr val="tx2"/>
                 </a:solidFill>
               </a:rPr>
-              <a:t>잠금·표지 부착</a:t>
+              <a:t>잠금·표지</a:t>
             </a:r>
             <a:endParaRPr lang="en-US" sz="1700" dirty="0"/>
           </a:p>
@@ -7685,7 +9606,7 @@
       </p:sp>
       <p:sp>
         <p:nvSpPr>
-          <p:cNvPr id="24" name="Text 19"/>
+          <p:cNvPr id="28" name="Text 23"/>
           <p:cNvSpPr txBox="1"/>
           <p:nvPr/>
         </p:nvSpPr>
@@ -7725,7 +9646,7 @@
       </p:sp>
       <p:sp>
         <p:nvSpPr>
-          <p:cNvPr id="25" name="위험_3"/>
+          <p:cNvPr id="29" name="위험_3"/>
           <p:cNvSpPr txBox="1"/>
           <p:nvPr/>
         </p:nvSpPr>
@@ -7753,7 +9674,7 @@
                   <a:srgbClr val="B42318"/>
                 </a:solidFill>
               </a:rPr>
-              <a:t>청소 중 갑자기 가동되어 손이 끼임</a:t>
+              <a:t>청소 중 누군가 차단기를 올려 손이 끼임</a:t>
             </a:r>
             <a:endParaRPr lang="en-US" sz="1300" dirty="0"/>
           </a:p>
@@ -7761,7 +9682,7 @@
       </p:sp>
       <p:sp>
         <p:nvSpPr>
-          <p:cNvPr id="26" name="Text 21"/>
+          <p:cNvPr id="30" name="Text 25"/>
           <p:cNvSpPr txBox="1"/>
           <p:nvPr/>
         </p:nvSpPr>
@@ -7801,7 +9722,7 @@
       </p:sp>
       <p:sp>
         <p:nvSpPr>
-          <p:cNvPr id="27" name="안전포인트_3"/>
+          <p:cNvPr id="31" name="안전포인트_3"/>
           <p:cNvSpPr txBox="1"/>
           <p:nvPr/>
         </p:nvSpPr>
@@ -7829,9 +9750,132 @@
                   <a:srgbClr val="05603A"/>
                 </a:solidFill>
               </a:rPr>
-              <a:t>차단기에 본인 자물쇠 + 꼬리표(성명·시간), 열쇠는 본인이 보관</a:t>
+              <a:t>차단기에 본인 자물쇠 + 꼬리표(성명·시간), 열쇠는 본인 보관 — 2명이면 각자 자물쇠</a:t>
             </a:r>
             <a:endParaRPr lang="en-US" sz="1300" dirty="0"/>
+          </a:p>
+        </p:txBody>
+      </p:sp>
+      <p:sp>
+        <p:nvSpPr>
+          <p:cNvPr id="32" name="대책구분_3"/>
+          <p:cNvSpPr txBox="1"/>
+          <p:nvPr/>
+        </p:nvSpPr>
+        <p:spPr>
+          <a:xfrm>
+            <a:off x="8310677" y="5733288"/>
+            <a:ext cx="868680" cy="274320"/>
+          </a:xfrm>
+          <a:prstGeom prst="roundRect">
+            <a:avLst>
+              <a:gd name="adj" fmla="val 50000"/>
+            </a:avLst>
+          </a:prstGeom>
+          <a:solidFill>
+            <a:srgbClr val="2E5AAC"/>
+          </a:solidFill>
+          <a:ln/>
+        </p:spPr>
+        <p:txBody>
+          <a:bodyPr wrap="square" lIns="0" tIns="0" rIns="0" bIns="0" rtlCol="0" anchor="ctr"/>
+          <a:lstStyle/>
+          <a:p>
+            <a:pPr algn="ctr" indent="0" marL="0">
+              <a:buNone/>
+            </a:pPr>
+            <a:r>
+              <a:rPr lang="en-US" sz="1050" b="1" dirty="0">
+                <a:solidFill>
+                  <a:srgbClr val="FFFFFF"/>
+                </a:solidFill>
+              </a:rPr>
+              <a:t>공학적</a:t>
+            </a:r>
+            <a:endParaRPr lang="en-US" sz="1050" dirty="0"/>
+          </a:p>
+        </p:txBody>
+      </p:sp>
+      <p:sp>
+        <p:nvSpPr>
+          <p:cNvPr id="33" name="담당_3"/>
+          <p:cNvSpPr txBox="1"/>
+          <p:nvPr/>
+        </p:nvSpPr>
+        <p:spPr>
+          <a:xfrm>
+            <a:off x="9270797" y="5733288"/>
+            <a:ext cx="2189378" cy="274320"/>
+          </a:xfrm>
+          <a:prstGeom prst="rect">
+            <a:avLst/>
+          </a:prstGeom>
+          <a:noFill/>
+          <a:ln/>
+        </p:spPr>
+        <p:txBody>
+          <a:bodyPr wrap="square" lIns="0" tIns="0" rIns="0" bIns="0" rtlCol="0" anchor="ctr"/>
+          <a:lstStyle/>
+          <a:p>
+            <a:pPr indent="0" marL="0">
+              <a:buNone/>
+            </a:pPr>
+            <a:r>
+              <a:rPr lang="en-US" sz="1150" dirty="0">
+                <a:solidFill>
+                  <a:srgbClr val="667085"/>
+                </a:solidFill>
+              </a:rPr>
+              <a:t>담당 작업자 각자</a:t>
+            </a:r>
+            <a:endParaRPr lang="en-US" sz="1150" dirty="0"/>
+          </a:p>
+        </p:txBody>
+      </p:sp>
+      <p:sp>
+        <p:nvSpPr>
+          <p:cNvPr id="34" name="Text 29"/>
+          <p:cNvSpPr txBox="1"/>
+          <p:nvPr/>
+        </p:nvSpPr>
+        <p:spPr>
+          <a:xfrm>
+            <a:off x="548640" y="6144768"/>
+            <a:ext cx="11094415" cy="274320"/>
+          </a:xfrm>
+          <a:prstGeom prst="rect">
+            <a:avLst/>
+          </a:prstGeom>
+          <a:noFill/>
+          <a:ln/>
+        </p:spPr>
+        <p:txBody>
+          <a:bodyPr wrap="square" lIns="0" tIns="0" rIns="0" bIns="0" rtlCol="0" anchor="ctr"/>
+          <a:lstStyle/>
+          <a:p>
+            <a:pPr indent="0" marL="0">
+              <a:buNone/>
+            </a:pPr>
+            <a:r>
+              <a:rPr lang="en-US" sz="1050" b="1" dirty="0">
+                <a:solidFill>
+                  <a:srgbClr val="475467"/>
+                </a:solidFill>
+              </a:rPr>
+              <a:t>대책 구분  </a:t>
+            </a:r>
+            <a:pPr indent="0" marL="0">
+              <a:buNone/>
+            </a:pPr>
+            <a:r>
+              <a:rPr lang="en-US" sz="1050" dirty="0">
+                <a:solidFill>
+                  <a:srgbClr val="667085"/>
+                </a:solidFill>
+              </a:rPr>
+              <a:t>제거·대체 → 공학적(방호·연동·차단) → 관리적(절차·교육·표지) → 보호구 순으로 먼저 검토합니다</a:t>
+            </a:r>
+            <a:endParaRPr lang="en-US" sz="1050" dirty="0"/>
           </a:p>
         </p:txBody>
       </p:sp>
@@ -7992,7 +10036,7 @@
         <p:spPr>
           <a:xfrm>
             <a:off x="548640" y="1234440"/>
-            <a:ext cx="3515258" cy="4892040"/>
+            <a:ext cx="3515258" cy="4800600"/>
           </a:xfrm>
           <a:prstGeom prst="roundRect">
             <a:avLst>
@@ -8102,7 +10146,7 @@
                   <a:schemeClr val="tx2"/>
                 </a:solidFill>
               </a:rPr>
-              <a:t>정지 상태 확인</a:t>
+              <a:t>정지 상태 확인(시험 기동)</a:t>
             </a:r>
             <a:endParaRPr lang="en-US" sz="1700" dirty="0"/>
           </a:p>
@@ -8178,7 +10222,7 @@
                   <a:srgbClr val="B42318"/>
                 </a:solidFill>
               </a:rPr>
-              <a:t>관성·잔류 에너지로 벨트가 움직임</a:t>
+              <a:t>다른 차단기를 잠가 기계가 살아 있음, 관성 회전</a:t>
             </a:r>
             <a:endParaRPr lang="en-US" sz="1300" dirty="0"/>
           </a:p>
@@ -8254,7 +10298,7 @@
                   <a:srgbClr val="05603A"/>
                 </a:solidFill>
               </a:rPr>
-              <a:t>기동 버튼을 눌러 움직이지 않는지, 벨트·롤러가 완전히 멈췄는지 확인</a:t>
+              <a:t>기동 버튼을 눌러 움직이지 않는지 확인 후 원위치, 벨트·롤러 완전 정지 확인</a:t>
             </a:r>
             <a:endParaRPr lang="en-US" sz="1300" dirty="0"/>
           </a:p>
@@ -8262,14 +10306,90 @@
       </p:sp>
       <p:sp>
         <p:nvSpPr>
-          <p:cNvPr id="12" name="단계카드_5"/>
+          <p:cNvPr id="12" name="대책구분_4"/>
+          <p:cNvSpPr txBox="1"/>
+          <p:nvPr/>
+        </p:nvSpPr>
+        <p:spPr>
+          <a:xfrm>
+            <a:off x="731520" y="5733288"/>
+            <a:ext cx="868680" cy="274320"/>
+          </a:xfrm>
+          <a:prstGeom prst="roundRect">
+            <a:avLst>
+              <a:gd name="adj" fmla="val 50000"/>
+            </a:avLst>
+          </a:prstGeom>
+          <a:solidFill>
+            <a:srgbClr val="475467"/>
+          </a:solidFill>
+          <a:ln/>
+        </p:spPr>
+        <p:txBody>
+          <a:bodyPr wrap="square" lIns="0" tIns="0" rIns="0" bIns="0" rtlCol="0" anchor="ctr"/>
+          <a:lstStyle/>
+          <a:p>
+            <a:pPr algn="ctr" indent="0" marL="0">
+              <a:buNone/>
+            </a:pPr>
+            <a:r>
+              <a:rPr lang="en-US" sz="1050" b="1" dirty="0">
+                <a:solidFill>
+                  <a:srgbClr val="FFFFFF"/>
+                </a:solidFill>
+              </a:rPr>
+              <a:t>관리적</a:t>
+            </a:r>
+            <a:endParaRPr lang="en-US" sz="1050" dirty="0"/>
+          </a:p>
+        </p:txBody>
+      </p:sp>
+      <p:sp>
+        <p:nvSpPr>
+          <p:cNvPr id="13" name="담당_4"/>
+          <p:cNvSpPr txBox="1"/>
+          <p:nvPr/>
+        </p:nvSpPr>
+        <p:spPr>
+          <a:xfrm>
+            <a:off x="1691640" y="5733288"/>
+            <a:ext cx="2189378" cy="274320"/>
+          </a:xfrm>
+          <a:prstGeom prst="rect">
+            <a:avLst/>
+          </a:prstGeom>
+          <a:noFill/>
+          <a:ln/>
+        </p:spPr>
+        <p:txBody>
+          <a:bodyPr wrap="square" lIns="0" tIns="0" rIns="0" bIns="0" rtlCol="0" anchor="ctr"/>
+          <a:lstStyle/>
+          <a:p>
+            <a:pPr indent="0" marL="0">
+              <a:buNone/>
+            </a:pPr>
+            <a:r>
+              <a:rPr lang="en-US" sz="1150" dirty="0">
+                <a:solidFill>
+                  <a:srgbClr val="667085"/>
+                </a:solidFill>
+              </a:rPr>
+              <a:t>담당 확인자</a:t>
+            </a:r>
+            <a:endParaRPr lang="en-US" sz="1150" dirty="0"/>
+          </a:p>
+        </p:txBody>
+      </p:sp>
+      <p:sp>
+        <p:nvSpPr>
+          <p:cNvPr id="14" name="단계카드_5"/>
           <p:cNvSpPr/>
           <p:nvPr/>
         </p:nvSpPr>
         <p:spPr>
           <a:xfrm>
             <a:off x="4338218" y="1234440"/>
-            <a:ext cx="3515258" cy="4892040"/>
+            <a:ext cx="3515258" cy="4800600"/>
           </a:xfrm>
           <a:prstGeom prst="roundRect">
             <a:avLst>
@@ -8289,7 +10409,7 @@
       </p:sp>
       <p:pic>
         <p:nvPicPr>
-          <p:cNvPr id="13" name="단계사진_5" descr="preencoded.png">    </p:cNvPr>
+          <p:cNvPr id="15" name="단계사진_5" descr="preencoded.png">    </p:cNvPr>
           <p:cNvPicPr>
             <a:picLocks noChangeAspect="1"/>
           </p:cNvPicPr>
@@ -8313,7 +10433,7 @@
       </p:pic>
       <p:sp>
         <p:nvSpPr>
-          <p:cNvPr id="14" name="Text 10"/>
+          <p:cNvPr id="16" name="Text 12"/>
           <p:cNvSpPr txBox="1"/>
           <p:nvPr/>
         </p:nvSpPr>
@@ -8351,7 +10471,7 @@
       </p:sp>
       <p:sp>
         <p:nvSpPr>
-          <p:cNvPr id="15" name="단계명_5"/>
+          <p:cNvPr id="17" name="단계명_5"/>
           <p:cNvSpPr txBox="1"/>
           <p:nvPr/>
         </p:nvSpPr>
@@ -8387,7 +10507,7 @@
       </p:sp>
       <p:sp>
         <p:nvSpPr>
-          <p:cNvPr id="16" name="Text 12"/>
+          <p:cNvPr id="18" name="Text 14"/>
           <p:cNvSpPr txBox="1"/>
           <p:nvPr/>
         </p:nvSpPr>
@@ -8427,7 +10547,7 @@
       </p:sp>
       <p:sp>
         <p:nvSpPr>
-          <p:cNvPr id="17" name="위험_5"/>
+          <p:cNvPr id="19" name="위험_5"/>
           <p:cNvSpPr txBox="1"/>
           <p:nvPr/>
         </p:nvSpPr>
@@ -8455,7 +10575,7 @@
                   <a:srgbClr val="B42318"/>
                 </a:solidFill>
               </a:rPr>
-              <a:t>롤러 사이 끼임, 모서리 베임, 미끄러짐</a:t>
+              <a:t>롤러 맞물림 부위 끼임, 모서리 베임, 물기에 미끄러짐</a:t>
             </a:r>
             <a:endParaRPr lang="en-US" sz="1300" dirty="0"/>
           </a:p>
@@ -8463,7 +10583,7 @@
       </p:sp>
       <p:sp>
         <p:nvSpPr>
-          <p:cNvPr id="18" name="Text 14"/>
+          <p:cNvPr id="20" name="Text 16"/>
           <p:cNvSpPr txBox="1"/>
           <p:nvPr/>
         </p:nvSpPr>
@@ -8503,7 +10623,7 @@
       </p:sp>
       <p:sp>
         <p:nvSpPr>
-          <p:cNvPr id="19" name="안전포인트_5"/>
+          <p:cNvPr id="21" name="안전포인트_5"/>
           <p:cNvSpPr txBox="1"/>
           <p:nvPr/>
         </p:nvSpPr>
@@ -8531,7 +10651,7 @@
                   <a:srgbClr val="05603A"/>
                 </a:solidFill>
               </a:rPr>
-              <a:t>손 대신 스크레이퍼, 물기·이물은 바로 치움, 덮개는 정해진 곳에</a:t>
+              <a:t>손 대신 스크레이퍼·밀대, 맞물림 부위에 손 넣지 않음, 물기는 바로 제거</a:t>
             </a:r>
             <a:endParaRPr lang="en-US" sz="1300" dirty="0"/>
           </a:p>
@@ -8539,14 +10659,90 @@
       </p:sp>
       <p:sp>
         <p:nvSpPr>
-          <p:cNvPr id="20" name="단계카드_6"/>
+          <p:cNvPr id="22" name="대책구분_5"/>
+          <p:cNvSpPr txBox="1"/>
+          <p:nvPr/>
+        </p:nvSpPr>
+        <p:spPr>
+          <a:xfrm>
+            <a:off x="4521098" y="5733288"/>
+            <a:ext cx="868680" cy="274320"/>
+          </a:xfrm>
+          <a:prstGeom prst="roundRect">
+            <a:avLst>
+              <a:gd name="adj" fmla="val 50000"/>
+            </a:avLst>
+          </a:prstGeom>
+          <a:solidFill>
+            <a:srgbClr val="475467"/>
+          </a:solidFill>
+          <a:ln/>
+        </p:spPr>
+        <p:txBody>
+          <a:bodyPr wrap="square" lIns="0" tIns="0" rIns="0" bIns="0" rtlCol="0" anchor="ctr"/>
+          <a:lstStyle/>
+          <a:p>
+            <a:pPr algn="ctr" indent="0" marL="0">
+              <a:buNone/>
+            </a:pPr>
+            <a:r>
+              <a:rPr lang="en-US" sz="1050" b="1" dirty="0">
+                <a:solidFill>
+                  <a:srgbClr val="FFFFFF"/>
+                </a:solidFill>
+              </a:rPr>
+              <a:t>관리적</a:t>
+            </a:r>
+            <a:endParaRPr lang="en-US" sz="1050" dirty="0"/>
+          </a:p>
+        </p:txBody>
+      </p:sp>
+      <p:sp>
+        <p:nvSpPr>
+          <p:cNvPr id="23" name="담당_5"/>
+          <p:cNvSpPr txBox="1"/>
+          <p:nvPr/>
+        </p:nvSpPr>
+        <p:spPr>
+          <a:xfrm>
+            <a:off x="5481218" y="5733288"/>
+            <a:ext cx="2189378" cy="274320"/>
+          </a:xfrm>
+          <a:prstGeom prst="rect">
+            <a:avLst/>
+          </a:prstGeom>
+          <a:noFill/>
+          <a:ln/>
+        </p:spPr>
+        <p:txBody>
+          <a:bodyPr wrap="square" lIns="0" tIns="0" rIns="0" bIns="0" rtlCol="0" anchor="ctr"/>
+          <a:lstStyle/>
+          <a:p>
+            <a:pPr indent="0" marL="0">
+              <a:buNone/>
+            </a:pPr>
+            <a:r>
+              <a:rPr lang="en-US" sz="1150" dirty="0">
+                <a:solidFill>
+                  <a:srgbClr val="667085"/>
+                </a:solidFill>
+              </a:rPr>
+              <a:t>담당 작업자</a:t>
+            </a:r>
+            <a:endParaRPr lang="en-US" sz="1150" dirty="0"/>
+          </a:p>
+        </p:txBody>
+      </p:sp>
+      <p:sp>
+        <p:nvSpPr>
+          <p:cNvPr id="24" name="단계카드_6"/>
           <p:cNvSpPr/>
           <p:nvPr/>
         </p:nvSpPr>
         <p:spPr>
           <a:xfrm>
             <a:off x="8127797" y="1234440"/>
-            <a:ext cx="3515258" cy="4892040"/>
+            <a:ext cx="3515258" cy="4800600"/>
           </a:xfrm>
           <a:prstGeom prst="roundRect">
             <a:avLst>
@@ -8566,7 +10762,7 @@
       </p:sp>
       <p:pic>
         <p:nvPicPr>
-          <p:cNvPr id="21" name="단계사진_6" descr="preencoded.png">    </p:cNvPr>
+          <p:cNvPr id="25" name="단계사진_6" descr="preencoded.png">    </p:cNvPr>
           <p:cNvPicPr>
             <a:picLocks noChangeAspect="1"/>
           </p:cNvPicPr>
@@ -8590,7 +10786,7 @@
       </p:pic>
       <p:sp>
         <p:nvSpPr>
-          <p:cNvPr id="22" name="Text 17"/>
+          <p:cNvPr id="26" name="Text 21"/>
           <p:cNvSpPr txBox="1"/>
           <p:nvPr/>
         </p:nvSpPr>
@@ -8628,7 +10824,7 @@
       </p:sp>
       <p:sp>
         <p:nvSpPr>
-          <p:cNvPr id="23" name="단계명_6"/>
+          <p:cNvPr id="27" name="단계명_6"/>
           <p:cNvSpPr txBox="1"/>
           <p:nvPr/>
         </p:nvSpPr>
@@ -8664,7 +10860,7 @@
       </p:sp>
       <p:sp>
         <p:nvSpPr>
-          <p:cNvPr id="24" name="Text 19"/>
+          <p:cNvPr id="28" name="Text 23"/>
           <p:cNvSpPr txBox="1"/>
           <p:nvPr/>
         </p:nvSpPr>
@@ -8704,7 +10900,7 @@
       </p:sp>
       <p:sp>
         <p:nvSpPr>
-          <p:cNvPr id="25" name="위험_6"/>
+          <p:cNvPr id="29" name="위험_6"/>
           <p:cNvSpPr txBox="1"/>
           <p:nvPr/>
         </p:nvSpPr>
@@ -8732,7 +10928,7 @@
                   <a:srgbClr val="B42318"/>
                 </a:solidFill>
               </a:rPr>
-              <a:t>덮개 없이 가동, 주변 사람 접근 중 가동</a:t>
+              <a:t>덮개 없이 가동, 사람이 남은 채 가동</a:t>
             </a:r>
             <a:endParaRPr lang="en-US" sz="1300" dirty="0"/>
           </a:p>
@@ -8740,7 +10936,7 @@
       </p:sp>
       <p:sp>
         <p:nvSpPr>
-          <p:cNvPr id="26" name="Text 21"/>
+          <p:cNvPr id="30" name="Text 25"/>
           <p:cNvSpPr txBox="1"/>
           <p:nvPr/>
         </p:nvSpPr>
@@ -8780,7 +10976,7 @@
       </p:sp>
       <p:sp>
         <p:nvSpPr>
-          <p:cNvPr id="27" name="안전포인트_6"/>
+          <p:cNvPr id="31" name="안전포인트_6"/>
           <p:cNvSpPr txBox="1"/>
           <p:nvPr/>
         </p:nvSpPr>
@@ -8808,9 +11004,132 @@
                   <a:srgbClr val="05603A"/>
                 </a:solidFill>
               </a:rPr>
-              <a:t>덮개·공구 확인 → 인원 철수 확인 → 건 사람이 해제 → 알리고 시운전</a:t>
+              <a:t>덮개·공구 확인 → 인원 철수 확인 → 건 사람이 해제 → 알리고 시운전, 비상정지 시험</a:t>
             </a:r>
             <a:endParaRPr lang="en-US" sz="1300" dirty="0"/>
+          </a:p>
+        </p:txBody>
+      </p:sp>
+      <p:sp>
+        <p:nvSpPr>
+          <p:cNvPr id="32" name="대책구분_6"/>
+          <p:cNvSpPr txBox="1"/>
+          <p:nvPr/>
+        </p:nvSpPr>
+        <p:spPr>
+          <a:xfrm>
+            <a:off x="8310677" y="5733288"/>
+            <a:ext cx="868680" cy="274320"/>
+          </a:xfrm>
+          <a:prstGeom prst="roundRect">
+            <a:avLst>
+              <a:gd name="adj" fmla="val 50000"/>
+            </a:avLst>
+          </a:prstGeom>
+          <a:solidFill>
+            <a:srgbClr val="2E5AAC"/>
+          </a:solidFill>
+          <a:ln/>
+        </p:spPr>
+        <p:txBody>
+          <a:bodyPr wrap="square" lIns="0" tIns="0" rIns="0" bIns="0" rtlCol="0" anchor="ctr"/>
+          <a:lstStyle/>
+          <a:p>
+            <a:pPr algn="ctr" indent="0" marL="0">
+              <a:buNone/>
+            </a:pPr>
+            <a:r>
+              <a:rPr lang="en-US" sz="1050" b="1" dirty="0">
+                <a:solidFill>
+                  <a:srgbClr val="FFFFFF"/>
+                </a:solidFill>
+              </a:rPr>
+              <a:t>공학적</a:t>
+            </a:r>
+            <a:endParaRPr lang="en-US" sz="1050" dirty="0"/>
+          </a:p>
+        </p:txBody>
+      </p:sp>
+      <p:sp>
+        <p:nvSpPr>
+          <p:cNvPr id="33" name="담당_6"/>
+          <p:cNvSpPr txBox="1"/>
+          <p:nvPr/>
+        </p:nvSpPr>
+        <p:spPr>
+          <a:xfrm>
+            <a:off x="9270797" y="5733288"/>
+            <a:ext cx="2189378" cy="274320"/>
+          </a:xfrm>
+          <a:prstGeom prst="rect">
+            <a:avLst/>
+          </a:prstGeom>
+          <a:noFill/>
+          <a:ln/>
+        </p:spPr>
+        <p:txBody>
+          <a:bodyPr wrap="square" lIns="0" tIns="0" rIns="0" bIns="0" rtlCol="0" anchor="ctr"/>
+          <a:lstStyle/>
+          <a:p>
+            <a:pPr indent="0" marL="0">
+              <a:buNone/>
+            </a:pPr>
+            <a:r>
+              <a:rPr lang="en-US" sz="1150" dirty="0">
+                <a:solidFill>
+                  <a:srgbClr val="667085"/>
+                </a:solidFill>
+              </a:rPr>
+              <a:t>담당 작업자·확인자</a:t>
+            </a:r>
+            <a:endParaRPr lang="en-US" sz="1150" dirty="0"/>
+          </a:p>
+        </p:txBody>
+      </p:sp>
+      <p:sp>
+        <p:nvSpPr>
+          <p:cNvPr id="34" name="Text 29"/>
+          <p:cNvSpPr txBox="1"/>
+          <p:nvPr/>
+        </p:nvSpPr>
+        <p:spPr>
+          <a:xfrm>
+            <a:off x="548640" y="6144768"/>
+            <a:ext cx="11094415" cy="274320"/>
+          </a:xfrm>
+          <a:prstGeom prst="rect">
+            <a:avLst/>
+          </a:prstGeom>
+          <a:noFill/>
+          <a:ln/>
+        </p:spPr>
+        <p:txBody>
+          <a:bodyPr wrap="square" lIns="0" tIns="0" rIns="0" bIns="0" rtlCol="0" anchor="ctr"/>
+          <a:lstStyle/>
+          <a:p>
+            <a:pPr indent="0" marL="0">
+              <a:buNone/>
+            </a:pPr>
+            <a:r>
+              <a:rPr lang="en-US" sz="1050" b="1" dirty="0">
+                <a:solidFill>
+                  <a:srgbClr val="475467"/>
+                </a:solidFill>
+              </a:rPr>
+              <a:t>대책 구분  </a:t>
+            </a:r>
+            <a:pPr indent="0" marL="0">
+              <a:buNone/>
+            </a:pPr>
+            <a:r>
+              <a:rPr lang="en-US" sz="1050" dirty="0">
+                <a:solidFill>
+                  <a:srgbClr val="667085"/>
+                </a:solidFill>
+              </a:rPr>
+              <a:t>제거·대체 → 공학적(방호·연동·차단) → 관리적(절차·교육·표지) → 보호구 순으로 먼저 검토합니다</a:t>
+            </a:r>
+            <a:endParaRPr lang="en-US" sz="1050" dirty="0"/>
           </a:p>
         </p:txBody>
       </p:sp>
@@ -9512,7 +11831,7 @@
                   <a:schemeClr val="tx2"/>
                 </a:solidFill>
               </a:rPr>
-              <a:t>이상·비상 시 이렇게</a:t>
+              <a:t>이럴 때는 멈추고 보고합니다</a:t>
             </a:r>
             <a:endParaRPr lang="en-US" sz="2600" dirty="0"/>
           </a:p>
@@ -9552,7 +11871,7 @@
                   <a:srgbClr val="475467"/>
                 </a:solidFill>
               </a:rPr>
-              <a:t>6. 비상 조치</a:t>
+              <a:t>6. 작업중지 기준</a:t>
             </a:r>
             <a:endParaRPr lang="en-US" sz="1200" dirty="0"/>
           </a:p>
@@ -9560,18 +11879,18 @@
       </p:sp>
       <p:sp>
         <p:nvSpPr>
-          <p:cNvPr id="4" name="비상_1"/>
+          <p:cNvPr id="4" name="중지_1"/>
           <p:cNvSpPr/>
           <p:nvPr/>
         </p:nvSpPr>
         <p:spPr>
           <a:xfrm>
-            <a:off x="548640" y="1554480"/>
-            <a:ext cx="2377440" cy="3200400"/>
+            <a:off x="548640" y="1280160"/>
+            <a:ext cx="7040880" cy="658368"/>
           </a:xfrm>
           <a:prstGeom prst="roundRect">
             <a:avLst>
-              <a:gd name="adj" fmla="val 4615"/>
+              <a:gd name="adj" fmla="val 16667"/>
             </a:avLst>
           </a:prstGeom>
           <a:solidFill>
@@ -9587,24 +11906,24 @@
       </p:sp>
       <p:sp>
         <p:nvSpPr>
-          <p:cNvPr id="5" name="비상아이콘_1_dot"/>
+          <p:cNvPr id="5" name="중지아이콘_1_dot"/>
           <p:cNvSpPr/>
           <p:nvPr/>
         </p:nvSpPr>
         <p:spPr>
           <a:xfrm>
-            <a:off x="1280160" y="1874520"/>
-            <a:ext cx="914400" cy="914400"/>
+            <a:off x="713232" y="1371600"/>
+            <a:ext cx="475488" cy="475488"/>
           </a:xfrm>
           <a:prstGeom prst="ellipse">
             <a:avLst/>
           </a:prstGeom>
           <a:solidFill>
-            <a:srgbClr val="D92D20"/>
+            <a:srgbClr val="FFC400"/>
           </a:solidFill>
           <a:ln w="12700">
             <a:solidFill>
-              <a:srgbClr val="D92D20"/>
+              <a:srgbClr val="FFC400"/>
             </a:solidFill>
             <a:prstDash val="solid"/>
           </a:ln>
@@ -9612,7 +11931,7 @@
       </p:sp>
       <p:pic>
         <p:nvPicPr>
-          <p:cNvPr id="6" name="비상아이콘_1_icon" descr="preencoded.png">    </p:cNvPr>
+          <p:cNvPr id="6" name="중지아이콘_1_icon" descr="preencoded.png">    </p:cNvPr>
           <p:cNvPicPr>
             <a:picLocks noChangeAspect="1"/>
           </p:cNvPicPr>
@@ -9626,89 +11945,105 @@
         </p:blipFill>
         <p:spPr>
           <a:xfrm>
-            <a:off x="1499616" y="2093976"/>
+            <a:off x="827349" y="1485717"/>
+            <a:ext cx="247254" cy="247254"/>
+          </a:xfrm>
+          <a:prstGeom prst="rect">
+            <a:avLst/>
+          </a:prstGeom>
+        </p:spPr>
+      </p:pic>
+      <p:sp>
+        <p:nvSpPr>
+          <p:cNvPr id="7" name="중지문구_1"/>
+          <p:cNvSpPr txBox="1"/>
+          <p:nvPr/>
+        </p:nvSpPr>
+        <p:spPr>
+          <a:xfrm>
+            <a:off x="1371600" y="1280160"/>
+            <a:ext cx="6035040" cy="658368"/>
+          </a:xfrm>
+          <a:prstGeom prst="rect">
+            <a:avLst/>
+          </a:prstGeom>
+          <a:noFill/>
+          <a:ln/>
+        </p:spPr>
+        <p:txBody>
+          <a:bodyPr wrap="square" lIns="0" tIns="0" rIns="0" bIns="0" rtlCol="0" anchor="ctr"/>
+          <a:lstStyle/>
+          <a:p>
+            <a:pPr indent="0" marL="0">
+              <a:buNone/>
+            </a:pPr>
+            <a:r>
+              <a:rPr lang="en-US" sz="1700" b="1" dirty="0">
+                <a:solidFill>
+                  <a:srgbClr val="912018"/>
+                </a:solidFill>
+              </a:rPr>
+              <a:t>개인 자물쇠·꼬리표가 없을 때</a:t>
+            </a:r>
+            <a:endParaRPr lang="en-US" sz="1700" dirty="0"/>
+          </a:p>
+        </p:txBody>
+      </p:sp>
+      <p:sp>
+        <p:nvSpPr>
+          <p:cNvPr id="8" name="중지_2"/>
+          <p:cNvSpPr/>
+          <p:nvPr/>
+        </p:nvSpPr>
+        <p:spPr>
+          <a:xfrm>
+            <a:off x="548640" y="2066544"/>
+            <a:ext cx="7040880" cy="658368"/>
+          </a:xfrm>
+          <a:prstGeom prst="roundRect">
+            <a:avLst>
+              <a:gd name="adj" fmla="val 16667"/>
+            </a:avLst>
+          </a:prstGeom>
+          <a:solidFill>
+            <a:srgbClr val="FEF3F2"/>
+          </a:solidFill>
+          <a:ln w="12700">
+            <a:solidFill>
+              <a:srgbClr val="FECDCA"/>
+            </a:solidFill>
+            <a:prstDash val="solid"/>
+          </a:ln>
+        </p:spPr>
+      </p:sp>
+      <p:sp>
+        <p:nvSpPr>
+          <p:cNvPr id="9" name="중지아이콘_2_dot"/>
+          <p:cNvSpPr/>
+          <p:nvPr/>
+        </p:nvSpPr>
+        <p:spPr>
+          <a:xfrm>
+            <a:off x="713232" y="2157984"/>
             <a:ext cx="475488" cy="475488"/>
           </a:xfrm>
-          <a:prstGeom prst="rect">
-            <a:avLst/>
-          </a:prstGeom>
-        </p:spPr>
-      </p:pic>
-      <p:sp>
-        <p:nvSpPr>
-          <p:cNvPr id="7" name="Text 4"/>
-          <p:cNvSpPr txBox="1"/>
-          <p:nvPr/>
-        </p:nvSpPr>
-        <p:spPr>
-          <a:xfrm>
-            <a:off x="685800" y="2971800"/>
-            <a:ext cx="2103120" cy="502920"/>
-          </a:xfrm>
-          <a:prstGeom prst="rect">
-            <a:avLst/>
-          </a:prstGeom>
-          <a:noFill/>
-          <a:ln/>
-        </p:spPr>
-        <p:txBody>
-          <a:bodyPr wrap="square" lIns="0" tIns="0" rIns="0" bIns="0" rtlCol="0" anchor="ctr"/>
-          <a:lstStyle/>
-          <a:p>
-            <a:pPr algn="ctr" indent="0" marL="0">
-              <a:buNone/>
-            </a:pPr>
-            <a:r>
-              <a:rPr lang="en-US" sz="2200" b="1" dirty="0">
-                <a:solidFill>
-                  <a:schemeClr val="tx2"/>
-                </a:solidFill>
-              </a:rPr>
-              <a:t>멈춘다</a:t>
-            </a:r>
-            <a:endParaRPr lang="en-US" sz="2200" dirty="0"/>
-          </a:p>
-        </p:txBody>
-      </p:sp>
-      <p:sp>
-        <p:nvSpPr>
-          <p:cNvPr id="8" name="비상설명_1"/>
-          <p:cNvSpPr txBox="1"/>
-          <p:nvPr/>
-        </p:nvSpPr>
-        <p:spPr>
-          <a:xfrm>
-            <a:off x="685800" y="3566160"/>
-            <a:ext cx="2103120" cy="1005840"/>
-          </a:xfrm>
-          <a:prstGeom prst="rect">
-            <a:avLst/>
-          </a:prstGeom>
-          <a:noFill/>
-          <a:ln/>
-        </p:spPr>
-        <p:txBody>
-          <a:bodyPr wrap="square" lIns="0" tIns="0" rIns="0" bIns="0" rtlCol="0" anchor="t"/>
-          <a:lstStyle/>
-          <a:p>
-            <a:pPr algn="ctr" indent="0" marL="0">
-              <a:buNone/>
-            </a:pPr>
-            <a:r>
-              <a:rPr lang="en-US" sz="1350" dirty="0">
-                <a:solidFill>
-                  <a:srgbClr val="475467"/>
-                </a:solidFill>
-              </a:rPr>
-              <a:t>가장 가까운 비상정지 스위치</a:t>
-            </a:r>
-            <a:endParaRPr lang="en-US" sz="1350" dirty="0"/>
-          </a:p>
-        </p:txBody>
+          <a:prstGeom prst="ellipse">
+            <a:avLst/>
+          </a:prstGeom>
+          <a:solidFill>
+            <a:srgbClr val="FFC400"/>
+          </a:solidFill>
+          <a:ln w="12700">
+            <a:solidFill>
+              <a:srgbClr val="FFC400"/>
+            </a:solidFill>
+            <a:prstDash val="solid"/>
+          </a:ln>
+        </p:spPr>
       </p:sp>
       <p:pic>
         <p:nvPicPr>
-          <p:cNvPr id="9" name="Image 1" descr="preencoded.png">    </p:cNvPr>
+          <p:cNvPr id="10" name="중지아이콘_2_icon" descr="preencoded.png">    </p:cNvPr>
           <p:cNvPicPr>
             <a:picLocks noChangeAspect="1"/>
           </p:cNvPicPr>
@@ -9722,8 +12057,8 @@
         </p:blipFill>
         <p:spPr>
           <a:xfrm>
-            <a:off x="3034741" y="3017520"/>
-            <a:ext cx="310896" cy="310896"/>
+            <a:off x="827349" y="2272101"/>
+            <a:ext cx="247254" cy="247254"/>
           </a:xfrm>
           <a:prstGeom prst="rect">
             <a:avLst/>
@@ -9732,26 +12067,62 @@
       </p:pic>
       <p:sp>
         <p:nvSpPr>
-          <p:cNvPr id="10" name="비상_2"/>
+          <p:cNvPr id="11" name="중지문구_2"/>
+          <p:cNvSpPr txBox="1"/>
+          <p:nvPr/>
+        </p:nvSpPr>
+        <p:spPr>
+          <a:xfrm>
+            <a:off x="1371600" y="2066544"/>
+            <a:ext cx="6035040" cy="658368"/>
+          </a:xfrm>
+          <a:prstGeom prst="rect">
+            <a:avLst/>
+          </a:prstGeom>
+          <a:noFill/>
+          <a:ln/>
+        </p:spPr>
+        <p:txBody>
+          <a:bodyPr wrap="square" lIns="0" tIns="0" rIns="0" bIns="0" rtlCol="0" anchor="ctr"/>
+          <a:lstStyle/>
+          <a:p>
+            <a:pPr indent="0" marL="0">
+              <a:buNone/>
+            </a:pPr>
+            <a:r>
+              <a:rPr lang="en-US" sz="1700" b="1" dirty="0">
+                <a:solidFill>
+                  <a:srgbClr val="912018"/>
+                </a:solidFill>
+              </a:rPr>
+              <a:t>잠근 차단기가 이 컨베이어 것인지 확인되지 않을 때</a:t>
+            </a:r>
+            <a:endParaRPr lang="en-US" sz="1700" dirty="0"/>
+          </a:p>
+        </p:txBody>
+      </p:sp>
+      <p:sp>
+        <p:nvSpPr>
+          <p:cNvPr id="12" name="중지_3"/>
           <p:cNvSpPr/>
           <p:nvPr/>
         </p:nvSpPr>
         <p:spPr>
           <a:xfrm>
-            <a:off x="3454298" y="1554480"/>
-            <a:ext cx="2377440" cy="3200400"/>
+            <a:off x="548640" y="2852928"/>
+            <a:ext cx="7040880" cy="658368"/>
           </a:xfrm>
           <a:prstGeom prst="roundRect">
             <a:avLst>
-              <a:gd name="adj" fmla="val 4615"/>
+              <a:gd name="adj" fmla="val 16667"/>
             </a:avLst>
           </a:prstGeom>
           <a:solidFill>
-            <a:srgbClr val="F2F4F7"/>
+            <a:srgbClr val="FEF3F2"/>
           </a:solidFill>
           <a:ln w="12700">
             <a:solidFill>
-              <a:srgbClr val="F2F4F7"/>
+              <a:srgbClr val="FECDCA"/>
             </a:solidFill>
             <a:prstDash val="solid"/>
           </a:ln>
@@ -9759,14 +12130,14 @@
       </p:sp>
       <p:sp>
         <p:nvSpPr>
-          <p:cNvPr id="11" name="비상아이콘_2_dot"/>
+          <p:cNvPr id="13" name="중지아이콘_3_dot"/>
           <p:cNvSpPr/>
           <p:nvPr/>
         </p:nvSpPr>
         <p:spPr>
           <a:xfrm>
-            <a:off x="4185818" y="1874520"/>
-            <a:ext cx="914400" cy="914400"/>
+            <a:off x="713232" y="2944368"/>
+            <a:ext cx="475488" cy="475488"/>
           </a:xfrm>
           <a:prstGeom prst="ellipse">
             <a:avLst/>
@@ -9784,7 +12155,7 @@
       </p:sp>
       <p:pic>
         <p:nvPicPr>
-          <p:cNvPr id="12" name="비상아이콘_2_icon" descr="preencoded.png">    </p:cNvPr>
+          <p:cNvPr id="14" name="중지아이콘_3_icon" descr="preencoded.png">    </p:cNvPr>
           <p:cNvPicPr>
             <a:picLocks noChangeAspect="1"/>
           </p:cNvPicPr>
@@ -9798,89 +12169,105 @@
         </p:blipFill>
         <p:spPr>
           <a:xfrm>
-            <a:off x="4405274" y="2093976"/>
+            <a:off x="827349" y="3058485"/>
+            <a:ext cx="247254" cy="247254"/>
+          </a:xfrm>
+          <a:prstGeom prst="rect">
+            <a:avLst/>
+          </a:prstGeom>
+        </p:spPr>
+      </p:pic>
+      <p:sp>
+        <p:nvSpPr>
+          <p:cNvPr id="15" name="중지문구_3"/>
+          <p:cNvSpPr txBox="1"/>
+          <p:nvPr/>
+        </p:nvSpPr>
+        <p:spPr>
+          <a:xfrm>
+            <a:off x="1371600" y="2852928"/>
+            <a:ext cx="6035040" cy="658368"/>
+          </a:xfrm>
+          <a:prstGeom prst="rect">
+            <a:avLst/>
+          </a:prstGeom>
+          <a:noFill/>
+          <a:ln/>
+        </p:spPr>
+        <p:txBody>
+          <a:bodyPr wrap="square" lIns="0" tIns="0" rIns="0" bIns="0" rtlCol="0" anchor="ctr"/>
+          <a:lstStyle/>
+          <a:p>
+            <a:pPr indent="0" marL="0">
+              <a:buNone/>
+            </a:pPr>
+            <a:r>
+              <a:rPr lang="en-US" sz="1700" b="1" dirty="0">
+                <a:solidFill>
+                  <a:srgbClr val="912018"/>
+                </a:solidFill>
+              </a:rPr>
+              <a:t>시험 기동에서 기계가 움직일 때</a:t>
+            </a:r>
+            <a:endParaRPr lang="en-US" sz="1700" dirty="0"/>
+          </a:p>
+        </p:txBody>
+      </p:sp>
+      <p:sp>
+        <p:nvSpPr>
+          <p:cNvPr id="16" name="중지_4"/>
+          <p:cNvSpPr/>
+          <p:nvPr/>
+        </p:nvSpPr>
+        <p:spPr>
+          <a:xfrm>
+            <a:off x="548640" y="3639312"/>
+            <a:ext cx="7040880" cy="658368"/>
+          </a:xfrm>
+          <a:prstGeom prst="roundRect">
+            <a:avLst>
+              <a:gd name="adj" fmla="val 16667"/>
+            </a:avLst>
+          </a:prstGeom>
+          <a:solidFill>
+            <a:srgbClr val="FEF3F2"/>
+          </a:solidFill>
+          <a:ln w="12700">
+            <a:solidFill>
+              <a:srgbClr val="FECDCA"/>
+            </a:solidFill>
+            <a:prstDash val="solid"/>
+          </a:ln>
+        </p:spPr>
+      </p:sp>
+      <p:sp>
+        <p:nvSpPr>
+          <p:cNvPr id="17" name="중지아이콘_4_dot"/>
+          <p:cNvSpPr/>
+          <p:nvPr/>
+        </p:nvSpPr>
+        <p:spPr>
+          <a:xfrm>
+            <a:off x="713232" y="3730752"/>
             <a:ext cx="475488" cy="475488"/>
           </a:xfrm>
-          <a:prstGeom prst="rect">
-            <a:avLst/>
-          </a:prstGeom>
-        </p:spPr>
-      </p:pic>
-      <p:sp>
-        <p:nvSpPr>
-          <p:cNvPr id="13" name="Text 8"/>
-          <p:cNvSpPr txBox="1"/>
-          <p:nvPr/>
-        </p:nvSpPr>
-        <p:spPr>
-          <a:xfrm>
-            <a:off x="3591458" y="2971800"/>
-            <a:ext cx="2103120" cy="502920"/>
-          </a:xfrm>
-          <a:prstGeom prst="rect">
-            <a:avLst/>
-          </a:prstGeom>
-          <a:noFill/>
-          <a:ln/>
-        </p:spPr>
-        <p:txBody>
-          <a:bodyPr wrap="square" lIns="0" tIns="0" rIns="0" bIns="0" rtlCol="0" anchor="ctr"/>
-          <a:lstStyle/>
-          <a:p>
-            <a:pPr algn="ctr" indent="0" marL="0">
-              <a:buNone/>
-            </a:pPr>
-            <a:r>
-              <a:rPr lang="en-US" sz="2200" b="1" dirty="0">
-                <a:solidFill>
-                  <a:schemeClr val="tx2"/>
-                </a:solidFill>
-              </a:rPr>
-              <a:t>알린다</a:t>
-            </a:r>
-            <a:endParaRPr lang="en-US" sz="2200" dirty="0"/>
-          </a:p>
-        </p:txBody>
-      </p:sp>
-      <p:sp>
-        <p:nvSpPr>
-          <p:cNvPr id="14" name="비상설명_2"/>
-          <p:cNvSpPr txBox="1"/>
-          <p:nvPr/>
-        </p:nvSpPr>
-        <p:spPr>
-          <a:xfrm>
-            <a:off x="3591458" y="3566160"/>
-            <a:ext cx="2103120" cy="1005840"/>
-          </a:xfrm>
-          <a:prstGeom prst="rect">
-            <a:avLst/>
-          </a:prstGeom>
-          <a:noFill/>
-          <a:ln/>
-        </p:spPr>
-        <p:txBody>
-          <a:bodyPr wrap="square" lIns="0" tIns="0" rIns="0" bIns="0" rtlCol="0" anchor="t"/>
-          <a:lstStyle/>
-          <a:p>
-            <a:pPr algn="ctr" indent="0" marL="0">
-              <a:buNone/>
-            </a:pPr>
-            <a:r>
-              <a:rPr lang="en-US" sz="1350" dirty="0">
-                <a:solidFill>
-                  <a:srgbClr val="475467"/>
-                </a:solidFill>
-              </a:rPr>
-              <a:t>큰 소리로 주변에 알림</a:t>
-            </a:r>
-            <a:endParaRPr lang="en-US" sz="1350" dirty="0"/>
-          </a:p>
-        </p:txBody>
+          <a:prstGeom prst="ellipse">
+            <a:avLst/>
+          </a:prstGeom>
+          <a:solidFill>
+            <a:srgbClr val="FFC400"/>
+          </a:solidFill>
+          <a:ln w="12700">
+            <a:solidFill>
+              <a:srgbClr val="FFC400"/>
+            </a:solidFill>
+            <a:prstDash val="solid"/>
+          </a:ln>
+        </p:spPr>
       </p:sp>
       <p:pic>
         <p:nvPicPr>
-          <p:cNvPr id="15" name="Image 3" descr="preencoded.png">    </p:cNvPr>
+          <p:cNvPr id="18" name="중지아이콘_4_icon" descr="preencoded.png">    </p:cNvPr>
           <p:cNvPicPr>
             <a:picLocks noChangeAspect="1"/>
           </p:cNvPicPr>
@@ -9894,8 +12281,8 @@
         </p:blipFill>
         <p:spPr>
           <a:xfrm>
-            <a:off x="5940400" y="3017520"/>
-            <a:ext cx="310896" cy="310896"/>
+            <a:off x="827349" y="3844869"/>
+            <a:ext cx="247254" cy="247254"/>
           </a:xfrm>
           <a:prstGeom prst="rect">
             <a:avLst/>
@@ -9904,26 +12291,62 @@
       </p:pic>
       <p:sp>
         <p:nvSpPr>
-          <p:cNvPr id="16" name="비상_3"/>
+          <p:cNvPr id="19" name="중지문구_4"/>
+          <p:cNvSpPr txBox="1"/>
+          <p:nvPr/>
+        </p:nvSpPr>
+        <p:spPr>
+          <a:xfrm>
+            <a:off x="1371600" y="3639312"/>
+            <a:ext cx="6035040" cy="658368"/>
+          </a:xfrm>
+          <a:prstGeom prst="rect">
+            <a:avLst/>
+          </a:prstGeom>
+          <a:noFill/>
+          <a:ln/>
+        </p:spPr>
+        <p:txBody>
+          <a:bodyPr wrap="square" lIns="0" tIns="0" rIns="0" bIns="0" rtlCol="0" anchor="ctr"/>
+          <a:lstStyle/>
+          <a:p>
+            <a:pPr indent="0" marL="0">
+              <a:buNone/>
+            </a:pPr>
+            <a:r>
+              <a:rPr lang="en-US" sz="1700" b="1" dirty="0">
+                <a:solidFill>
+                  <a:srgbClr val="912018"/>
+                </a:solidFill>
+              </a:rPr>
+              <a:t>비상정지 스위치·덮개·연동장치가 고장 났을 때</a:t>
+            </a:r>
+            <a:endParaRPr lang="en-US" sz="1700" dirty="0"/>
+          </a:p>
+        </p:txBody>
+      </p:sp>
+      <p:sp>
+        <p:nvSpPr>
+          <p:cNvPr id="20" name="중지_5"/>
           <p:cNvSpPr/>
           <p:nvPr/>
         </p:nvSpPr>
         <p:spPr>
           <a:xfrm>
-            <a:off x="6359957" y="1554480"/>
-            <a:ext cx="2377440" cy="3200400"/>
+            <a:off x="548640" y="4425696"/>
+            <a:ext cx="7040880" cy="658368"/>
           </a:xfrm>
           <a:prstGeom prst="roundRect">
             <a:avLst>
-              <a:gd name="adj" fmla="val 4615"/>
+              <a:gd name="adj" fmla="val 16667"/>
             </a:avLst>
           </a:prstGeom>
           <a:solidFill>
-            <a:srgbClr val="F2F4F7"/>
+            <a:srgbClr val="FEF3F2"/>
           </a:solidFill>
           <a:ln w="12700">
             <a:solidFill>
-              <a:srgbClr val="F2F4F7"/>
+              <a:srgbClr val="FECDCA"/>
             </a:solidFill>
             <a:prstDash val="solid"/>
           </a:ln>
@@ -9931,14 +12354,14 @@
       </p:sp>
       <p:sp>
         <p:nvSpPr>
-          <p:cNvPr id="17" name="비상아이콘_3_dot"/>
+          <p:cNvPr id="21" name="중지아이콘_5_dot"/>
           <p:cNvSpPr/>
           <p:nvPr/>
         </p:nvSpPr>
         <p:spPr>
           <a:xfrm>
-            <a:off x="7091477" y="1874520"/>
-            <a:ext cx="914400" cy="914400"/>
+            <a:off x="713232" y="4517136"/>
+            <a:ext cx="475488" cy="475488"/>
           </a:xfrm>
           <a:prstGeom prst="ellipse">
             <a:avLst/>
@@ -9956,7 +12379,7 @@
       </p:sp>
       <p:pic>
         <p:nvPicPr>
-          <p:cNvPr id="18" name="비상아이콘_3_icon" descr="preencoded.png">    </p:cNvPr>
+          <p:cNvPr id="22" name="중지아이콘_5_icon" descr="preencoded.png">    </p:cNvPr>
           <p:cNvPicPr>
             <a:picLocks noChangeAspect="1"/>
           </p:cNvPicPr>
@@ -9970,8 +12393,8 @@
         </p:blipFill>
         <p:spPr>
           <a:xfrm>
-            <a:off x="7310933" y="2093976"/>
-            <a:ext cx="475488" cy="475488"/>
+            <a:off x="827349" y="4631253"/>
+            <a:ext cx="247254" cy="247254"/>
           </a:xfrm>
           <a:prstGeom prst="rect">
             <a:avLst/>
@@ -9980,136 +12403,62 @@
       </p:pic>
       <p:sp>
         <p:nvSpPr>
-          <p:cNvPr id="19" name="Text 12"/>
-          <p:cNvSpPr txBox="1"/>
-          <p:nvPr/>
-        </p:nvSpPr>
-        <p:spPr>
-          <a:xfrm>
-            <a:off x="6497117" y="2971800"/>
-            <a:ext cx="2103120" cy="502920"/>
-          </a:xfrm>
-          <a:prstGeom prst="rect">
-            <a:avLst/>
-          </a:prstGeom>
-          <a:noFill/>
-          <a:ln/>
-        </p:spPr>
-        <p:txBody>
-          <a:bodyPr wrap="square" lIns="0" tIns="0" rIns="0" bIns="0" rtlCol="0" anchor="ctr"/>
-          <a:lstStyle/>
-          <a:p>
-            <a:pPr algn="ctr" indent="0" marL="0">
-              <a:buNone/>
-            </a:pPr>
-            <a:r>
-              <a:rPr lang="en-US" sz="2200" b="1" dirty="0">
-                <a:solidFill>
-                  <a:schemeClr val="tx2"/>
-                </a:solidFill>
-              </a:rPr>
-              <a:t>보고한다</a:t>
-            </a:r>
-            <a:endParaRPr lang="en-US" sz="2200" dirty="0"/>
-          </a:p>
-        </p:txBody>
-      </p:sp>
-      <p:sp>
-        <p:nvSpPr>
-          <p:cNvPr id="20" name="비상설명_3"/>
-          <p:cNvSpPr txBox="1"/>
-          <p:nvPr/>
-        </p:nvSpPr>
-        <p:spPr>
-          <a:xfrm>
-            <a:off x="6497117" y="3566160"/>
-            <a:ext cx="2103120" cy="1005840"/>
-          </a:xfrm>
-          <a:prstGeom prst="rect">
-            <a:avLst/>
-          </a:prstGeom>
-          <a:noFill/>
-          <a:ln/>
-        </p:spPr>
-        <p:txBody>
-          <a:bodyPr wrap="square" lIns="0" tIns="0" rIns="0" bIns="0" rtlCol="0" anchor="t"/>
-          <a:lstStyle/>
-          <a:p>
-            <a:pPr algn="ctr" indent="0" marL="0">
-              <a:buNone/>
-            </a:pPr>
-            <a:r>
-              <a:rPr lang="en-US" sz="1350" dirty="0">
-                <a:solidFill>
-                  <a:srgbClr val="475467"/>
-                </a:solidFill>
-              </a:rPr>
-              <a:t>관리감독자 · 사내 비상연락</a:t>
-            </a:r>
-            <a:endParaRPr lang="en-US" sz="1350" dirty="0"/>
-          </a:p>
-          <a:p>
-            <a:pPr algn="ctr" indent="0" marL="0">
-              <a:buNone/>
-            </a:pPr>
-            <a:r>
-              <a:rPr lang="en-US" sz="1350" dirty="0">
-                <a:solidFill>
-                  <a:srgbClr val="475467"/>
-                </a:solidFill>
-              </a:rPr>
-              <a:t>내선 ○○○</a:t>
-            </a:r>
-            <a:endParaRPr lang="en-US" sz="1350" dirty="0"/>
-          </a:p>
-        </p:txBody>
-      </p:sp>
-      <p:pic>
-        <p:nvPicPr>
-          <p:cNvPr id="21" name="Image 5" descr="preencoded.png">    </p:cNvPr>
-          <p:cNvPicPr>
-            <a:picLocks noChangeAspect="1"/>
-          </p:cNvPicPr>
-          <p:nvPr/>
-        </p:nvPicPr>
-        <p:blipFill>
-          <a:blip r:embed="rId6"/>
-          <a:stretch>
-            <a:fillRect/>
-          </a:stretch>
-        </p:blipFill>
-        <p:spPr>
-          <a:xfrm>
-            <a:off x="8846058" y="3017520"/>
-            <a:ext cx="310896" cy="310896"/>
-          </a:xfrm>
-          <a:prstGeom prst="rect">
-            <a:avLst/>
-          </a:prstGeom>
-        </p:spPr>
-      </p:pic>
-      <p:sp>
-        <p:nvSpPr>
-          <p:cNvPr id="22" name="비상_4"/>
+          <p:cNvPr id="23" name="중지문구_5"/>
+          <p:cNvSpPr txBox="1"/>
+          <p:nvPr/>
+        </p:nvSpPr>
+        <p:spPr>
+          <a:xfrm>
+            <a:off x="1371600" y="4425696"/>
+            <a:ext cx="6035040" cy="658368"/>
+          </a:xfrm>
+          <a:prstGeom prst="rect">
+            <a:avLst/>
+          </a:prstGeom>
+          <a:noFill/>
+          <a:ln/>
+        </p:spPr>
+        <p:txBody>
+          <a:bodyPr wrap="square" lIns="0" tIns="0" rIns="0" bIns="0" rtlCol="0" anchor="ctr"/>
+          <a:lstStyle/>
+          <a:p>
+            <a:pPr indent="0" marL="0">
+              <a:buNone/>
+            </a:pPr>
+            <a:r>
+              <a:rPr lang="en-US" sz="1700" b="1" dirty="0">
+                <a:solidFill>
+                  <a:srgbClr val="912018"/>
+                </a:solidFill>
+              </a:rPr>
+              <a:t>확인자 없이 혼자 하게 될 때</a:t>
+            </a:r>
+            <a:endParaRPr lang="en-US" sz="1700" dirty="0"/>
+          </a:p>
+        </p:txBody>
+      </p:sp>
+      <p:sp>
+        <p:nvSpPr>
+          <p:cNvPr id="24" name="중지권카드"/>
           <p:cNvSpPr/>
           <p:nvPr/>
         </p:nvSpPr>
         <p:spPr>
           <a:xfrm>
-            <a:off x="9265615" y="1554480"/>
-            <a:ext cx="2377440" cy="3200400"/>
+            <a:off x="7955280" y="1280160"/>
+            <a:ext cx="3687775" cy="3803904"/>
           </a:xfrm>
           <a:prstGeom prst="roundRect">
             <a:avLst>
-              <a:gd name="adj" fmla="val 4615"/>
+              <a:gd name="adj" fmla="val 2975"/>
             </a:avLst>
           </a:prstGeom>
           <a:solidFill>
-            <a:srgbClr val="F2F4F7"/>
+            <a:srgbClr val="0E1B2E"/>
           </a:solidFill>
           <a:ln w="12700">
             <a:solidFill>
-              <a:srgbClr val="F2F4F7"/>
+              <a:srgbClr val="0E1B2E"/>
             </a:solidFill>
             <a:prstDash val="solid"/>
           </a:ln>
@@ -10117,84 +12466,35 @@
       </p:sp>
       <p:sp>
         <p:nvSpPr>
-          <p:cNvPr id="23" name="비상아이콘_4_dot"/>
-          <p:cNvSpPr/>
-          <p:nvPr/>
-        </p:nvSpPr>
-        <p:spPr>
-          <a:xfrm>
-            <a:off x="9997135" y="1874520"/>
-            <a:ext cx="914400" cy="914400"/>
-          </a:xfrm>
-          <a:prstGeom prst="ellipse">
-            <a:avLst/>
-          </a:prstGeom>
-          <a:solidFill>
-            <a:srgbClr val="FFC400"/>
-          </a:solidFill>
-          <a:ln w="12700">
-            <a:solidFill>
-              <a:srgbClr val="FFC400"/>
-            </a:solidFill>
-            <a:prstDash val="solid"/>
-          </a:ln>
-        </p:spPr>
-      </p:sp>
-      <p:pic>
-        <p:nvPicPr>
-          <p:cNvPr id="24" name="비상아이콘_4_icon" descr="preencoded.png">    </p:cNvPr>
-          <p:cNvPicPr>
-            <a:picLocks noChangeAspect="1"/>
-          </p:cNvPicPr>
-          <p:nvPr/>
-        </p:nvPicPr>
-        <p:blipFill>
-          <a:blip r:embed="rId7"/>
-          <a:stretch>
-            <a:fillRect/>
-          </a:stretch>
-        </p:blipFill>
-        <p:spPr>
-          <a:xfrm>
-            <a:off x="10216591" y="2093976"/>
-            <a:ext cx="475488" cy="475488"/>
-          </a:xfrm>
-          <a:prstGeom prst="rect">
-            <a:avLst/>
-          </a:prstGeom>
-        </p:spPr>
-      </p:pic>
-      <p:sp>
-        <p:nvSpPr>
-          <p:cNvPr id="25" name="Text 16"/>
-          <p:cNvSpPr txBox="1"/>
-          <p:nvPr/>
-        </p:nvSpPr>
-        <p:spPr>
-          <a:xfrm>
-            <a:off x="9402775" y="2971800"/>
-            <a:ext cx="2103120" cy="502920"/>
-          </a:xfrm>
-          <a:prstGeom prst="rect">
-            <a:avLst/>
-          </a:prstGeom>
-          <a:noFill/>
-          <a:ln/>
-        </p:spPr>
-        <p:txBody>
-          <a:bodyPr wrap="square" lIns="0" tIns="0" rIns="0" bIns="0" rtlCol="0" anchor="ctr"/>
-          <a:lstStyle/>
-          <a:p>
-            <a:pPr algn="ctr" indent="0" marL="0">
+          <p:cNvPr id="25" name="Text 18"/>
+          <p:cNvSpPr txBox="1"/>
+          <p:nvPr/>
+        </p:nvSpPr>
+        <p:spPr>
+          <a:xfrm>
+            <a:off x="8275320" y="1554480"/>
+            <a:ext cx="3047695" cy="457200"/>
+          </a:xfrm>
+          <a:prstGeom prst="rect">
+            <a:avLst/>
+          </a:prstGeom>
+          <a:noFill/>
+          <a:ln/>
+        </p:spPr>
+        <p:txBody>
+          <a:bodyPr wrap="square" lIns="0" tIns="0" rIns="0" bIns="0" rtlCol="0" anchor="ctr"/>
+          <a:lstStyle/>
+          <a:p>
+            <a:pPr indent="0" marL="0">
               <a:buNone/>
             </a:pPr>
             <a:r>
               <a:rPr lang="en-US" sz="2200" b="1" dirty="0">
                 <a:solidFill>
-                  <a:schemeClr val="tx2"/>
-                </a:solidFill>
-              </a:rPr>
-              <a:t>119</a:t>
+                  <a:srgbClr val="FFC400"/>
+                </a:solidFill>
+              </a:rPr>
+              <a:t>멈춰도 됩니다</a:t>
             </a:r>
             <a:endParaRPr lang="en-US" sz="2200" dirty="0"/>
           </a:p>
@@ -10202,14 +12502,14 @@
       </p:sp>
       <p:sp>
         <p:nvSpPr>
-          <p:cNvPr id="26" name="비상설명_4"/>
-          <p:cNvSpPr txBox="1"/>
-          <p:nvPr/>
-        </p:nvSpPr>
-        <p:spPr>
-          <a:xfrm>
-            <a:off x="9402775" y="3566160"/>
-            <a:ext cx="2103120" cy="1005840"/>
+          <p:cNvPr id="26" name="Text 19"/>
+          <p:cNvSpPr txBox="1"/>
+          <p:nvPr/>
+        </p:nvSpPr>
+        <p:spPr>
+          <a:xfrm>
+            <a:off x="8275320" y="2148840"/>
+            <a:ext cx="3047695" cy="2743200"/>
           </a:xfrm>
           <a:prstGeom prst="rect">
             <a:avLst/>
@@ -10221,106 +12521,74 @@
           <a:bodyPr wrap="square" lIns="0" tIns="0" rIns="0" bIns="0" rtlCol="0" anchor="t"/>
           <a:lstStyle/>
           <a:p>
-            <a:pPr algn="ctr" indent="0" marL="0">
-              <a:buNone/>
-            </a:pPr>
-            <a:r>
-              <a:rPr lang="en-US" sz="1350" dirty="0">
-                <a:solidFill>
-                  <a:srgbClr val="475467"/>
-                </a:solidFill>
-              </a:rPr>
-              <a:t>부상자는 무리하게 빼내지 말고</a:t>
-            </a:r>
-            <a:endParaRPr lang="en-US" sz="1350" dirty="0"/>
-          </a:p>
-          <a:p>
-            <a:pPr algn="ctr" indent="0" marL="0">
-              <a:buNone/>
-            </a:pPr>
-            <a:r>
-              <a:rPr lang="en-US" sz="1350" dirty="0">
-                <a:solidFill>
-                  <a:srgbClr val="475467"/>
-                </a:solidFill>
-              </a:rPr>
-              <a:t>119 지시에 따름</a:t>
-            </a:r>
-            <a:endParaRPr lang="en-US" sz="1350" dirty="0"/>
-          </a:p>
-        </p:txBody>
-      </p:sp>
-      <p:sp>
-        <p:nvSpPr>
-          <p:cNvPr id="27" name="비상위치"/>
-          <p:cNvSpPr/>
-          <p:nvPr/>
-        </p:nvSpPr>
-        <p:spPr>
-          <a:xfrm>
-            <a:off x="548640" y="5120640"/>
-            <a:ext cx="11094415" cy="777240"/>
-          </a:xfrm>
-          <a:prstGeom prst="roundRect">
-            <a:avLst>
-              <a:gd name="adj" fmla="val 14118"/>
-            </a:avLst>
-          </a:prstGeom>
-          <a:solidFill>
-            <a:srgbClr val="FFF6D6"/>
-          </a:solidFill>
-          <a:ln w="12700">
-            <a:solidFill>
-              <a:srgbClr val="FFF6D6"/>
-            </a:solidFill>
-            <a:prstDash val="solid"/>
-          </a:ln>
-        </p:spPr>
-      </p:sp>
-      <p:sp>
-        <p:nvSpPr>
-          <p:cNvPr id="28" name="비상정지위치"/>
-          <p:cNvSpPr txBox="1"/>
-          <p:nvPr/>
-        </p:nvSpPr>
-        <p:spPr>
-          <a:xfrm>
-            <a:off x="822960" y="5166360"/>
-            <a:ext cx="10545775" cy="685800"/>
-          </a:xfrm>
-          <a:prstGeom prst="rect">
-            <a:avLst/>
-          </a:prstGeom>
-          <a:noFill/>
-          <a:ln/>
-        </p:spPr>
-        <p:txBody>
-          <a:bodyPr wrap="square" lIns="0" tIns="0" rIns="0" bIns="0" rtlCol="0" anchor="ctr"/>
-          <a:lstStyle/>
-          <a:p>
             <a:pPr indent="0" marL="0">
               <a:buNone/>
             </a:pPr>
             <a:r>
-              <a:rPr lang="en-US" sz="1400" b="1" dirty="0">
-                <a:solidFill>
-                  <a:schemeClr val="tx2"/>
-                </a:solidFill>
-              </a:rPr>
-              <a:t>비상정지 스위치 위치  </a:t>
-            </a:r>
+              <a:rPr lang="en-US" sz="1500" dirty="0">
+                <a:solidFill>
+                  <a:srgbClr val="E4E7EC"/>
+                </a:solidFill>
+              </a:rPr>
+              <a:t>산업재해가 발생할 급박한 위험이 있으면 근로자는 작업을 중지하고 대피할 수 있습니다.</a:t>
+            </a:r>
+            <a:endParaRPr lang="en-US" sz="1500" dirty="0"/>
+          </a:p>
+          <a:p>
             <a:pPr indent="0" marL="0">
               <a:buNone/>
             </a:pPr>
             <a:r>
-              <a:rPr lang="en-US" sz="1400" i="1" dirty="0">
+              <a:rPr lang="en-US" sz="800" dirty="0">
+                <a:solidFill>
+                  <a:srgbClr val="E4E7EC"/>
+                </a:solidFill>
+              </a:rPr>
+              <a:t> </a:t>
+            </a:r>
+            <a:endParaRPr lang="en-US" sz="1500" dirty="0"/>
+          </a:p>
+          <a:p>
+            <a:pPr indent="0" marL="0">
+              <a:buNone/>
+            </a:pPr>
+            <a:r>
+              <a:rPr lang="en-US" sz="1500" dirty="0">
+                <a:solidFill>
+                  <a:srgbClr val="E4E7EC"/>
+                </a:solidFill>
+              </a:rPr>
+              <a:t>멈춘 뒤에는 바로 관리감독자에게 알리고, 관리감독자는 필요한 조치를 합니다.</a:t>
+            </a:r>
+            <a:endParaRPr lang="en-US" sz="1500" dirty="0"/>
+          </a:p>
+          <a:p>
+            <a:pPr indent="0" marL="0">
+              <a:buNone/>
+            </a:pPr>
+            <a:r>
+              <a:rPr lang="en-US" sz="800" dirty="0">
+                <a:solidFill>
+                  <a:srgbClr val="E4E7EC"/>
+                </a:solidFill>
+              </a:rPr>
+              <a:t> </a:t>
+            </a:r>
+            <a:endParaRPr lang="en-US" sz="1500" dirty="0"/>
+          </a:p>
+          <a:p>
+            <a:pPr indent="0" marL="0">
+              <a:buNone/>
+            </a:pPr>
+            <a:r>
+              <a:rPr lang="en-US" sz="1200" dirty="0">
                 <a:solidFill>
                   <a:srgbClr val="98A2B3"/>
                 </a:solidFill>
               </a:rPr>
-              <a:t>예: 컨베이어 양 끝단·중간 조작반 3곳 — 사업장 위치로 바꿔 쓰세요</a:t>
-            </a:r>
-            <a:endParaRPr lang="en-US" sz="1400" dirty="0"/>
+              <a:t>산업안전보건법 제52조(근로자의 작업중지)</a:t>
+            </a:r>
+            <a:endParaRPr lang="en-US" sz="1500" dirty="0"/>
           </a:p>
         </p:txBody>
       </p:sp>
@@ -10426,7 +12694,7 @@
                   <a:schemeClr val="tx2"/>
                 </a:solidFill>
               </a:rPr>
-              <a:t>이해도 확인</a:t>
+              <a:t>작업이 끝나면 확인할 것</a:t>
             </a:r>
             <a:endParaRPr lang="en-US" sz="2600" dirty="0"/>
           </a:p>
@@ -10466,7 +12734,7 @@
                   <a:srgbClr val="475467"/>
                 </a:solidFill>
               </a:rPr>
-              <a:t>7. 확인 질문</a:t>
+              <a:t>7. 작업 후 확인</a:t>
             </a:r>
             <a:endParaRPr lang="en-US" sz="1200" dirty="0"/>
           </a:p>
@@ -10474,18 +12742,18 @@
       </p:sp>
       <p:sp>
         <p:nvSpPr>
-          <p:cNvPr id="4" name="질문_1"/>
+          <p:cNvPr id="4" name="작업후_1"/>
           <p:cNvSpPr/>
           <p:nvPr/>
         </p:nvSpPr>
         <p:spPr>
           <a:xfrm>
             <a:off x="548640" y="1371600"/>
-            <a:ext cx="11094415" cy="1097280"/>
+            <a:ext cx="2567864" cy="3108960"/>
           </a:xfrm>
           <a:prstGeom prst="roundRect">
             <a:avLst>
-              <a:gd name="adj" fmla="val 10000"/>
+              <a:gd name="adj" fmla="val 4273"/>
             </a:avLst>
           </a:prstGeom>
           <a:solidFill>
@@ -10501,130 +12769,139 @@
       </p:sp>
       <p:sp>
         <p:nvSpPr>
-          <p:cNvPr id="5" name="Text 3"/>
-          <p:cNvSpPr txBox="1"/>
-          <p:nvPr/>
-        </p:nvSpPr>
-        <p:spPr>
-          <a:xfrm>
-            <a:off x="822960" y="1618488"/>
-            <a:ext cx="822960" cy="603504"/>
+          <p:cNvPr id="5" name="작업후아이콘_1_dot"/>
+          <p:cNvSpPr/>
+          <p:nvPr/>
+        </p:nvSpPr>
+        <p:spPr>
+          <a:xfrm>
+            <a:off x="822960" y="1691640"/>
+            <a:ext cx="658368" cy="658368"/>
+          </a:xfrm>
+          <a:prstGeom prst="ellipse">
+            <a:avLst/>
+          </a:prstGeom>
+          <a:solidFill>
+            <a:srgbClr val="FFC400"/>
+          </a:solidFill>
+          <a:ln w="12700">
+            <a:solidFill>
+              <a:srgbClr val="FFC400"/>
+            </a:solidFill>
+            <a:prstDash val="solid"/>
+          </a:ln>
+        </p:spPr>
+      </p:sp>
+      <p:pic>
+        <p:nvPicPr>
+          <p:cNvPr id="6" name="작업후아이콘_1_icon" descr="preencoded.png">    </p:cNvPr>
+          <p:cNvPicPr>
+            <a:picLocks noChangeAspect="1"/>
+          </p:cNvPicPr>
+          <p:nvPr/>
+        </p:nvPicPr>
+        <p:blipFill>
+          <a:blip r:embed="rId1"/>
+          <a:stretch>
+            <a:fillRect/>
+          </a:stretch>
+        </p:blipFill>
+        <p:spPr>
+          <a:xfrm>
+            <a:off x="980968" y="1849648"/>
+            <a:ext cx="342351" cy="342351"/>
+          </a:xfrm>
+          <a:prstGeom prst="rect">
+            <a:avLst/>
+          </a:prstGeom>
+        </p:spPr>
+      </p:pic>
+      <p:sp>
+        <p:nvSpPr>
+          <p:cNvPr id="7" name="Text 4"/>
+          <p:cNvSpPr txBox="1"/>
+          <p:nvPr/>
+        </p:nvSpPr>
+        <p:spPr>
+          <a:xfrm>
+            <a:off x="822960" y="2560320"/>
+            <a:ext cx="2019224" cy="411480"/>
+          </a:xfrm>
+          <a:prstGeom prst="rect">
+            <a:avLst/>
+          </a:prstGeom>
+          <a:noFill/>
+          <a:ln/>
+        </p:spPr>
+        <p:txBody>
+          <a:bodyPr wrap="square" lIns="0" tIns="0" rIns="0" bIns="0" rtlCol="0" anchor="ctr"/>
+          <a:lstStyle/>
+          <a:p>
+            <a:pPr indent="0" marL="0">
+              <a:buNone/>
+            </a:pPr>
+            <a:r>
+              <a:rPr lang="en-US" sz="1800" b="1" dirty="0">
+                <a:solidFill>
+                  <a:schemeClr val="tx2"/>
+                </a:solidFill>
+              </a:rPr>
+              <a:t>공구·자재 회수</a:t>
+            </a:r>
+            <a:endParaRPr lang="en-US" sz="1800" dirty="0"/>
+          </a:p>
+        </p:txBody>
+      </p:sp>
+      <p:sp>
+        <p:nvSpPr>
+          <p:cNvPr id="8" name="Text 5"/>
+          <p:cNvSpPr txBox="1"/>
+          <p:nvPr/>
+        </p:nvSpPr>
+        <p:spPr>
+          <a:xfrm>
+            <a:off x="822960" y="3063240"/>
+            <a:ext cx="2019224" cy="1280160"/>
+          </a:xfrm>
+          <a:prstGeom prst="rect">
+            <a:avLst/>
+          </a:prstGeom>
+          <a:noFill/>
+          <a:ln/>
+        </p:spPr>
+        <p:txBody>
+          <a:bodyPr wrap="square" lIns="0" tIns="0" rIns="0" bIns="0" rtlCol="0" anchor="t"/>
+          <a:lstStyle/>
+          <a:p>
+            <a:pPr indent="0" marL="0">
+              <a:buNone/>
+            </a:pPr>
+            <a:r>
+              <a:rPr lang="en-US" sz="1400" dirty="0">
+                <a:solidFill>
+                  <a:srgbClr val="475467"/>
+                </a:solidFill>
+              </a:rPr>
+              <a:t>가져간 공구 수량을 세어 벨트 위에 남은 것이 없는지 확인</a:t>
+            </a:r>
+            <a:endParaRPr lang="en-US" sz="1400" dirty="0"/>
+          </a:p>
+        </p:txBody>
+      </p:sp>
+      <p:sp>
+        <p:nvSpPr>
+          <p:cNvPr id="9" name="작업후_2"/>
+          <p:cNvSpPr/>
+          <p:nvPr/>
+        </p:nvSpPr>
+        <p:spPr>
+          <a:xfrm>
+            <a:off x="3390824" y="1371600"/>
+            <a:ext cx="2567864" cy="3108960"/>
           </a:xfrm>
           <a:prstGeom prst="roundRect">
             <a:avLst>
-              <a:gd name="adj" fmla="val 18182"/>
-            </a:avLst>
-          </a:prstGeom>
-          <a:solidFill>
-            <a:srgbClr val="FFC400"/>
-          </a:solidFill>
-          <a:ln/>
-        </p:spPr>
-        <p:txBody>
-          <a:bodyPr wrap="square" lIns="0" tIns="0" rIns="0" bIns="0" rtlCol="0" anchor="ctr"/>
-          <a:lstStyle/>
-          <a:p>
-            <a:pPr algn="ctr" indent="0" marL="0">
-              <a:buNone/>
-            </a:pPr>
-            <a:r>
-              <a:rPr lang="en-US" sz="2200" b="1" dirty="0">
-                <a:solidFill>
-                  <a:srgbClr val="0E1B2E"/>
-                </a:solidFill>
-              </a:rPr>
-              <a:t>Q1</a:t>
-            </a:r>
-            <a:endParaRPr lang="en-US" sz="2200" dirty="0"/>
-          </a:p>
-        </p:txBody>
-      </p:sp>
-      <p:sp>
-        <p:nvSpPr>
-          <p:cNvPr id="6" name="질문문구_1"/>
-          <p:cNvSpPr txBox="1"/>
-          <p:nvPr/>
-        </p:nvSpPr>
-        <p:spPr>
-          <a:xfrm>
-            <a:off x="1874520" y="1371600"/>
-            <a:ext cx="7253935" cy="1097280"/>
-          </a:xfrm>
-          <a:prstGeom prst="rect">
-            <a:avLst/>
-          </a:prstGeom>
-          <a:noFill/>
-          <a:ln/>
-        </p:spPr>
-        <p:txBody>
-          <a:bodyPr wrap="square" lIns="0" tIns="0" rIns="0" bIns="0" rtlCol="0" anchor="ctr"/>
-          <a:lstStyle/>
-          <a:p>
-            <a:pPr indent="0" marL="0">
-              <a:buNone/>
-            </a:pPr>
-            <a:r>
-              <a:rPr lang="en-US" sz="2000" b="1" dirty="0">
-                <a:solidFill>
-                  <a:srgbClr val="1D2939"/>
-                </a:solidFill>
-              </a:rPr>
-              <a:t>청소 전에 차단기에 무엇을 해야 하나요?</a:t>
-            </a:r>
-            <a:endParaRPr lang="en-US" sz="2000" dirty="0"/>
-          </a:p>
-        </p:txBody>
-      </p:sp>
-      <p:sp>
-        <p:nvSpPr>
-          <p:cNvPr id="7" name="Text 5"/>
-          <p:cNvSpPr txBox="1"/>
-          <p:nvPr/>
-        </p:nvSpPr>
-        <p:spPr>
-          <a:xfrm>
-            <a:off x="8991295" y="1371600"/>
-            <a:ext cx="2377440" cy="1097280"/>
-          </a:xfrm>
-          <a:prstGeom prst="rect">
-            <a:avLst/>
-          </a:prstGeom>
-          <a:noFill/>
-          <a:ln/>
-        </p:spPr>
-        <p:txBody>
-          <a:bodyPr wrap="square" lIns="0" tIns="0" rIns="0" bIns="0" rtlCol="0" anchor="ctr"/>
-          <a:lstStyle/>
-          <a:p>
-            <a:pPr algn="r" indent="0" marL="0">
-              <a:buNone/>
-            </a:pPr>
-            <a:r>
-              <a:rPr lang="en-US" sz="1500" dirty="0">
-                <a:solidFill>
-                  <a:srgbClr val="98A2B3"/>
-                </a:solidFill>
-              </a:rPr>
-              <a:t>답: ____________</a:t>
-            </a:r>
-            <a:endParaRPr lang="en-US" sz="1500" dirty="0"/>
-          </a:p>
-        </p:txBody>
-      </p:sp>
-      <p:sp>
-        <p:nvSpPr>
-          <p:cNvPr id="8" name="질문_2"/>
-          <p:cNvSpPr/>
-          <p:nvPr/>
-        </p:nvSpPr>
-        <p:spPr>
-          <a:xfrm>
-            <a:off x="548640" y="2697480"/>
-            <a:ext cx="11094415" cy="1097280"/>
-          </a:xfrm>
-          <a:prstGeom prst="roundRect">
-            <a:avLst>
-              <a:gd name="adj" fmla="val 10000"/>
+              <a:gd name="adj" fmla="val 4273"/>
             </a:avLst>
           </a:prstGeom>
           <a:solidFill>
@@ -10640,130 +12917,139 @@
       </p:sp>
       <p:sp>
         <p:nvSpPr>
-          <p:cNvPr id="9" name="Text 7"/>
-          <p:cNvSpPr txBox="1"/>
-          <p:nvPr/>
-        </p:nvSpPr>
-        <p:spPr>
-          <a:xfrm>
-            <a:off x="822960" y="2944368"/>
-            <a:ext cx="822960" cy="603504"/>
+          <p:cNvPr id="10" name="작업후아이콘_2_dot"/>
+          <p:cNvSpPr/>
+          <p:nvPr/>
+        </p:nvSpPr>
+        <p:spPr>
+          <a:xfrm>
+            <a:off x="3665144" y="1691640"/>
+            <a:ext cx="658368" cy="658368"/>
+          </a:xfrm>
+          <a:prstGeom prst="ellipse">
+            <a:avLst/>
+          </a:prstGeom>
+          <a:solidFill>
+            <a:srgbClr val="FFC400"/>
+          </a:solidFill>
+          <a:ln w="12700">
+            <a:solidFill>
+              <a:srgbClr val="FFC400"/>
+            </a:solidFill>
+            <a:prstDash val="solid"/>
+          </a:ln>
+        </p:spPr>
+      </p:sp>
+      <p:pic>
+        <p:nvPicPr>
+          <p:cNvPr id="11" name="작업후아이콘_2_icon" descr="preencoded.png">    </p:cNvPr>
+          <p:cNvPicPr>
+            <a:picLocks noChangeAspect="1"/>
+          </p:cNvPicPr>
+          <p:nvPr/>
+        </p:nvPicPr>
+        <p:blipFill>
+          <a:blip r:embed="rId2"/>
+          <a:stretch>
+            <a:fillRect/>
+          </a:stretch>
+        </p:blipFill>
+        <p:spPr>
+          <a:xfrm>
+            <a:off x="3823152" y="1849648"/>
+            <a:ext cx="342351" cy="342351"/>
+          </a:xfrm>
+          <a:prstGeom prst="rect">
+            <a:avLst/>
+          </a:prstGeom>
+        </p:spPr>
+      </p:pic>
+      <p:sp>
+        <p:nvSpPr>
+          <p:cNvPr id="12" name="Text 8"/>
+          <p:cNvSpPr txBox="1"/>
+          <p:nvPr/>
+        </p:nvSpPr>
+        <p:spPr>
+          <a:xfrm>
+            <a:off x="3665144" y="2560320"/>
+            <a:ext cx="2019224" cy="411480"/>
+          </a:xfrm>
+          <a:prstGeom prst="rect">
+            <a:avLst/>
+          </a:prstGeom>
+          <a:noFill/>
+          <a:ln/>
+        </p:spPr>
+        <p:txBody>
+          <a:bodyPr wrap="square" lIns="0" tIns="0" rIns="0" bIns="0" rtlCol="0" anchor="ctr"/>
+          <a:lstStyle/>
+          <a:p>
+            <a:pPr indent="0" marL="0">
+              <a:buNone/>
+            </a:pPr>
+            <a:r>
+              <a:rPr lang="en-US" sz="1800" b="1" dirty="0">
+                <a:solidFill>
+                  <a:schemeClr val="tx2"/>
+                </a:solidFill>
+              </a:rPr>
+              <a:t>덮개·방호장치 복구</a:t>
+            </a:r>
+            <a:endParaRPr lang="en-US" sz="1800" dirty="0"/>
+          </a:p>
+        </p:txBody>
+      </p:sp>
+      <p:sp>
+        <p:nvSpPr>
+          <p:cNvPr id="13" name="Text 9"/>
+          <p:cNvSpPr txBox="1"/>
+          <p:nvPr/>
+        </p:nvSpPr>
+        <p:spPr>
+          <a:xfrm>
+            <a:off x="3665144" y="3063240"/>
+            <a:ext cx="2019224" cy="1280160"/>
+          </a:xfrm>
+          <a:prstGeom prst="rect">
+            <a:avLst/>
+          </a:prstGeom>
+          <a:noFill/>
+          <a:ln/>
+        </p:spPr>
+        <p:txBody>
+          <a:bodyPr wrap="square" lIns="0" tIns="0" rIns="0" bIns="0" rtlCol="0" anchor="t"/>
+          <a:lstStyle/>
+          <a:p>
+            <a:pPr indent="0" marL="0">
+              <a:buNone/>
+            </a:pPr>
+            <a:r>
+              <a:rPr lang="en-US" sz="1400" dirty="0">
+                <a:solidFill>
+                  <a:srgbClr val="475467"/>
+                </a:solidFill>
+              </a:rPr>
+              <a:t>덮개·연동장치를 원래대로 체결한 뒤에만 잠금 해제</a:t>
+            </a:r>
+            <a:endParaRPr lang="en-US" sz="1400" dirty="0"/>
+          </a:p>
+        </p:txBody>
+      </p:sp>
+      <p:sp>
+        <p:nvSpPr>
+          <p:cNvPr id="14" name="작업후_3"/>
+          <p:cNvSpPr/>
+          <p:nvPr/>
+        </p:nvSpPr>
+        <p:spPr>
+          <a:xfrm>
+            <a:off x="6233008" y="1371600"/>
+            <a:ext cx="2567864" cy="3108960"/>
           </a:xfrm>
           <a:prstGeom prst="roundRect">
             <a:avLst>
-              <a:gd name="adj" fmla="val 18182"/>
-            </a:avLst>
-          </a:prstGeom>
-          <a:solidFill>
-            <a:srgbClr val="FFC400"/>
-          </a:solidFill>
-          <a:ln/>
-        </p:spPr>
-        <p:txBody>
-          <a:bodyPr wrap="square" lIns="0" tIns="0" rIns="0" bIns="0" rtlCol="0" anchor="ctr"/>
-          <a:lstStyle/>
-          <a:p>
-            <a:pPr algn="ctr" indent="0" marL="0">
-              <a:buNone/>
-            </a:pPr>
-            <a:r>
-              <a:rPr lang="en-US" sz="2200" b="1" dirty="0">
-                <a:solidFill>
-                  <a:srgbClr val="0E1B2E"/>
-                </a:solidFill>
-              </a:rPr>
-              <a:t>Q2</a:t>
-            </a:r>
-            <a:endParaRPr lang="en-US" sz="2200" dirty="0"/>
-          </a:p>
-        </p:txBody>
-      </p:sp>
-      <p:sp>
-        <p:nvSpPr>
-          <p:cNvPr id="10" name="질문문구_2"/>
-          <p:cNvSpPr txBox="1"/>
-          <p:nvPr/>
-        </p:nvSpPr>
-        <p:spPr>
-          <a:xfrm>
-            <a:off x="1874520" y="2697480"/>
-            <a:ext cx="7253935" cy="1097280"/>
-          </a:xfrm>
-          <a:prstGeom prst="rect">
-            <a:avLst/>
-          </a:prstGeom>
-          <a:noFill/>
-          <a:ln/>
-        </p:spPr>
-        <p:txBody>
-          <a:bodyPr wrap="square" lIns="0" tIns="0" rIns="0" bIns="0" rtlCol="0" anchor="ctr"/>
-          <a:lstStyle/>
-          <a:p>
-            <a:pPr indent="0" marL="0">
-              <a:buNone/>
-            </a:pPr>
-            <a:r>
-              <a:rPr lang="en-US" sz="2000" b="1" dirty="0">
-                <a:solidFill>
-                  <a:srgbClr val="1D2939"/>
-                </a:solidFill>
-              </a:rPr>
-              <a:t>잠금은 누가 풀 수 있나요?</a:t>
-            </a:r>
-            <a:endParaRPr lang="en-US" sz="2000" dirty="0"/>
-          </a:p>
-        </p:txBody>
-      </p:sp>
-      <p:sp>
-        <p:nvSpPr>
-          <p:cNvPr id="11" name="Text 9"/>
-          <p:cNvSpPr txBox="1"/>
-          <p:nvPr/>
-        </p:nvSpPr>
-        <p:spPr>
-          <a:xfrm>
-            <a:off x="8991295" y="2697480"/>
-            <a:ext cx="2377440" cy="1097280"/>
-          </a:xfrm>
-          <a:prstGeom prst="rect">
-            <a:avLst/>
-          </a:prstGeom>
-          <a:noFill/>
-          <a:ln/>
-        </p:spPr>
-        <p:txBody>
-          <a:bodyPr wrap="square" lIns="0" tIns="0" rIns="0" bIns="0" rtlCol="0" anchor="ctr"/>
-          <a:lstStyle/>
-          <a:p>
-            <a:pPr algn="r" indent="0" marL="0">
-              <a:buNone/>
-            </a:pPr>
-            <a:r>
-              <a:rPr lang="en-US" sz="1500" dirty="0">
-                <a:solidFill>
-                  <a:srgbClr val="98A2B3"/>
-                </a:solidFill>
-              </a:rPr>
-              <a:t>답: ____________</a:t>
-            </a:r>
-            <a:endParaRPr lang="en-US" sz="1500" dirty="0"/>
-          </a:p>
-        </p:txBody>
-      </p:sp>
-      <p:sp>
-        <p:nvSpPr>
-          <p:cNvPr id="12" name="질문_3"/>
-          <p:cNvSpPr/>
-          <p:nvPr/>
-        </p:nvSpPr>
-        <p:spPr>
-          <a:xfrm>
-            <a:off x="548640" y="4023360"/>
-            <a:ext cx="11094415" cy="1097280"/>
-          </a:xfrm>
-          <a:prstGeom prst="roundRect">
-            <a:avLst>
-              <a:gd name="adj" fmla="val 10000"/>
+              <a:gd name="adj" fmla="val 4273"/>
             </a:avLst>
           </a:prstGeom>
           <a:solidFill>
@@ -10779,54 +13065,211 @@
       </p:sp>
       <p:sp>
         <p:nvSpPr>
-          <p:cNvPr id="13" name="Text 11"/>
-          <p:cNvSpPr txBox="1"/>
-          <p:nvPr/>
-        </p:nvSpPr>
-        <p:spPr>
-          <a:xfrm>
-            <a:off x="822960" y="4270248"/>
-            <a:ext cx="822960" cy="603504"/>
+          <p:cNvPr id="15" name="작업후아이콘_3_dot"/>
+          <p:cNvSpPr/>
+          <p:nvPr/>
+        </p:nvSpPr>
+        <p:spPr>
+          <a:xfrm>
+            <a:off x="6507328" y="1691640"/>
+            <a:ext cx="658368" cy="658368"/>
+          </a:xfrm>
+          <a:prstGeom prst="ellipse">
+            <a:avLst/>
+          </a:prstGeom>
+          <a:solidFill>
+            <a:srgbClr val="079455"/>
+          </a:solidFill>
+          <a:ln w="12700">
+            <a:solidFill>
+              <a:srgbClr val="079455"/>
+            </a:solidFill>
+            <a:prstDash val="solid"/>
+          </a:ln>
+        </p:spPr>
+      </p:sp>
+      <p:pic>
+        <p:nvPicPr>
+          <p:cNvPr id="16" name="작업후아이콘_3_icon" descr="preencoded.png">    </p:cNvPr>
+          <p:cNvPicPr>
+            <a:picLocks noChangeAspect="1"/>
+          </p:cNvPicPr>
+          <p:nvPr/>
+        </p:nvPicPr>
+        <p:blipFill>
+          <a:blip r:embed="rId3"/>
+          <a:stretch>
+            <a:fillRect/>
+          </a:stretch>
+        </p:blipFill>
+        <p:spPr>
+          <a:xfrm>
+            <a:off x="6665336" y="1849648"/>
+            <a:ext cx="342351" cy="342351"/>
+          </a:xfrm>
+          <a:prstGeom prst="rect">
+            <a:avLst/>
+          </a:prstGeom>
+        </p:spPr>
+      </p:pic>
+      <p:sp>
+        <p:nvSpPr>
+          <p:cNvPr id="17" name="Text 12"/>
+          <p:cNvSpPr txBox="1"/>
+          <p:nvPr/>
+        </p:nvSpPr>
+        <p:spPr>
+          <a:xfrm>
+            <a:off x="6507328" y="2560320"/>
+            <a:ext cx="2019224" cy="411480"/>
+          </a:xfrm>
+          <a:prstGeom prst="rect">
+            <a:avLst/>
+          </a:prstGeom>
+          <a:noFill/>
+          <a:ln/>
+        </p:spPr>
+        <p:txBody>
+          <a:bodyPr wrap="square" lIns="0" tIns="0" rIns="0" bIns="0" rtlCol="0" anchor="ctr"/>
+          <a:lstStyle/>
+          <a:p>
+            <a:pPr indent="0" marL="0">
+              <a:buNone/>
+            </a:pPr>
+            <a:r>
+              <a:rPr lang="en-US" sz="1800" b="1" dirty="0">
+                <a:solidFill>
+                  <a:schemeClr val="tx2"/>
+                </a:solidFill>
+              </a:rPr>
+              <a:t>정리정돈</a:t>
+            </a:r>
+            <a:endParaRPr lang="en-US" sz="1800" dirty="0"/>
+          </a:p>
+        </p:txBody>
+      </p:sp>
+      <p:sp>
+        <p:nvSpPr>
+          <p:cNvPr id="18" name="Text 13"/>
+          <p:cNvSpPr txBox="1"/>
+          <p:nvPr/>
+        </p:nvSpPr>
+        <p:spPr>
+          <a:xfrm>
+            <a:off x="6507328" y="3063240"/>
+            <a:ext cx="2019224" cy="1280160"/>
+          </a:xfrm>
+          <a:prstGeom prst="rect">
+            <a:avLst/>
+          </a:prstGeom>
+          <a:noFill/>
+          <a:ln/>
+        </p:spPr>
+        <p:txBody>
+          <a:bodyPr wrap="square" lIns="0" tIns="0" rIns="0" bIns="0" rtlCol="0" anchor="t"/>
+          <a:lstStyle/>
+          <a:p>
+            <a:pPr indent="0" marL="0">
+              <a:buNone/>
+            </a:pPr>
+            <a:r>
+              <a:rPr lang="en-US" sz="1400" dirty="0">
+                <a:solidFill>
+                  <a:srgbClr val="475467"/>
+                </a:solidFill>
+              </a:rPr>
+              <a:t>물기·이물 제거, 통로 확보</a:t>
+            </a:r>
+            <a:endParaRPr lang="en-US" sz="1400" dirty="0"/>
+          </a:p>
+        </p:txBody>
+      </p:sp>
+      <p:sp>
+        <p:nvSpPr>
+          <p:cNvPr id="19" name="작업후_4"/>
+          <p:cNvSpPr/>
+          <p:nvPr/>
+        </p:nvSpPr>
+        <p:spPr>
+          <a:xfrm>
+            <a:off x="9075191" y="1371600"/>
+            <a:ext cx="2567864" cy="3108960"/>
           </a:xfrm>
           <a:prstGeom prst="roundRect">
             <a:avLst>
-              <a:gd name="adj" fmla="val 18182"/>
+              <a:gd name="adj" fmla="val 4273"/>
             </a:avLst>
           </a:prstGeom>
           <a:solidFill>
+            <a:srgbClr val="F2F4F7"/>
+          </a:solidFill>
+          <a:ln w="12700">
+            <a:solidFill>
+              <a:srgbClr val="F2F4F7"/>
+            </a:solidFill>
+            <a:prstDash val="solid"/>
+          </a:ln>
+        </p:spPr>
+      </p:sp>
+      <p:sp>
+        <p:nvSpPr>
+          <p:cNvPr id="20" name="작업후아이콘_4_dot"/>
+          <p:cNvSpPr/>
+          <p:nvPr/>
+        </p:nvSpPr>
+        <p:spPr>
+          <a:xfrm>
+            <a:off x="9349511" y="1691640"/>
+            <a:ext cx="658368" cy="658368"/>
+          </a:xfrm>
+          <a:prstGeom prst="ellipse">
+            <a:avLst/>
+          </a:prstGeom>
+          <a:solidFill>
             <a:srgbClr val="FFC400"/>
           </a:solidFill>
-          <a:ln/>
-        </p:spPr>
-        <p:txBody>
-          <a:bodyPr wrap="square" lIns="0" tIns="0" rIns="0" bIns="0" rtlCol="0" anchor="ctr"/>
-          <a:lstStyle/>
-          <a:p>
-            <a:pPr algn="ctr" indent="0" marL="0">
-              <a:buNone/>
-            </a:pPr>
-            <a:r>
-              <a:rPr lang="en-US" sz="2200" b="1" dirty="0">
-                <a:solidFill>
-                  <a:srgbClr val="0E1B2E"/>
-                </a:solidFill>
-              </a:rPr>
-              <a:t>Q3</a:t>
-            </a:r>
-            <a:endParaRPr lang="en-US" sz="2200" dirty="0"/>
-          </a:p>
-        </p:txBody>
-      </p:sp>
-      <p:sp>
-        <p:nvSpPr>
-          <p:cNvPr id="14" name="질문문구_3"/>
-          <p:cNvSpPr txBox="1"/>
-          <p:nvPr/>
-        </p:nvSpPr>
-        <p:spPr>
-          <a:xfrm>
-            <a:off x="1874520" y="4023360"/>
-            <a:ext cx="7253935" cy="1097280"/>
+          <a:ln w="12700">
+            <a:solidFill>
+              <a:srgbClr val="FFC400"/>
+            </a:solidFill>
+            <a:prstDash val="solid"/>
+          </a:ln>
+        </p:spPr>
+      </p:sp>
+      <p:pic>
+        <p:nvPicPr>
+          <p:cNvPr id="21" name="작업후아이콘_4_icon" descr="preencoded.png">    </p:cNvPr>
+          <p:cNvPicPr>
+            <a:picLocks noChangeAspect="1"/>
+          </p:cNvPicPr>
+          <p:nvPr/>
+        </p:nvPicPr>
+        <p:blipFill>
+          <a:blip r:embed="rId4"/>
+          <a:stretch>
+            <a:fillRect/>
+          </a:stretch>
+        </p:blipFill>
+        <p:spPr>
+          <a:xfrm>
+            <a:off x="9507520" y="1849648"/>
+            <a:ext cx="342351" cy="342351"/>
+          </a:xfrm>
+          <a:prstGeom prst="rect">
+            <a:avLst/>
+          </a:prstGeom>
+        </p:spPr>
+      </p:pic>
+      <p:sp>
+        <p:nvSpPr>
+          <p:cNvPr id="22" name="Text 16"/>
+          <p:cNvSpPr txBox="1"/>
+          <p:nvPr/>
+        </p:nvSpPr>
+        <p:spPr>
+          <a:xfrm>
+            <a:off x="9349511" y="2560320"/>
+            <a:ext cx="2019224" cy="411480"/>
           </a:xfrm>
           <a:prstGeom prst="rect">
             <a:avLst/>
@@ -10842,50 +13285,124 @@
               <a:buNone/>
             </a:pPr>
             <a:r>
-              <a:rPr lang="en-US" sz="2000" b="1" dirty="0">
-                <a:solidFill>
-                  <a:srgbClr val="1D2939"/>
-                </a:solidFill>
-              </a:rPr>
-              <a:t>작업 중 끼임이 생기면 가장 먼저 무엇을 하나요?</a:t>
-            </a:r>
-            <a:endParaRPr lang="en-US" sz="2000" dirty="0"/>
-          </a:p>
-        </p:txBody>
-      </p:sp>
-      <p:sp>
-        <p:nvSpPr>
-          <p:cNvPr id="15" name="Text 13"/>
-          <p:cNvSpPr txBox="1"/>
-          <p:nvPr/>
-        </p:nvSpPr>
-        <p:spPr>
-          <a:xfrm>
-            <a:off x="8991295" y="4023360"/>
-            <a:ext cx="2377440" cy="1097280"/>
-          </a:xfrm>
-          <a:prstGeom prst="rect">
-            <a:avLst/>
-          </a:prstGeom>
-          <a:noFill/>
-          <a:ln/>
-        </p:spPr>
-        <p:txBody>
-          <a:bodyPr wrap="square" lIns="0" tIns="0" rIns="0" bIns="0" rtlCol="0" anchor="ctr"/>
-          <a:lstStyle/>
-          <a:p>
-            <a:pPr algn="r" indent="0" marL="0">
-              <a:buNone/>
-            </a:pPr>
-            <a:r>
-              <a:rPr lang="en-US" sz="1500" dirty="0">
-                <a:solidFill>
-                  <a:srgbClr val="98A2B3"/>
-                </a:solidFill>
-              </a:rPr>
-              <a:t>답: ____________</a:t>
-            </a:r>
-            <a:endParaRPr lang="en-US" sz="1500" dirty="0"/>
+              <a:rPr lang="en-US" sz="1800" b="1" dirty="0">
+                <a:solidFill>
+                  <a:schemeClr val="tx2"/>
+                </a:solidFill>
+              </a:rPr>
+              <a:t>이상 보고</a:t>
+            </a:r>
+            <a:endParaRPr lang="en-US" sz="1800" dirty="0"/>
+          </a:p>
+        </p:txBody>
+      </p:sp>
+      <p:sp>
+        <p:nvSpPr>
+          <p:cNvPr id="23" name="Text 17"/>
+          <p:cNvSpPr txBox="1"/>
+          <p:nvPr/>
+        </p:nvSpPr>
+        <p:spPr>
+          <a:xfrm>
+            <a:off x="9349511" y="3063240"/>
+            <a:ext cx="2019224" cy="1280160"/>
+          </a:xfrm>
+          <a:prstGeom prst="rect">
+            <a:avLst/>
+          </a:prstGeom>
+          <a:noFill/>
+          <a:ln/>
+        </p:spPr>
+        <p:txBody>
+          <a:bodyPr wrap="square" lIns="0" tIns="0" rIns="0" bIns="0" rtlCol="0" anchor="t"/>
+          <a:lstStyle/>
+          <a:p>
+            <a:pPr indent="0" marL="0">
+              <a:buNone/>
+            </a:pPr>
+            <a:r>
+              <a:rPr lang="en-US" sz="1400" dirty="0">
+                <a:solidFill>
+                  <a:srgbClr val="475467"/>
+                </a:solidFill>
+              </a:rPr>
+              <a:t>청소 중 발견한 설비 이상·불편 사항을 관리감독자에게 보고</a:t>
+            </a:r>
+            <a:endParaRPr lang="en-US" sz="1400" dirty="0"/>
+          </a:p>
+        </p:txBody>
+      </p:sp>
+      <p:sp>
+        <p:nvSpPr>
+          <p:cNvPr id="24" name="관찰안내"/>
+          <p:cNvSpPr/>
+          <p:nvPr/>
+        </p:nvSpPr>
+        <p:spPr>
+          <a:xfrm>
+            <a:off x="548640" y="4800600"/>
+            <a:ext cx="11094415" cy="1051560"/>
+          </a:xfrm>
+          <a:prstGeom prst="roundRect">
+            <a:avLst>
+              <a:gd name="adj" fmla="val 10435"/>
+            </a:avLst>
+          </a:prstGeom>
+          <a:solidFill>
+            <a:srgbClr val="FFF6D6"/>
+          </a:solidFill>
+          <a:ln w="12700">
+            <a:solidFill>
+              <a:srgbClr val="FFF6D6"/>
+            </a:solidFill>
+            <a:prstDash val="solid"/>
+          </a:ln>
+        </p:spPr>
+      </p:sp>
+      <p:sp>
+        <p:nvSpPr>
+          <p:cNvPr id="25" name="Text 19"/>
+          <p:cNvSpPr txBox="1"/>
+          <p:nvPr/>
+        </p:nvSpPr>
+        <p:spPr>
+          <a:xfrm>
+            <a:off x="822960" y="4846320"/>
+            <a:ext cx="10545775" cy="960120"/>
+          </a:xfrm>
+          <a:prstGeom prst="rect">
+            <a:avLst/>
+          </a:prstGeom>
+          <a:noFill/>
+          <a:ln/>
+        </p:spPr>
+        <p:txBody>
+          <a:bodyPr wrap="square" lIns="0" tIns="0" rIns="0" bIns="0" rtlCol="0" anchor="ctr"/>
+          <a:lstStyle/>
+          <a:p>
+            <a:pPr indent="0" marL="0">
+              <a:buNone/>
+            </a:pPr>
+            <a:r>
+              <a:rPr lang="en-US" sz="1400" b="1" dirty="0">
+                <a:solidFill>
+                  <a:schemeClr val="tx2"/>
+                </a:solidFill>
+              </a:rPr>
+              <a:t>관리감독자는  </a:t>
+            </a:r>
+            <a:pPr indent="0" marL="0">
+              <a:buNone/>
+            </a:pPr>
+            <a:r>
+              <a:rPr lang="en-US" sz="1400" dirty="0">
+                <a:solidFill>
+                  <a:srgbClr val="475467"/>
+                </a:solidFill>
+              </a:rPr>
+              <a:t>작업하는 모습을 가끔 직접 보고 절차서의 '현장 관찰·검토 기록'에 남깁니다. 절차와 실제가 다르면 절차가 현실적인지 먼저 보고, 고친 내용은 다시 교육합니다.</a:t>
+            </a:r>
+            <a:endParaRPr lang="en-US" sz="1400" dirty="0"/>
           </a:p>
         </p:txBody>
       </p:sp>
